--- a/client/public/Permit_to_Work_PTW_Summary.pptx
+++ b/client/public/Permit_to_Work_PTW_Summary.pptx
@@ -3094,77 +3094,23 @@
       <p:grpSpPr/>
       <p:sp>
         <p:nvSpPr>
-          <p:cNvPr id="2" name="TextBox 1"/>
-          <p:cNvSpPr txBox="1"/>
-          <p:nvPr/>
-        </p:nvSpPr>
-        <p:spPr>
-          <a:xfrm>
-            <a:off x="731520" y="457200"/>
-            <a:ext cx="10725912" cy="1097280"/>
+          <p:cNvPr id="2" name="Rectangle 1"/>
+          <p:cNvSpPr/>
+          <p:nvPr/>
+        </p:nvSpPr>
+        <p:spPr>
+          <a:xfrm>
+            <a:off x="0" y="0"/>
+            <a:ext cx="12191695" cy="6858000"/>
           </a:xfrm>
           <a:prstGeom prst="rect">
             <a:avLst/>
           </a:prstGeom>
-          <a:noFill/>
-        </p:spPr>
-        <p:txBody>
-          <a:bodyPr wrap="square" lIns="0" tIns="0" rIns="0" bIns="0">
-            <a:spAutoFit/>
-          </a:bodyPr>
-          <a:lstStyle/>
-          <a:p>
-            <a:pPr>
-              <a:spcAft>
-                <a:spcPts val="400"/>
-              </a:spcAft>
-              <a:defRPr sz="2800" b="1">
-                <a:solidFill>
-                  <a:srgbClr val="16213E"/>
-                </a:solidFill>
-                <a:latin typeface="Calibri"/>
-              </a:defRPr>
-            </a:pPr>
-            <a:r>
-              <a:t>What is the Application All About?</a:t>
-            </a:r>
-          </a:p>
-          <a:p>
-            <a:pPr>
-              <a:defRPr sz="1400">
-                <a:solidFill>
-                  <a:srgbClr val="64748B"/>
-                </a:solidFill>
-                <a:latin typeface="Calibri"/>
-              </a:defRPr>
-            </a:pPr>
-            <a:r>
-              <a:t>Permit to Work (PTW) Core Purpose &amp; Authorized Personnel</a:t>
-            </a:r>
-          </a:p>
-        </p:txBody>
-      </p:sp>
-      <p:sp>
-        <p:nvSpPr>
-          <p:cNvPr id="3" name="Rounded Rectangle 2"/>
-          <p:cNvSpPr/>
-          <p:nvPr/>
-        </p:nvSpPr>
-        <p:spPr>
-          <a:xfrm>
-            <a:off x="731520" y="1691640"/>
-            <a:ext cx="10725912" cy="1051560"/>
-          </a:xfrm>
-          <a:prstGeom prst="roundRect">
-            <a:avLst/>
-          </a:prstGeom>
           <a:solidFill>
-            <a:srgbClr val="EEF2FF"/>
+            <a:srgbClr val="F8FAFC"/>
           </a:solidFill>
-          <a:ln w="19050">
-            <a:solidFill>
-              <a:srgbClr val="1E56A0"/>
-            </a:solidFill>
+          <a:ln>
+            <a:noFill/>
           </a:ln>
         </p:spPr>
         <p:style>
@@ -3182,57 +3128,32 @@
           </a:fontRef>
         </p:style>
         <p:txBody>
-          <a:bodyPr rtlCol="0" anchor="ctr" wrap="square"/>
-          <a:lstStyle/>
-          <a:p>
-            <a:pPr algn="ctr">
-              <a:defRPr sz="2100" b="1">
-                <a:solidFill>
-                  <a:srgbClr val="1E56A0"/>
-                </a:solidFill>
-                <a:latin typeface="Calibri"/>
-              </a:defRPr>
-            </a:pPr>
-            <a:r>
-              <a:t>PTW = Permission  +  Hazard Identification  +  Safety Controls  +  Sign-Off</a:t>
-            </a:r>
-          </a:p>
-          <a:p>
-            <a:pPr algn="ctr">
-              <a:defRPr sz="1400">
-                <a:solidFill>
-                  <a:srgbClr val="1E293B"/>
-                </a:solidFill>
-                <a:latin typeface="Calibri"/>
-              </a:defRPr>
-            </a:pPr>
-            <a:r>
-              <a:t>Official formal authorization required before carrying out any hazardous job in an operational facility.</a:t>
-            </a:r>
-          </a:p>
-        </p:txBody>
-      </p:sp>
-      <p:sp>
-        <p:nvSpPr>
-          <p:cNvPr id="4" name="Rounded Rectangle 3"/>
+          <a:bodyPr rtlCol="0" anchor="ctr"/>
+          <a:lstStyle/>
+          <a:p>
+            <a:pPr algn="ctr"/>
+          </a:p>
+        </p:txBody>
+      </p:sp>
+      <p:sp>
+        <p:nvSpPr>
+          <p:cNvPr id="3" name="Rectangle 2"/>
           <p:cNvSpPr/>
           <p:nvPr/>
         </p:nvSpPr>
         <p:spPr>
           <a:xfrm>
-            <a:off x="731520" y="2926080"/>
-            <a:ext cx="2560320" cy="3474720"/>
-          </a:xfrm>
-          <a:prstGeom prst="roundRect">
+            <a:off x="731520" y="365760"/>
+            <a:ext cx="10728655" cy="36576"/>
+          </a:xfrm>
+          <a:prstGeom prst="rect">
             <a:avLst/>
           </a:prstGeom>
           <a:solidFill>
-            <a:srgbClr val="F8FAFC"/>
+            <a:srgbClr val="0D9488"/>
           </a:solidFill>
-          <a:ln w="12700">
-            <a:solidFill>
-              <a:srgbClr val="E2E8F0"/>
-            </a:solidFill>
+          <a:ln>
+            <a:noFill/>
           </a:ln>
         </p:spPr>
         <p:style>
@@ -3250,86 +3171,61 @@
           </a:fontRef>
         </p:style>
         <p:txBody>
-          <a:bodyPr rtlCol="0" anchor="ctr" wrap="square" lIns="182880" tIns="228600" rIns="182880"/>
-          <a:lstStyle/>
-          <a:p>
-            <a:pPr algn="ctr">
-              <a:spcAft>
-                <a:spcPts val="200"/>
-              </a:spcAft>
-              <a:defRPr sz="1600" b="1">
-                <a:solidFill>
-                  <a:srgbClr val="1E56A0"/>
-                </a:solidFill>
-                <a:latin typeface="Calibri"/>
-              </a:defRPr>
-            </a:pPr>
-            <a:r>
-              <a:t>PERMIT RECEIVER</a:t>
-            </a:r>
-          </a:p>
-          <a:p>
-            <a:pPr>
-              <a:spcAft>
-                <a:spcPts val="1200"/>
-              </a:spcAft>
-              <a:defRPr sz="1300" b="1">
-                <a:solidFill>
-                  <a:srgbClr val="D97706"/>
-                </a:solidFill>
-                <a:latin typeface="Calibri"/>
-              </a:defRPr>
-            </a:pPr>
-            <a:r>
-              <a:t>Field Supervisor</a:t>
-            </a:r>
-          </a:p>
-          <a:p>
-            <a:pPr>
-              <a:spcAft>
-                <a:spcPts val="800"/>
-              </a:spcAft>
-              <a:defRPr sz="1500">
-                <a:solidFill>
-                  <a:srgbClr val="1E293B"/>
-                </a:solidFill>
-                <a:latin typeface="Calibri"/>
-              </a:defRPr>
-            </a:pPr>
-            <a:r>
-              <a:t>• Requests permit with JSA</a:t>
-            </a:r>
-          </a:p>
-          <a:p>
-            <a:pPr>
-              <a:spcAft>
-                <a:spcPts val="800"/>
-              </a:spcAft>
-              <a:defRPr sz="1500">
-                <a:solidFill>
-                  <a:srgbClr val="1E293B"/>
-                </a:solidFill>
-                <a:latin typeface="Calibri"/>
-              </a:defRPr>
-            </a:pPr>
-            <a:r>
-              <a:t>• Briefs field work crew</a:t>
-            </a:r>
-          </a:p>
-          <a:p>
-            <a:pPr>
-              <a:spcAft>
-                <a:spcPts val="800"/>
-              </a:spcAft>
-              <a:defRPr sz="1500">
-                <a:solidFill>
-                  <a:srgbClr val="1E293B"/>
-                </a:solidFill>
-                <a:latin typeface="Calibri"/>
-              </a:defRPr>
-            </a:pPr>
-            <a:r>
-              <a:t>• Stays at site continuously</a:t>
+          <a:bodyPr rtlCol="0" anchor="ctr"/>
+          <a:lstStyle/>
+          <a:p>
+            <a:pPr algn="ctr"/>
+          </a:p>
+        </p:txBody>
+      </p:sp>
+      <p:sp>
+        <p:nvSpPr>
+          <p:cNvPr id="4" name="TextBox 3"/>
+          <p:cNvSpPr txBox="1"/>
+          <p:nvPr/>
+        </p:nvSpPr>
+        <p:spPr>
+          <a:xfrm>
+            <a:off x="731520" y="502920"/>
+            <a:ext cx="10728655" cy="960120"/>
+          </a:xfrm>
+          <a:prstGeom prst="rect">
+            <a:avLst/>
+          </a:prstGeom>
+          <a:noFill/>
+        </p:spPr>
+        <p:txBody>
+          <a:bodyPr wrap="square" lIns="0" tIns="0" rIns="0" bIns="0">
+            <a:spAutoFit/>
+          </a:bodyPr>
+          <a:lstStyle/>
+          <a:p>
+            <a:pPr>
+              <a:defRPr sz="3200" b="1">
+                <a:solidFill>
+                  <a:srgbClr val="0F1E36"/>
+                </a:solidFill>
+                <a:latin typeface="Calibri"/>
+              </a:defRPr>
+            </a:pPr>
+            <a:r>
+              <a:t>1. What is the Application About?</a:t>
+            </a:r>
+          </a:p>
+          <a:p>
+            <a:pPr>
+              <a:spcBef>
+                <a:spcPts val="300"/>
+              </a:spcBef>
+              <a:defRPr sz="1400">
+                <a:solidFill>
+                  <a:srgbClr val="64748B"/>
+                </a:solidFill>
+                <a:latin typeface="Calibri"/>
+              </a:defRPr>
+            </a:pPr>
+            <a:r>
+              <a:t>Key Message: A centralized system to authorize, control, and track work from start to finish.</a:t>
             </a:r>
           </a:p>
         </p:txBody>
@@ -3342,19 +3238,17 @@
         </p:nvSpPr>
         <p:spPr>
           <a:xfrm>
-            <a:off x="3456432" y="2926080"/>
-            <a:ext cx="2560320" cy="3474720"/>
+            <a:off x="731520" y="1645920"/>
+            <a:ext cx="10728655" cy="594360"/>
           </a:xfrm>
           <a:prstGeom prst="roundRect">
             <a:avLst/>
           </a:prstGeom>
           <a:solidFill>
-            <a:srgbClr val="F8FAFC"/>
+            <a:srgbClr val="0F1E36"/>
           </a:solidFill>
-          <a:ln w="12700">
-            <a:solidFill>
-              <a:srgbClr val="E2E8F0"/>
-            </a:solidFill>
+          <a:ln>
+            <a:noFill/>
           </a:ln>
         </p:spPr>
         <p:style>
@@ -3372,86 +3266,19 @@
           </a:fontRef>
         </p:style>
         <p:txBody>
-          <a:bodyPr rtlCol="0" anchor="ctr" wrap="square" lIns="182880" tIns="228600" rIns="182880"/>
+          <a:bodyPr rtlCol="0" anchor="ctr"/>
           <a:lstStyle/>
           <a:p>
             <a:pPr algn="ctr">
-              <a:spcAft>
-                <a:spcPts val="200"/>
-              </a:spcAft>
-              <a:defRPr sz="1600" b="1">
-                <a:solidFill>
-                  <a:srgbClr val="1E56A0"/>
-                </a:solidFill>
-                <a:latin typeface="Calibri"/>
-              </a:defRPr>
-            </a:pPr>
-            <a:r>
-              <a:t>PERMIT ISSUER</a:t>
-            </a:r>
-          </a:p>
-          <a:p>
-            <a:pPr>
-              <a:spcAft>
-                <a:spcPts val="1200"/>
-              </a:spcAft>
-              <a:defRPr sz="1300" b="1">
-                <a:solidFill>
-                  <a:srgbClr val="D97706"/>
-                </a:solidFill>
-                <a:latin typeface="Calibri"/>
-              </a:defRPr>
-            </a:pPr>
-            <a:r>
-              <a:t>Area Custodian</a:t>
-            </a:r>
-          </a:p>
-          <a:p>
-            <a:pPr>
-              <a:spcAft>
-                <a:spcPts val="800"/>
-              </a:spcAft>
-              <a:defRPr sz="1500">
-                <a:solidFill>
-                  <a:srgbClr val="1E293B"/>
-                </a:solidFill>
-                <a:latin typeface="Calibri"/>
-              </a:defRPr>
-            </a:pPr>
-            <a:r>
-              <a:t>• Verifies site isolation</a:t>
-            </a:r>
-          </a:p>
-          <a:p>
-            <a:pPr>
-              <a:spcAft>
-                <a:spcPts val="800"/>
-              </a:spcAft>
-              <a:defRPr sz="1500">
-                <a:solidFill>
-                  <a:srgbClr val="1E293B"/>
-                </a:solidFill>
-                <a:latin typeface="Calibri"/>
-              </a:defRPr>
-            </a:pPr>
-            <a:r>
-              <a:t>• Tests gas levels &amp; limits</a:t>
-            </a:r>
-          </a:p>
-          <a:p>
-            <a:pPr>
-              <a:spcAft>
-                <a:spcPts val="800"/>
-              </a:spcAft>
-              <a:defRPr sz="1500">
-                <a:solidFill>
-                  <a:srgbClr val="1E293B"/>
-                </a:solidFill>
-                <a:latin typeface="Calibri"/>
-              </a:defRPr>
-            </a:pPr>
-            <a:r>
-              <a:t>• Authorizes safe start</a:t>
+              <a:defRPr sz="1400" b="1">
+                <a:solidFill>
+                  <a:srgbClr val="FFFFFF"/>
+                </a:solidFill>
+                <a:latin typeface="Calibri"/>
+              </a:defRPr>
+            </a:pPr>
+            <a:r>
+              <a:t>Work Authorization   +   Safety Control   +   Operational Visibility   +   Accountability   +   Traceability</a:t>
             </a:r>
           </a:p>
         </p:txBody>
@@ -3464,16 +3291,16 @@
         </p:nvSpPr>
         <p:spPr>
           <a:xfrm>
-            <a:off x="6181344" y="2926080"/>
-            <a:ext cx="2560320" cy="3474720"/>
+            <a:off x="731520" y="2423160"/>
+            <a:ext cx="3429000" cy="2834640"/>
           </a:xfrm>
           <a:prstGeom prst="roundRect">
             <a:avLst/>
           </a:prstGeom>
           <a:solidFill>
-            <a:srgbClr val="F8FAFC"/>
+            <a:srgbClr val="FFFFFF"/>
           </a:solidFill>
-          <a:ln w="12700">
+          <a:ln w="19050">
             <a:solidFill>
               <a:srgbClr val="E2E8F0"/>
             </a:solidFill>
@@ -3494,111 +3321,32 @@
           </a:fontRef>
         </p:style>
         <p:txBody>
-          <a:bodyPr rtlCol="0" anchor="ctr" wrap="square" lIns="182880" tIns="228600" rIns="182880"/>
-          <a:lstStyle/>
-          <a:p>
-            <a:pPr algn="ctr">
-              <a:spcAft>
-                <a:spcPts val="200"/>
-              </a:spcAft>
-              <a:defRPr sz="1600" b="1">
-                <a:solidFill>
-                  <a:srgbClr val="1E56A0"/>
-                </a:solidFill>
-                <a:latin typeface="Calibri"/>
-              </a:defRPr>
-            </a:pPr>
-            <a:r>
-              <a:t>PTW COORDINATOR</a:t>
-            </a:r>
-          </a:p>
-          <a:p>
-            <a:pPr>
-              <a:spcAft>
-                <a:spcPts val="1200"/>
-              </a:spcAft>
-              <a:defRPr sz="1300" b="1">
-                <a:solidFill>
-                  <a:srgbClr val="D97706"/>
-                </a:solidFill>
-                <a:latin typeface="Calibri"/>
-              </a:defRPr>
-            </a:pPr>
-            <a:r>
-              <a:t>Operations Lead</a:t>
-            </a:r>
-          </a:p>
-          <a:p>
-            <a:pPr>
-              <a:spcAft>
-                <a:spcPts val="800"/>
-              </a:spcAft>
-              <a:defRPr sz="1500">
-                <a:solidFill>
-                  <a:srgbClr val="1E293B"/>
-                </a:solidFill>
-                <a:latin typeface="Calibri"/>
-              </a:defRPr>
-            </a:pPr>
-            <a:r>
-              <a:t>• Registers all active jobs</a:t>
-            </a:r>
-          </a:p>
-          <a:p>
-            <a:pPr>
-              <a:spcAft>
-                <a:spcPts val="800"/>
-              </a:spcAft>
-              <a:defRPr sz="1500">
-                <a:solidFill>
-                  <a:srgbClr val="1E293B"/>
-                </a:solidFill>
-                <a:latin typeface="Calibri"/>
-              </a:defRPr>
-            </a:pPr>
-            <a:r>
-              <a:t>• Prevents site conflicts</a:t>
-            </a:r>
-          </a:p>
-          <a:p>
-            <a:pPr>
-              <a:spcAft>
-                <a:spcPts val="800"/>
-              </a:spcAft>
-              <a:defRPr sz="1500">
-                <a:solidFill>
-                  <a:srgbClr val="1E293B"/>
-                </a:solidFill>
-                <a:latin typeface="Calibri"/>
-              </a:defRPr>
-            </a:pPr>
-            <a:r>
-              <a:t>• Tracks 24-hr logbook</a:t>
-            </a:r>
-          </a:p>
-        </p:txBody>
-      </p:sp>
-      <p:sp>
-        <p:nvSpPr>
-          <p:cNvPr id="7" name="Rounded Rectangle 6"/>
+          <a:bodyPr rtlCol="0" anchor="ctr"/>
+          <a:lstStyle/>
+          <a:p>
+            <a:pPr algn="ctr"/>
+          </a:p>
+        </p:txBody>
+      </p:sp>
+      <p:sp>
+        <p:nvSpPr>
+          <p:cNvPr id="7" name="Rectangle 6"/>
           <p:cNvSpPr/>
           <p:nvPr/>
         </p:nvSpPr>
         <p:spPr>
           <a:xfrm>
-            <a:off x="8906256" y="2926080"/>
-            <a:ext cx="2560320" cy="3474720"/>
-          </a:xfrm>
-          <a:prstGeom prst="roundRect">
+            <a:off x="731520" y="2423160"/>
+            <a:ext cx="3429000" cy="457200"/>
+          </a:xfrm>
+          <a:prstGeom prst="rect">
             <a:avLst/>
           </a:prstGeom>
           <a:solidFill>
-            <a:srgbClr val="F8FAFC"/>
+            <a:srgbClr val="0D9488"/>
           </a:solidFill>
-          <a:ln w="12700">
-            <a:solidFill>
-              <a:srgbClr val="E2E8F0"/>
-            </a:solidFill>
+          <a:ln>
+            <a:noFill/>
           </a:ln>
         </p:spPr>
         <p:style>
@@ -3616,86 +3364,634 @@
           </a:fontRef>
         </p:style>
         <p:txBody>
-          <a:bodyPr rtlCol="0" anchor="ctr" wrap="square" lIns="182880" tIns="228600" rIns="182880"/>
+          <a:bodyPr rtlCol="0" anchor="ctr"/>
           <a:lstStyle/>
           <a:p>
             <a:pPr algn="ctr">
+              <a:defRPr sz="1400" b="1">
+                <a:solidFill>
+                  <a:srgbClr val="FFFFFF"/>
+                </a:solidFill>
+                <a:latin typeface="Calibri"/>
+              </a:defRPr>
+            </a:pPr>
+            <a:r>
+              <a:t>AUTHORIZE</a:t>
+            </a:r>
+          </a:p>
+        </p:txBody>
+      </p:sp>
+      <p:sp>
+        <p:nvSpPr>
+          <p:cNvPr id="8" name="TextBox 7"/>
+          <p:cNvSpPr txBox="1"/>
+          <p:nvPr/>
+        </p:nvSpPr>
+        <p:spPr>
+          <a:xfrm>
+            <a:off x="960120" y="3017520"/>
+            <a:ext cx="2971800" cy="2103120"/>
+          </a:xfrm>
+          <a:prstGeom prst="rect">
+            <a:avLst/>
+          </a:prstGeom>
+          <a:noFill/>
+        </p:spPr>
+        <p:txBody>
+          <a:bodyPr wrap="square">
+            <a:spAutoFit/>
+          </a:bodyPr>
+          <a:lstStyle/>
+          <a:p>
+            <a:pPr>
               <a:spcAft>
-                <a:spcPts val="200"/>
+                <a:spcPts val="700"/>
               </a:spcAft>
-              <a:defRPr sz="1600" b="1">
-                <a:solidFill>
-                  <a:srgbClr val="1E56A0"/>
-                </a:solidFill>
-                <a:latin typeface="Calibri"/>
-              </a:defRPr>
-            </a:pPr>
-            <a:r>
-              <a:t>EHS OFFICER</a:t>
+              <a:defRPr sz="1200">
+                <a:solidFill>
+                  <a:srgbClr val="334155"/>
+                </a:solidFill>
+                <a:latin typeface="Calibri"/>
+              </a:defRPr>
+            </a:pPr>
+            <a:r>
+              <a:t>✔  Formal Permit Creation</a:t>
             </a:r>
           </a:p>
           <a:p>
             <a:pPr>
               <a:spcAft>
-                <a:spcPts val="1200"/>
+                <a:spcPts val="700"/>
               </a:spcAft>
-              <a:defRPr sz="1300" b="1">
-                <a:solidFill>
-                  <a:srgbClr val="D97706"/>
-                </a:solidFill>
-                <a:latin typeface="Calibri"/>
-              </a:defRPr>
-            </a:pPr>
-            <a:r>
-              <a:t>Safety Advisor</a:t>
+              <a:defRPr sz="1200">
+                <a:solidFill>
+                  <a:srgbClr val="334155"/>
+                </a:solidFill>
+                <a:latin typeface="Calibri"/>
+              </a:defRPr>
+            </a:pPr>
+            <a:r>
+              <a:t>✔  Structured Approval Queue</a:t>
             </a:r>
           </a:p>
           <a:p>
             <a:pPr>
               <a:spcAft>
-                <a:spcPts val="800"/>
+                <a:spcPts val="700"/>
               </a:spcAft>
-              <a:defRPr sz="1500">
-                <a:solidFill>
-                  <a:srgbClr val="1E293B"/>
-                </a:solidFill>
-                <a:latin typeface="Calibri"/>
-              </a:defRPr>
-            </a:pPr>
-            <a:r>
-              <a:t>• Audits critical safety controls</a:t>
+              <a:defRPr sz="1200">
+                <a:solidFill>
+                  <a:srgbClr val="334155"/>
+                </a:solidFill>
+                <a:latin typeface="Calibri"/>
+              </a:defRPr>
+            </a:pPr>
+            <a:r>
+              <a:t>✔  Active Work Execution</a:t>
             </a:r>
           </a:p>
           <a:p>
             <a:pPr>
               <a:spcAft>
-                <a:spcPts val="800"/>
+                <a:spcPts val="700"/>
               </a:spcAft>
-              <a:defRPr sz="1500">
-                <a:solidFill>
-                  <a:srgbClr val="1E293B"/>
-                </a:solidFill>
-                <a:latin typeface="Calibri"/>
-              </a:defRPr>
-            </a:pPr>
-            <a:r>
-              <a:t>• Endorses high-risk permits</a:t>
+              <a:defRPr sz="1200">
+                <a:solidFill>
+                  <a:srgbClr val="334155"/>
+                </a:solidFill>
+                <a:latin typeface="Calibri"/>
+              </a:defRPr>
+            </a:pPr>
+            <a:r>
+              <a:t>✔  Completion Evidence Upload</a:t>
             </a:r>
           </a:p>
           <a:p>
             <a:pPr>
               <a:spcAft>
-                <a:spcPts val="800"/>
+                <a:spcPts val="700"/>
               </a:spcAft>
-              <a:defRPr sz="1500">
-                <a:solidFill>
-                  <a:srgbClr val="1E293B"/>
-                </a:solidFill>
-                <a:latin typeface="Calibri"/>
-              </a:defRPr>
-            </a:pPr>
-            <a:r>
-              <a:t>• Performs random spot checks</a:t>
+              <a:defRPr sz="1200">
+                <a:solidFill>
+                  <a:srgbClr val="334155"/>
+                </a:solidFill>
+                <a:latin typeface="Calibri"/>
+              </a:defRPr>
+            </a:pPr>
+            <a:r>
+              <a:t>✔  Safe Work Order Closure</a:t>
+            </a:r>
+          </a:p>
+        </p:txBody>
+      </p:sp>
+      <p:sp>
+        <p:nvSpPr>
+          <p:cNvPr id="9" name="Rounded Rectangle 8"/>
+          <p:cNvSpPr/>
+          <p:nvPr/>
+        </p:nvSpPr>
+        <p:spPr>
+          <a:xfrm>
+            <a:off x="4379976" y="2423160"/>
+            <a:ext cx="3429000" cy="2834640"/>
+          </a:xfrm>
+          <a:prstGeom prst="roundRect">
+            <a:avLst/>
+          </a:prstGeom>
+          <a:solidFill>
+            <a:srgbClr val="FFFFFF"/>
+          </a:solidFill>
+          <a:ln w="19050">
+            <a:solidFill>
+              <a:srgbClr val="E2E8F0"/>
+            </a:solidFill>
+          </a:ln>
+        </p:spPr>
+        <p:style>
+          <a:lnRef idx="1">
+            <a:schemeClr val="accent1"/>
+          </a:lnRef>
+          <a:fillRef idx="3">
+            <a:schemeClr val="accent1"/>
+          </a:fillRef>
+          <a:effectRef idx="2">
+            <a:schemeClr val="accent1"/>
+          </a:effectRef>
+          <a:fontRef idx="minor">
+            <a:schemeClr val="lt1"/>
+          </a:fontRef>
+        </p:style>
+        <p:txBody>
+          <a:bodyPr rtlCol="0" anchor="ctr"/>
+          <a:lstStyle/>
+          <a:p>
+            <a:pPr algn="ctr"/>
+          </a:p>
+        </p:txBody>
+      </p:sp>
+      <p:sp>
+        <p:nvSpPr>
+          <p:cNvPr id="10" name="Rectangle 9"/>
+          <p:cNvSpPr/>
+          <p:nvPr/>
+        </p:nvSpPr>
+        <p:spPr>
+          <a:xfrm>
+            <a:off x="4379976" y="2423160"/>
+            <a:ext cx="3429000" cy="457200"/>
+          </a:xfrm>
+          <a:prstGeom prst="rect">
+            <a:avLst/>
+          </a:prstGeom>
+          <a:solidFill>
+            <a:srgbClr val="1E3A66"/>
+          </a:solidFill>
+          <a:ln>
+            <a:noFill/>
+          </a:ln>
+        </p:spPr>
+        <p:style>
+          <a:lnRef idx="1">
+            <a:schemeClr val="accent1"/>
+          </a:lnRef>
+          <a:fillRef idx="3">
+            <a:schemeClr val="accent1"/>
+          </a:fillRef>
+          <a:effectRef idx="2">
+            <a:schemeClr val="accent1"/>
+          </a:effectRef>
+          <a:fontRef idx="minor">
+            <a:schemeClr val="lt1"/>
+          </a:fontRef>
+        </p:style>
+        <p:txBody>
+          <a:bodyPr rtlCol="0" anchor="ctr"/>
+          <a:lstStyle/>
+          <a:p>
+            <a:pPr algn="ctr">
+              <a:defRPr sz="1400" b="1">
+                <a:solidFill>
+                  <a:srgbClr val="FFFFFF"/>
+                </a:solidFill>
+                <a:latin typeface="Calibri"/>
+              </a:defRPr>
+            </a:pPr>
+            <a:r>
+              <a:t>CONTROL</a:t>
+            </a:r>
+          </a:p>
+        </p:txBody>
+      </p:sp>
+      <p:sp>
+        <p:nvSpPr>
+          <p:cNvPr id="11" name="TextBox 10"/>
+          <p:cNvSpPr txBox="1"/>
+          <p:nvPr/>
+        </p:nvSpPr>
+        <p:spPr>
+          <a:xfrm>
+            <a:off x="4608576" y="3017520"/>
+            <a:ext cx="2971800" cy="2103120"/>
+          </a:xfrm>
+          <a:prstGeom prst="rect">
+            <a:avLst/>
+          </a:prstGeom>
+          <a:noFill/>
+        </p:spPr>
+        <p:txBody>
+          <a:bodyPr wrap="square">
+            <a:spAutoFit/>
+          </a:bodyPr>
+          <a:lstStyle/>
+          <a:p>
+            <a:pPr>
+              <a:spcAft>
+                <a:spcPts val="700"/>
+              </a:spcAft>
+              <a:defRPr sz="1200">
+                <a:solidFill>
+                  <a:srgbClr val="334155"/>
+                </a:solidFill>
+                <a:latin typeface="Calibri"/>
+              </a:defRPr>
+            </a:pPr>
+            <a:r>
+              <a:t>✔  LOTOTO (Energy Isolation)</a:t>
+            </a:r>
+          </a:p>
+          <a:p>
+            <a:pPr>
+              <a:spcAft>
+                <a:spcPts val="700"/>
+              </a:spcAft>
+              <a:defRPr sz="1200">
+                <a:solidFill>
+                  <a:srgbClr val="334155"/>
+                </a:solidFill>
+                <a:latin typeface="Calibri"/>
+              </a:defRPr>
+            </a:pPr>
+            <a:r>
+              <a:t>✔  Mandatory Safety Controls</a:t>
+            </a:r>
+          </a:p>
+          <a:p>
+            <a:pPr>
+              <a:spcAft>
+                <a:spcPts val="700"/>
+              </a:spcAft>
+              <a:defRPr sz="1200">
+                <a:solidFill>
+                  <a:srgbClr val="334155"/>
+                </a:solidFill>
+                <a:latin typeface="Calibri"/>
+              </a:defRPr>
+            </a:pPr>
+            <a:r>
+              <a:t>✔  Pre-Task Safety Checklists</a:t>
+            </a:r>
+          </a:p>
+          <a:p>
+            <a:pPr>
+              <a:spcAft>
+                <a:spcPts val="700"/>
+              </a:spcAft>
+              <a:defRPr sz="1200">
+                <a:solidFill>
+                  <a:srgbClr val="334155"/>
+                </a:solidFill>
+                <a:latin typeface="Calibri"/>
+              </a:defRPr>
+            </a:pPr>
+            <a:r>
+              <a:t>✔  Work Suspension Capability</a:t>
+            </a:r>
+          </a:p>
+          <a:p>
+            <a:pPr>
+              <a:spcAft>
+                <a:spcPts val="700"/>
+              </a:spcAft>
+              <a:defRPr sz="1200">
+                <a:solidFill>
+                  <a:srgbClr val="334155"/>
+                </a:solidFill>
+                <a:latin typeface="Calibri"/>
+              </a:defRPr>
+            </a:pPr>
+            <a:r>
+              <a:t>✔  Handback &amp; Site Verification</a:t>
+            </a:r>
+          </a:p>
+        </p:txBody>
+      </p:sp>
+      <p:sp>
+        <p:nvSpPr>
+          <p:cNvPr id="12" name="Rounded Rectangle 11"/>
+          <p:cNvSpPr/>
+          <p:nvPr/>
+        </p:nvSpPr>
+        <p:spPr>
+          <a:xfrm>
+            <a:off x="8028432" y="2423160"/>
+            <a:ext cx="3429000" cy="2834640"/>
+          </a:xfrm>
+          <a:prstGeom prst="roundRect">
+            <a:avLst/>
+          </a:prstGeom>
+          <a:solidFill>
+            <a:srgbClr val="FFFFFF"/>
+          </a:solidFill>
+          <a:ln w="19050">
+            <a:solidFill>
+              <a:srgbClr val="E2E8F0"/>
+            </a:solidFill>
+          </a:ln>
+        </p:spPr>
+        <p:style>
+          <a:lnRef idx="1">
+            <a:schemeClr val="accent1"/>
+          </a:lnRef>
+          <a:fillRef idx="3">
+            <a:schemeClr val="accent1"/>
+          </a:fillRef>
+          <a:effectRef idx="2">
+            <a:schemeClr val="accent1"/>
+          </a:effectRef>
+          <a:fontRef idx="minor">
+            <a:schemeClr val="lt1"/>
+          </a:fontRef>
+        </p:style>
+        <p:txBody>
+          <a:bodyPr rtlCol="0" anchor="ctr"/>
+          <a:lstStyle/>
+          <a:p>
+            <a:pPr algn="ctr"/>
+          </a:p>
+        </p:txBody>
+      </p:sp>
+      <p:sp>
+        <p:nvSpPr>
+          <p:cNvPr id="13" name="Rectangle 12"/>
+          <p:cNvSpPr/>
+          <p:nvPr/>
+        </p:nvSpPr>
+        <p:spPr>
+          <a:xfrm>
+            <a:off x="8028432" y="2423160"/>
+            <a:ext cx="3429000" cy="457200"/>
+          </a:xfrm>
+          <a:prstGeom prst="rect">
+            <a:avLst/>
+          </a:prstGeom>
+          <a:solidFill>
+            <a:srgbClr val="0D9488"/>
+          </a:solidFill>
+          <a:ln>
+            <a:noFill/>
+          </a:ln>
+        </p:spPr>
+        <p:style>
+          <a:lnRef idx="1">
+            <a:schemeClr val="accent1"/>
+          </a:lnRef>
+          <a:fillRef idx="3">
+            <a:schemeClr val="accent1"/>
+          </a:fillRef>
+          <a:effectRef idx="2">
+            <a:schemeClr val="accent1"/>
+          </a:effectRef>
+          <a:fontRef idx="minor">
+            <a:schemeClr val="lt1"/>
+          </a:fontRef>
+        </p:style>
+        <p:txBody>
+          <a:bodyPr rtlCol="0" anchor="ctr"/>
+          <a:lstStyle/>
+          <a:p>
+            <a:pPr algn="ctr">
+              <a:defRPr sz="1400" b="1">
+                <a:solidFill>
+                  <a:srgbClr val="FFFFFF"/>
+                </a:solidFill>
+                <a:latin typeface="Calibri"/>
+              </a:defRPr>
+            </a:pPr>
+            <a:r>
+              <a:t>MONITOR</a:t>
+            </a:r>
+          </a:p>
+        </p:txBody>
+      </p:sp>
+      <p:sp>
+        <p:nvSpPr>
+          <p:cNvPr id="14" name="TextBox 13"/>
+          <p:cNvSpPr txBox="1"/>
+          <p:nvPr/>
+        </p:nvSpPr>
+        <p:spPr>
+          <a:xfrm>
+            <a:off x="8257032" y="3017520"/>
+            <a:ext cx="2971800" cy="2103120"/>
+          </a:xfrm>
+          <a:prstGeom prst="rect">
+            <a:avLst/>
+          </a:prstGeom>
+          <a:noFill/>
+        </p:spPr>
+        <p:txBody>
+          <a:bodyPr wrap="square">
+            <a:spAutoFit/>
+          </a:bodyPr>
+          <a:lstStyle/>
+          <a:p>
+            <a:pPr>
+              <a:spcAft>
+                <a:spcPts val="700"/>
+              </a:spcAft>
+              <a:defRPr sz="1200">
+                <a:solidFill>
+                  <a:srgbClr val="334155"/>
+                </a:solidFill>
+                <a:latin typeface="Calibri"/>
+              </a:defRPr>
+            </a:pPr>
+            <a:r>
+              <a:t>✔  Live SIMOPS Conflict Check</a:t>
+            </a:r>
+          </a:p>
+          <a:p>
+            <a:pPr>
+              <a:spcAft>
+                <a:spcPts val="700"/>
+              </a:spcAft>
+              <a:defRPr sz="1200">
+                <a:solidFill>
+                  <a:srgbClr val="334155"/>
+                </a:solidFill>
+                <a:latin typeface="Calibri"/>
+              </a:defRPr>
+            </a:pPr>
+            <a:r>
+              <a:t>✔  Incident &amp; Near-Miss Tracking</a:t>
+            </a:r>
+          </a:p>
+          <a:p>
+            <a:pPr>
+              <a:spcAft>
+                <a:spcPts val="700"/>
+              </a:spcAft>
+              <a:defRPr sz="1200">
+                <a:solidFill>
+                  <a:srgbClr val="334155"/>
+                </a:solidFill>
+                <a:latin typeface="Calibri"/>
+              </a:defRPr>
+            </a:pPr>
+            <a:r>
+              <a:t>✔  Real-Time Plant Dashboard</a:t>
+            </a:r>
+          </a:p>
+          <a:p>
+            <a:pPr>
+              <a:spcAft>
+                <a:spcPts val="700"/>
+              </a:spcAft>
+              <a:defRPr sz="1200">
+                <a:solidFill>
+                  <a:srgbClr val="334155"/>
+                </a:solidFill>
+                <a:latin typeface="Calibri"/>
+              </a:defRPr>
+            </a:pPr>
+            <a:r>
+              <a:t>✔  Complete Activity Audit Log</a:t>
+            </a:r>
+          </a:p>
+          <a:p>
+            <a:pPr>
+              <a:spcAft>
+                <a:spcPts val="700"/>
+              </a:spcAft>
+              <a:defRPr sz="1200">
+                <a:solidFill>
+                  <a:srgbClr val="334155"/>
+                </a:solidFill>
+                <a:latin typeface="Calibri"/>
+              </a:defRPr>
+            </a:pPr>
+            <a:r>
+              <a:t>✔  Operational Analytics &amp; KPIs</a:t>
+            </a:r>
+          </a:p>
+        </p:txBody>
+      </p:sp>
+      <p:sp>
+        <p:nvSpPr>
+          <p:cNvPr id="15" name="Rounded Rectangle 14"/>
+          <p:cNvSpPr/>
+          <p:nvPr/>
+        </p:nvSpPr>
+        <p:spPr>
+          <a:xfrm>
+            <a:off x="731520" y="5394960"/>
+            <a:ext cx="10728655" cy="475488"/>
+          </a:xfrm>
+          <a:prstGeom prst="roundRect">
+            <a:avLst/>
+          </a:prstGeom>
+          <a:solidFill>
+            <a:srgbClr val="FFFFFF"/>
+          </a:solidFill>
+          <a:ln w="19050">
+            <a:solidFill>
+              <a:srgbClr val="E2E8F0"/>
+            </a:solidFill>
+          </a:ln>
+        </p:spPr>
+        <p:style>
+          <a:lnRef idx="1">
+            <a:schemeClr val="accent1"/>
+          </a:lnRef>
+          <a:fillRef idx="3">
+            <a:schemeClr val="accent1"/>
+          </a:fillRef>
+          <a:effectRef idx="2">
+            <a:schemeClr val="accent1"/>
+          </a:effectRef>
+          <a:fontRef idx="minor">
+            <a:schemeClr val="lt1"/>
+          </a:fontRef>
+        </p:style>
+        <p:txBody>
+          <a:bodyPr rtlCol="0" anchor="ctr"/>
+          <a:lstStyle/>
+          <a:p>
+            <a:pPr algn="ctr">
+              <a:defRPr sz="1250" b="1">
+                <a:solidFill>
+                  <a:srgbClr val="1E3A66"/>
+                </a:solidFill>
+                <a:latin typeface="Calibri"/>
+              </a:defRPr>
+            </a:pPr>
+            <a:r>
+              <a:t>Clear Roles &amp; Ownership:   Platform Admin   |   Org Admin   |   Job Issuer   |   Safety Officer   |   Operator   |   Viewer</a:t>
+            </a:r>
+          </a:p>
+        </p:txBody>
+      </p:sp>
+      <p:sp>
+        <p:nvSpPr>
+          <p:cNvPr id="16" name="Rounded Rectangle 15"/>
+          <p:cNvSpPr/>
+          <p:nvPr/>
+        </p:nvSpPr>
+        <p:spPr>
+          <a:xfrm>
+            <a:off x="731520" y="6035040"/>
+            <a:ext cx="10728655" cy="502920"/>
+          </a:xfrm>
+          <a:prstGeom prst="roundRect">
+            <a:avLst/>
+          </a:prstGeom>
+          <a:solidFill>
+            <a:srgbClr val="FFFFFF"/>
+          </a:solidFill>
+          <a:ln w="19050">
+            <a:solidFill>
+              <a:srgbClr val="E2E8F0"/>
+            </a:solidFill>
+          </a:ln>
+        </p:spPr>
+        <p:style>
+          <a:lnRef idx="1">
+            <a:schemeClr val="accent1"/>
+          </a:lnRef>
+          <a:fillRef idx="3">
+            <a:schemeClr val="accent1"/>
+          </a:fillRef>
+          <a:effectRef idx="2">
+            <a:schemeClr val="accent1"/>
+          </a:effectRef>
+          <a:fontRef idx="minor">
+            <a:schemeClr val="lt1"/>
+          </a:fontRef>
+        </p:style>
+        <p:txBody>
+          <a:bodyPr rtlCol="0" anchor="ctr" wrap="square"/>
+          <a:lstStyle/>
+          <a:p>
+            <a:pPr algn="ctr">
+              <a:defRPr sz="1350" b="1">
+                <a:solidFill>
+                  <a:srgbClr val="0F1E36"/>
+                </a:solidFill>
+                <a:latin typeface="Calibri"/>
+              </a:defRPr>
+            </a:pPr>
+            <a:r>
+              <a:t>Takeaway: PTW acts as the central operational record connecting work authorization, safety controls, execution, and closure.</a:t>
             </a:r>
           </a:p>
         </p:txBody>
@@ -3720,77 +4016,23 @@
       <p:grpSpPr/>
       <p:sp>
         <p:nvSpPr>
-          <p:cNvPr id="2" name="TextBox 1"/>
-          <p:cNvSpPr txBox="1"/>
-          <p:nvPr/>
-        </p:nvSpPr>
-        <p:spPr>
-          <a:xfrm>
-            <a:off x="731520" y="457200"/>
-            <a:ext cx="10725912" cy="1097280"/>
+          <p:cNvPr id="2" name="Rectangle 1"/>
+          <p:cNvSpPr/>
+          <p:nvPr/>
+        </p:nvSpPr>
+        <p:spPr>
+          <a:xfrm>
+            <a:off x="0" y="0"/>
+            <a:ext cx="12191695" cy="6858000"/>
           </a:xfrm>
           <a:prstGeom prst="rect">
-            <a:avLst/>
-          </a:prstGeom>
-          <a:noFill/>
-        </p:spPr>
-        <p:txBody>
-          <a:bodyPr wrap="square" lIns="0" tIns="0" rIns="0" bIns="0">
-            <a:spAutoFit/>
-          </a:bodyPr>
-          <a:lstStyle/>
-          <a:p>
-            <a:pPr>
-              <a:spcAft>
-                <a:spcPts val="400"/>
-              </a:spcAft>
-              <a:defRPr sz="2800" b="1">
-                <a:solidFill>
-                  <a:srgbClr val="16213E"/>
-                </a:solidFill>
-                <a:latin typeface="Calibri"/>
-              </a:defRPr>
-            </a:pPr>
-            <a:r>
-              <a:t>Features of this Application</a:t>
-            </a:r>
-          </a:p>
-          <a:p>
-            <a:pPr>
-              <a:defRPr sz="1400">
-                <a:solidFill>
-                  <a:srgbClr val="64748B"/>
-                </a:solidFill>
-                <a:latin typeface="Calibri"/>
-              </a:defRPr>
-            </a:pPr>
-            <a:r>
-              <a:t>Color-coded classifications, mandatory safety attachments, and strict time limits</a:t>
-            </a:r>
-          </a:p>
-        </p:txBody>
-      </p:sp>
-      <p:sp>
-        <p:nvSpPr>
-          <p:cNvPr id="3" name="Rounded Rectangle 2"/>
-          <p:cNvSpPr/>
-          <p:nvPr/>
-        </p:nvSpPr>
-        <p:spPr>
-          <a:xfrm>
-            <a:off x="731520" y="1828800"/>
-            <a:ext cx="3456432" cy="4572000"/>
-          </a:xfrm>
-          <a:prstGeom prst="roundRect">
             <a:avLst/>
           </a:prstGeom>
           <a:solidFill>
             <a:srgbClr val="F8FAFC"/>
           </a:solidFill>
-          <a:ln w="12700">
-            <a:solidFill>
-              <a:srgbClr val="E2E8F0"/>
-            </a:solidFill>
+          <a:ln>
+            <a:noFill/>
           </a:ln>
         </p:spPr>
         <p:style>
@@ -3808,159 +4050,32 @@
           </a:fontRef>
         </p:style>
         <p:txBody>
-          <a:bodyPr rtlCol="0" anchor="ctr" wrap="square" lIns="228600" tIns="228600" rIns="228600"/>
-          <a:lstStyle/>
-          <a:p>
-            <a:pPr algn="ctr">
-              <a:spcAft>
-                <a:spcPts val="200"/>
-              </a:spcAft>
-              <a:defRPr sz="1800" b="1">
-                <a:solidFill>
-                  <a:srgbClr val="1E56A0"/>
-                </a:solidFill>
-                <a:latin typeface="Calibri"/>
-              </a:defRPr>
-            </a:pPr>
-            <a:r>
-              <a:t>Color-Coded Permits</a:t>
-            </a:r>
-          </a:p>
-          <a:p>
-            <a:pPr>
-              <a:spcAft>
-                <a:spcPts val="1400"/>
-              </a:spcAft>
-              <a:defRPr sz="1200">
-                <a:solidFill>
-                  <a:srgbClr val="64748B"/>
-                </a:solidFill>
-                <a:latin typeface="Calibri"/>
-              </a:defRPr>
-            </a:pPr>
-            <a:r>
-              <a:t>Visual identification in the field</a:t>
-            </a:r>
-          </a:p>
-          <a:p>
-            <a:pPr>
-              <a:spcAft>
-                <a:spcPts val="700"/>
-              </a:spcAft>
-              <a:defRPr sz="1400">
-                <a:solidFill>
-                  <a:srgbClr val="1E293B"/>
-                </a:solidFill>
-                <a:latin typeface="Calibri"/>
-              </a:defRPr>
-            </a:pPr>
-            <a:r>
-              <a:t>• RED: Hot Work (Welding, sparks, flame)</a:t>
-            </a:r>
-          </a:p>
-          <a:p>
-            <a:pPr>
-              <a:spcAft>
-                <a:spcPts val="700"/>
-              </a:spcAft>
-              <a:defRPr sz="1400">
-                <a:solidFill>
-                  <a:srgbClr val="1E293B"/>
-                </a:solidFill>
-                <a:latin typeface="Calibri"/>
-              </a:defRPr>
-            </a:pPr>
-            <a:r>
-              <a:t>• BLUE: Cold Work (Hand tools, unbolting)</a:t>
-            </a:r>
-          </a:p>
-          <a:p>
-            <a:pPr>
-              <a:spcAft>
-                <a:spcPts val="700"/>
-              </a:spcAft>
-              <a:defRPr sz="1400">
-                <a:solidFill>
-                  <a:srgbClr val="1E293B"/>
-                </a:solidFill>
-                <a:latin typeface="Calibri"/>
-              </a:defRPr>
-            </a:pPr>
-            <a:r>
-              <a:t>• GREEN: Confined Space Entry (Tanks, pits)</a:t>
-            </a:r>
-          </a:p>
-          <a:p>
-            <a:pPr>
-              <a:spcAft>
-                <a:spcPts val="700"/>
-              </a:spcAft>
-              <a:defRPr sz="1400">
-                <a:solidFill>
-                  <a:srgbClr val="1E293B"/>
-                </a:solidFill>
-                <a:latin typeface="Calibri"/>
-              </a:defRPr>
-            </a:pPr>
-            <a:r>
-              <a:t>• ORANGE: Electrical &amp; Lock-Out / Tag-Out</a:t>
-            </a:r>
-          </a:p>
-          <a:p>
-            <a:pPr>
-              <a:spcAft>
-                <a:spcPts val="700"/>
-              </a:spcAft>
-              <a:defRPr sz="1400">
-                <a:solidFill>
-                  <a:srgbClr val="1E293B"/>
-                </a:solidFill>
-                <a:latin typeface="Calibri"/>
-              </a:defRPr>
-            </a:pPr>
-            <a:r>
-              <a:t>• PURPLE: Working at Height (&gt; 1.8m)</a:t>
-            </a:r>
-          </a:p>
-          <a:p>
-            <a:pPr>
-              <a:spcAft>
-                <a:spcPts val="700"/>
-              </a:spcAft>
-              <a:defRPr sz="1400">
-                <a:solidFill>
-                  <a:srgbClr val="1E293B"/>
-                </a:solidFill>
-                <a:latin typeface="Calibri"/>
-              </a:defRPr>
-            </a:pPr>
-            <a:r>
-              <a:t>• BROWN: Excavation &amp; Trenching</a:t>
-            </a:r>
-          </a:p>
-        </p:txBody>
-      </p:sp>
-      <p:sp>
-        <p:nvSpPr>
-          <p:cNvPr id="4" name="Rounded Rectangle 3"/>
+          <a:bodyPr rtlCol="0" anchor="ctr"/>
+          <a:lstStyle/>
+          <a:p>
+            <a:pPr algn="ctr"/>
+          </a:p>
+        </p:txBody>
+      </p:sp>
+      <p:sp>
+        <p:nvSpPr>
+          <p:cNvPr id="3" name="Rectangle 2"/>
           <p:cNvSpPr/>
           <p:nvPr/>
         </p:nvSpPr>
         <p:spPr>
           <a:xfrm>
-            <a:off x="4370832" y="1828800"/>
-            <a:ext cx="3456432" cy="4572000"/>
-          </a:xfrm>
-          <a:prstGeom prst="roundRect">
+            <a:off x="731520" y="365760"/>
+            <a:ext cx="10728655" cy="36576"/>
+          </a:xfrm>
+          <a:prstGeom prst="rect">
             <a:avLst/>
           </a:prstGeom>
           <a:solidFill>
-            <a:srgbClr val="F8FAFC"/>
+            <a:srgbClr val="0D9488"/>
           </a:solidFill>
-          <a:ln w="12700">
-            <a:solidFill>
-              <a:srgbClr val="E2E8F0"/>
-            </a:solidFill>
+          <a:ln>
+            <a:noFill/>
           </a:ln>
         </p:spPr>
         <p:style>
@@ -3978,30 +4093,53 @@
           </a:fontRef>
         </p:style>
         <p:txBody>
-          <a:bodyPr rtlCol="0" anchor="ctr" wrap="square" lIns="228600" tIns="228600" rIns="228600"/>
-          <a:lstStyle/>
-          <a:p>
-            <a:pPr algn="ctr">
-              <a:spcAft>
-                <a:spcPts val="200"/>
-              </a:spcAft>
-              <a:defRPr sz="1800" b="1">
-                <a:solidFill>
-                  <a:srgbClr val="1E56A0"/>
-                </a:solidFill>
-                <a:latin typeface="Calibri"/>
-              </a:defRPr>
-            </a:pPr>
-            <a:r>
-              <a:t>Mandatory Attachments</a:t>
-            </a:r>
-          </a:p>
-          <a:p>
-            <a:pPr>
-              <a:spcAft>
-                <a:spcPts val="1400"/>
-              </a:spcAft>
-              <a:defRPr sz="1200">
+          <a:bodyPr rtlCol="0" anchor="ctr"/>
+          <a:lstStyle/>
+          <a:p>
+            <a:pPr algn="ctr"/>
+          </a:p>
+        </p:txBody>
+      </p:sp>
+      <p:sp>
+        <p:nvSpPr>
+          <p:cNvPr id="4" name="TextBox 3"/>
+          <p:cNvSpPr txBox="1"/>
+          <p:nvPr/>
+        </p:nvSpPr>
+        <p:spPr>
+          <a:xfrm>
+            <a:off x="731520" y="502920"/>
+            <a:ext cx="10728655" cy="960120"/>
+          </a:xfrm>
+          <a:prstGeom prst="rect">
+            <a:avLst/>
+          </a:prstGeom>
+          <a:noFill/>
+        </p:spPr>
+        <p:txBody>
+          <a:bodyPr wrap="square" lIns="0" tIns="0" rIns="0" bIns="0">
+            <a:spAutoFit/>
+          </a:bodyPr>
+          <a:lstStyle/>
+          <a:p>
+            <a:pPr>
+              <a:defRPr sz="3200" b="1">
+                <a:solidFill>
+                  <a:srgbClr val="0F1E36"/>
+                </a:solidFill>
+                <a:latin typeface="Calibri"/>
+              </a:defRPr>
+            </a:pPr>
+            <a:r>
+              <a:t>2. Features of the Application</a:t>
+            </a:r>
+          </a:p>
+          <a:p>
+            <a:pPr>
+              <a:spcBef>
+                <a:spcPts val="300"/>
+              </a:spcBef>
+              <a:defRPr sz="1400">
                 <a:solidFill>
                   <a:srgbClr val="64748B"/>
                 </a:solidFill>
@@ -4009,87 +4147,7 @@
               </a:defRPr>
             </a:pPr>
             <a:r>
-              <a:t>Enforced pre-job documents</a:t>
-            </a:r>
-          </a:p>
-          <a:p>
-            <a:pPr>
-              <a:spcAft>
-                <a:spcPts val="700"/>
-              </a:spcAft>
-              <a:defRPr sz="1400">
-                <a:solidFill>
-                  <a:srgbClr val="1E293B"/>
-                </a:solidFill>
-                <a:latin typeface="Calibri"/>
-              </a:defRPr>
-            </a:pPr>
-            <a:r>
-              <a:t>• JSA: Step-by-step hazard checklist</a:t>
-            </a:r>
-          </a:p>
-          <a:p>
-            <a:pPr>
-              <a:spcAft>
-                <a:spcPts val="700"/>
-              </a:spcAft>
-              <a:defRPr sz="1400">
-                <a:solidFill>
-                  <a:srgbClr val="1E293B"/>
-                </a:solidFill>
-                <a:latin typeface="Calibri"/>
-              </a:defRPr>
-            </a:pPr>
-            <a:r>
-              <a:t>• Gas Test: O2 (19.5-23.5%), LEL (0%), H2S (0)</a:t>
-            </a:r>
-          </a:p>
-          <a:p>
-            <a:pPr>
-              <a:spcAft>
-                <a:spcPts val="700"/>
-              </a:spcAft>
-              <a:defRPr sz="1400">
-                <a:solidFill>
-                  <a:srgbClr val="1E293B"/>
-                </a:solidFill>
-                <a:latin typeface="Calibri"/>
-              </a:defRPr>
-            </a:pPr>
-            <a:r>
-              <a:t>• Toolbox Talk: Daily briefing &amp; crew sign-off</a:t>
-            </a:r>
-          </a:p>
-          <a:p>
-            <a:pPr>
-              <a:spcAft>
-                <a:spcPts val="700"/>
-              </a:spcAft>
-              <a:defRPr sz="1400">
-                <a:solidFill>
-                  <a:srgbClr val="1E293B"/>
-                </a:solidFill>
-                <a:latin typeface="Calibri"/>
-              </a:defRPr>
-            </a:pPr>
-            <a:r>
-              <a:t>• P&amp;ID Drawing: Marked mechanical spade blinds</a:t>
-            </a:r>
-          </a:p>
-          <a:p>
-            <a:pPr>
-              <a:spcAft>
-                <a:spcPts val="700"/>
-              </a:spcAft>
-              <a:defRPr sz="1400">
-                <a:solidFill>
-                  <a:srgbClr val="1E293B"/>
-                </a:solidFill>
-                <a:latin typeface="Calibri"/>
-              </a:defRPr>
-            </a:pPr>
-            <a:r>
-              <a:t>• Rescue Plan: Standby personnel &amp; rescue tripod</a:t>
+              <a:t>Key Message: Built-in capabilities organized into 4 clear business functions.</a:t>
             </a:r>
           </a:p>
         </p:txBody>
@@ -4102,16 +4160,16 @@
         </p:nvSpPr>
         <p:spPr>
           <a:xfrm>
-            <a:off x="8010144" y="1828800"/>
-            <a:ext cx="3456432" cy="4572000"/>
+            <a:off x="731520" y="1691640"/>
+            <a:ext cx="2542032" cy="4160520"/>
           </a:xfrm>
           <a:prstGeom prst="roundRect">
             <a:avLst/>
           </a:prstGeom>
           <a:solidFill>
-            <a:srgbClr val="F8FAFC"/>
+            <a:srgbClr val="FFFFFF"/>
           </a:solidFill>
-          <a:ln w="12700">
+          <a:ln w="19050">
             <a:solidFill>
               <a:srgbClr val="E2E8F0"/>
             </a:solidFill>
@@ -4132,118 +4190,887 @@
           </a:fontRef>
         </p:style>
         <p:txBody>
-          <a:bodyPr rtlCol="0" anchor="ctr" wrap="square" lIns="228600" tIns="228600" rIns="228600"/>
+          <a:bodyPr rtlCol="0" anchor="ctr"/>
+          <a:lstStyle/>
+          <a:p>
+            <a:pPr algn="ctr"/>
+          </a:p>
+        </p:txBody>
+      </p:sp>
+      <p:sp>
+        <p:nvSpPr>
+          <p:cNvPr id="6" name="Rectangle 5"/>
+          <p:cNvSpPr/>
+          <p:nvPr/>
+        </p:nvSpPr>
+        <p:spPr>
+          <a:xfrm>
+            <a:off x="731520" y="1691640"/>
+            <a:ext cx="2542032" cy="502920"/>
+          </a:xfrm>
+          <a:prstGeom prst="rect">
+            <a:avLst/>
+          </a:prstGeom>
+          <a:solidFill>
+            <a:srgbClr val="1E3A66"/>
+          </a:solidFill>
+          <a:ln>
+            <a:noFill/>
+          </a:ln>
+        </p:spPr>
+        <p:style>
+          <a:lnRef idx="1">
+            <a:schemeClr val="accent1"/>
+          </a:lnRef>
+          <a:fillRef idx="3">
+            <a:schemeClr val="accent1"/>
+          </a:fillRef>
+          <a:effectRef idx="2">
+            <a:schemeClr val="accent1"/>
+          </a:effectRef>
+          <a:fontRef idx="minor">
+            <a:schemeClr val="lt1"/>
+          </a:fontRef>
+        </p:style>
+        <p:txBody>
+          <a:bodyPr rtlCol="0" anchor="ctr"/>
           <a:lstStyle/>
           <a:p>
             <a:pPr algn="ctr">
+              <a:defRPr sz="1300" b="1">
+                <a:solidFill>
+                  <a:srgbClr val="FFFFFF"/>
+                </a:solidFill>
+                <a:latin typeface="Calibri"/>
+              </a:defRPr>
+            </a:pPr>
+            <a:r>
+              <a:t>1. Work Authorization</a:t>
+            </a:r>
+          </a:p>
+        </p:txBody>
+      </p:sp>
+      <p:sp>
+        <p:nvSpPr>
+          <p:cNvPr id="7" name="TextBox 6"/>
+          <p:cNvSpPr txBox="1"/>
+          <p:nvPr/>
+        </p:nvSpPr>
+        <p:spPr>
+          <a:xfrm>
+            <a:off x="896112" y="2331720"/>
+            <a:ext cx="2212848" cy="3383280"/>
+          </a:xfrm>
+          <a:prstGeom prst="rect">
+            <a:avLst/>
+          </a:prstGeom>
+          <a:noFill/>
+        </p:spPr>
+        <p:txBody>
+          <a:bodyPr wrap="square">
+            <a:spAutoFit/>
+          </a:bodyPr>
+          <a:lstStyle/>
+          <a:p>
+            <a:pPr>
               <a:spcAft>
-                <a:spcPts val="200"/>
+                <a:spcPts val="800"/>
               </a:spcAft>
-              <a:defRPr sz="1800" b="1">
-                <a:solidFill>
-                  <a:srgbClr val="1E56A0"/>
-                </a:solidFill>
-                <a:latin typeface="Calibri"/>
-              </a:defRPr>
-            </a:pPr>
-            <a:r>
-              <a:t>Validity &amp; Audit Rules</a:t>
+              <a:defRPr sz="1150">
+                <a:solidFill>
+                  <a:srgbClr val="334155"/>
+                </a:solidFill>
+                <a:latin typeface="Calibri"/>
+              </a:defRPr>
+            </a:pPr>
+            <a:r>
+              <a:t>• Permit Creation: Fast drafting</a:t>
             </a:r>
           </a:p>
           <a:p>
             <a:pPr>
               <a:spcAft>
-                <a:spcPts val="1400"/>
+                <a:spcPts val="800"/>
               </a:spcAft>
-              <a:defRPr sz="1200">
-                <a:solidFill>
-                  <a:srgbClr val="64748B"/>
-                </a:solidFill>
-                <a:latin typeface="Calibri"/>
-              </a:defRPr>
-            </a:pPr>
-            <a:r>
-              <a:t>Time boundaries &amp; governance</a:t>
+              <a:defRPr sz="1150">
+                <a:solidFill>
+                  <a:srgbClr val="334155"/>
+                </a:solidFill>
+                <a:latin typeface="Calibri"/>
+              </a:defRPr>
+            </a:pPr>
+            <a:r>
+              <a:t>• Draft Management: Save &amp; edit</a:t>
             </a:r>
           </a:p>
           <a:p>
             <a:pPr>
               <a:spcAft>
-                <a:spcPts val="700"/>
+                <a:spcPts val="800"/>
               </a:spcAft>
-              <a:defRPr sz="1400">
-                <a:solidFill>
-                  <a:srgbClr val="1E293B"/>
-                </a:solidFill>
-                <a:latin typeface="Calibri"/>
-              </a:defRPr>
-            </a:pPr>
-            <a:r>
-              <a:t>• Single Shift: Valid 8 to 12 hours only</a:t>
+              <a:defRPr sz="1150">
+                <a:solidFill>
+                  <a:srgbClr val="334155"/>
+                </a:solidFill>
+                <a:latin typeface="Calibri"/>
+              </a:defRPr>
+            </a:pPr>
+            <a:r>
+              <a:t>• Submission: Required checks</a:t>
             </a:r>
           </a:p>
           <a:p>
             <a:pPr>
               <a:spcAft>
-                <a:spcPts val="700"/>
+                <a:spcPts val="800"/>
               </a:spcAft>
-              <a:defRPr sz="1400">
-                <a:solidFill>
-                  <a:srgbClr val="1E293B"/>
-                </a:solidFill>
-                <a:latin typeface="Calibri"/>
-              </a:defRPr>
-            </a:pPr>
-            <a:r>
-              <a:t>• Daily Revalidation: Joint morning check</a:t>
+              <a:defRPr sz="1150">
+                <a:solidFill>
+                  <a:srgbClr val="334155"/>
+                </a:solidFill>
+                <a:latin typeface="Calibri"/>
+              </a:defRPr>
+            </a:pPr>
+            <a:r>
+              <a:t>• Approval Queue: Multi-role review</a:t>
             </a:r>
           </a:p>
           <a:p>
             <a:pPr>
               <a:spcAft>
-                <a:spcPts val="700"/>
+                <a:spcPts val="800"/>
               </a:spcAft>
-              <a:defRPr sz="1400">
-                <a:solidFill>
-                  <a:srgbClr val="1E293B"/>
-                </a:solidFill>
-                <a:latin typeface="Calibri"/>
-              </a:defRPr>
-            </a:pPr>
-            <a:r>
-              <a:t>• Maximum Lifetime: 6 days before renewal</a:t>
+              <a:defRPr sz="1150">
+                <a:solidFill>
+                  <a:srgbClr val="334155"/>
+                </a:solidFill>
+                <a:latin typeface="Calibri"/>
+              </a:defRPr>
+            </a:pPr>
+            <a:r>
+              <a:t>• Approve / Defer: Give feedback</a:t>
             </a:r>
           </a:p>
           <a:p>
             <a:pPr>
               <a:spcAft>
-                <a:spcPts val="700"/>
+                <a:spcPts val="800"/>
               </a:spcAft>
-              <a:defRPr sz="1400">
-                <a:solidFill>
-                  <a:srgbClr val="1E293B"/>
-                </a:solidFill>
-                <a:latin typeface="Calibri"/>
-              </a:defRPr>
-            </a:pPr>
-            <a:r>
-              <a:t>• Worksite Display: Placed in field permit box</a:t>
-            </a:r>
-          </a:p>
+              <a:defRPr sz="1150">
+                <a:solidFill>
+                  <a:srgbClr val="334155"/>
+                </a:solidFill>
+                <a:latin typeface="Calibri"/>
+              </a:defRPr>
+            </a:pPr>
+            <a:r>
+              <a:t>• Resubmission: Quick revisions</a:t>
+            </a:r>
+          </a:p>
+        </p:txBody>
+      </p:sp>
+      <p:sp>
+        <p:nvSpPr>
+          <p:cNvPr id="8" name="Rounded Rectangle 7"/>
+          <p:cNvSpPr/>
+          <p:nvPr/>
+        </p:nvSpPr>
+        <p:spPr>
+          <a:xfrm>
+            <a:off x="3456432" y="1691640"/>
+            <a:ext cx="2542032" cy="4160520"/>
+          </a:xfrm>
+          <a:prstGeom prst="roundRect">
+            <a:avLst/>
+          </a:prstGeom>
+          <a:solidFill>
+            <a:srgbClr val="FFFFFF"/>
+          </a:solidFill>
+          <a:ln w="19050">
+            <a:solidFill>
+              <a:srgbClr val="E2E8F0"/>
+            </a:solidFill>
+          </a:ln>
+        </p:spPr>
+        <p:style>
+          <a:lnRef idx="1">
+            <a:schemeClr val="accent1"/>
+          </a:lnRef>
+          <a:fillRef idx="3">
+            <a:schemeClr val="accent1"/>
+          </a:fillRef>
+          <a:effectRef idx="2">
+            <a:schemeClr val="accent1"/>
+          </a:effectRef>
+          <a:fontRef idx="minor">
+            <a:schemeClr val="lt1"/>
+          </a:fontRef>
+        </p:style>
+        <p:txBody>
+          <a:bodyPr rtlCol="0" anchor="ctr"/>
+          <a:lstStyle/>
+          <a:p>
+            <a:pPr algn="ctr"/>
+          </a:p>
+        </p:txBody>
+      </p:sp>
+      <p:sp>
+        <p:nvSpPr>
+          <p:cNvPr id="9" name="Rectangle 8"/>
+          <p:cNvSpPr/>
+          <p:nvPr/>
+        </p:nvSpPr>
+        <p:spPr>
+          <a:xfrm>
+            <a:off x="3456432" y="1691640"/>
+            <a:ext cx="2542032" cy="502920"/>
+          </a:xfrm>
+          <a:prstGeom prst="rect">
+            <a:avLst/>
+          </a:prstGeom>
+          <a:solidFill>
+            <a:srgbClr val="0D9488"/>
+          </a:solidFill>
+          <a:ln>
+            <a:noFill/>
+          </a:ln>
+        </p:spPr>
+        <p:style>
+          <a:lnRef idx="1">
+            <a:schemeClr val="accent1"/>
+          </a:lnRef>
+          <a:fillRef idx="3">
+            <a:schemeClr val="accent1"/>
+          </a:fillRef>
+          <a:effectRef idx="2">
+            <a:schemeClr val="accent1"/>
+          </a:effectRef>
+          <a:fontRef idx="minor">
+            <a:schemeClr val="lt1"/>
+          </a:fontRef>
+        </p:style>
+        <p:txBody>
+          <a:bodyPr rtlCol="0" anchor="ctr"/>
+          <a:lstStyle/>
+          <a:p>
+            <a:pPr algn="ctr">
+              <a:defRPr sz="1300" b="1">
+                <a:solidFill>
+                  <a:srgbClr val="FFFFFF"/>
+                </a:solidFill>
+                <a:latin typeface="Calibri"/>
+              </a:defRPr>
+            </a:pPr>
+            <a:r>
+              <a:t>2. Safety &amp; Control</a:t>
+            </a:r>
+          </a:p>
+        </p:txBody>
+      </p:sp>
+      <p:sp>
+        <p:nvSpPr>
+          <p:cNvPr id="10" name="TextBox 9"/>
+          <p:cNvSpPr txBox="1"/>
+          <p:nvPr/>
+        </p:nvSpPr>
+        <p:spPr>
+          <a:xfrm>
+            <a:off x="3621024" y="2331720"/>
+            <a:ext cx="2212848" cy="3383280"/>
+          </a:xfrm>
+          <a:prstGeom prst="rect">
+            <a:avLst/>
+          </a:prstGeom>
+          <a:noFill/>
+        </p:spPr>
+        <p:txBody>
+          <a:bodyPr wrap="square">
+            <a:spAutoFit/>
+          </a:bodyPr>
+          <a:lstStyle/>
           <a:p>
             <a:pPr>
               <a:spcAft>
-                <a:spcPts val="700"/>
+                <a:spcPts val="800"/>
               </a:spcAft>
-              <a:defRPr sz="1400">
-                <a:solidFill>
-                  <a:srgbClr val="1E293B"/>
-                </a:solidFill>
-                <a:latin typeface="Calibri"/>
-              </a:defRPr>
-            </a:pPr>
-            <a:r>
-              <a:t>• Audit Trail: Permanent regulatory storage</a:t>
+              <a:defRPr sz="1150">
+                <a:solidFill>
+                  <a:srgbClr val="334155"/>
+                </a:solidFill>
+                <a:latin typeface="Calibri"/>
+              </a:defRPr>
+            </a:pPr>
+            <a:r>
+              <a:t>• LOTOTO Plans: Energy lockout</a:t>
+            </a:r>
+          </a:p>
+          <a:p>
+            <a:pPr>
+              <a:spcAft>
+                <a:spcPts val="800"/>
+              </a:spcAft>
+              <a:defRPr sz="1150">
+                <a:solidFill>
+                  <a:srgbClr val="334155"/>
+                </a:solidFill>
+                <a:latin typeface="Calibri"/>
+              </a:defRPr>
+            </a:pPr>
+            <a:r>
+              <a:t>• SIMOPS: Live conflict checks</a:t>
+            </a:r>
+          </a:p>
+          <a:p>
+            <a:pPr>
+              <a:spcAft>
+                <a:spcPts val="800"/>
+              </a:spcAft>
+              <a:defRPr sz="1150">
+                <a:solidFill>
+                  <a:srgbClr val="334155"/>
+                </a:solidFill>
+                <a:latin typeface="Calibri"/>
+              </a:defRPr>
+            </a:pPr>
+            <a:r>
+              <a:t>• Safety Controls: Plant rules</a:t>
+            </a:r>
+          </a:p>
+          <a:p>
+            <a:pPr>
+              <a:spcAft>
+                <a:spcPts val="800"/>
+              </a:spcAft>
+              <a:defRPr sz="1150">
+                <a:solidFill>
+                  <a:srgbClr val="334155"/>
+                </a:solidFill>
+                <a:latin typeface="Calibri"/>
+              </a:defRPr>
+            </a:pPr>
+            <a:r>
+              <a:t>• Incidents: Event logging</a:t>
+            </a:r>
+          </a:p>
+          <a:p>
+            <a:pPr>
+              <a:spcAft>
+                <a:spcPts val="800"/>
+              </a:spcAft>
+              <a:defRPr sz="1150">
+                <a:solidFill>
+                  <a:srgbClr val="334155"/>
+                </a:solidFill>
+                <a:latin typeface="Calibri"/>
+              </a:defRPr>
+            </a:pPr>
+            <a:r>
+              <a:t>• Near Misses: Hazard reporting</a:t>
+            </a:r>
+          </a:p>
+          <a:p>
+            <a:pPr>
+              <a:spcAft>
+                <a:spcPts val="800"/>
+              </a:spcAft>
+              <a:defRPr sz="1150">
+                <a:solidFill>
+                  <a:srgbClr val="334155"/>
+                </a:solidFill>
+                <a:latin typeface="Calibri"/>
+              </a:defRPr>
+            </a:pPr>
+            <a:r>
+              <a:t>• Unsafe Conditions: Alert team</a:t>
+            </a:r>
+          </a:p>
+        </p:txBody>
+      </p:sp>
+      <p:sp>
+        <p:nvSpPr>
+          <p:cNvPr id="11" name="Rounded Rectangle 10"/>
+          <p:cNvSpPr/>
+          <p:nvPr/>
+        </p:nvSpPr>
+        <p:spPr>
+          <a:xfrm>
+            <a:off x="6181344" y="1691640"/>
+            <a:ext cx="2542032" cy="4160520"/>
+          </a:xfrm>
+          <a:prstGeom prst="roundRect">
+            <a:avLst/>
+          </a:prstGeom>
+          <a:solidFill>
+            <a:srgbClr val="FFFFFF"/>
+          </a:solidFill>
+          <a:ln w="19050">
+            <a:solidFill>
+              <a:srgbClr val="E2E8F0"/>
+            </a:solidFill>
+          </a:ln>
+        </p:spPr>
+        <p:style>
+          <a:lnRef idx="1">
+            <a:schemeClr val="accent1"/>
+          </a:lnRef>
+          <a:fillRef idx="3">
+            <a:schemeClr val="accent1"/>
+          </a:fillRef>
+          <a:effectRef idx="2">
+            <a:schemeClr val="accent1"/>
+          </a:effectRef>
+          <a:fontRef idx="minor">
+            <a:schemeClr val="lt1"/>
+          </a:fontRef>
+        </p:style>
+        <p:txBody>
+          <a:bodyPr rtlCol="0" anchor="ctr"/>
+          <a:lstStyle/>
+          <a:p>
+            <a:pPr algn="ctr"/>
+          </a:p>
+        </p:txBody>
+      </p:sp>
+      <p:sp>
+        <p:nvSpPr>
+          <p:cNvPr id="12" name="Rectangle 11"/>
+          <p:cNvSpPr/>
+          <p:nvPr/>
+        </p:nvSpPr>
+        <p:spPr>
+          <a:xfrm>
+            <a:off x="6181344" y="1691640"/>
+            <a:ext cx="2542032" cy="502920"/>
+          </a:xfrm>
+          <a:prstGeom prst="rect">
+            <a:avLst/>
+          </a:prstGeom>
+          <a:solidFill>
+            <a:srgbClr val="1E3A66"/>
+          </a:solidFill>
+          <a:ln>
+            <a:noFill/>
+          </a:ln>
+        </p:spPr>
+        <p:style>
+          <a:lnRef idx="1">
+            <a:schemeClr val="accent1"/>
+          </a:lnRef>
+          <a:fillRef idx="3">
+            <a:schemeClr val="accent1"/>
+          </a:fillRef>
+          <a:effectRef idx="2">
+            <a:schemeClr val="accent1"/>
+          </a:effectRef>
+          <a:fontRef idx="minor">
+            <a:schemeClr val="lt1"/>
+          </a:fontRef>
+        </p:style>
+        <p:txBody>
+          <a:bodyPr rtlCol="0" anchor="ctr"/>
+          <a:lstStyle/>
+          <a:p>
+            <a:pPr algn="ctr">
+              <a:defRPr sz="1300" b="1">
+                <a:solidFill>
+                  <a:srgbClr val="FFFFFF"/>
+                </a:solidFill>
+                <a:latin typeface="Calibri"/>
+              </a:defRPr>
+            </a:pPr>
+            <a:r>
+              <a:t>3. Execution &amp; Audit</a:t>
+            </a:r>
+          </a:p>
+        </p:txBody>
+      </p:sp>
+      <p:sp>
+        <p:nvSpPr>
+          <p:cNvPr id="13" name="TextBox 12"/>
+          <p:cNvSpPr txBox="1"/>
+          <p:nvPr/>
+        </p:nvSpPr>
+        <p:spPr>
+          <a:xfrm>
+            <a:off x="6345936" y="2331720"/>
+            <a:ext cx="2212848" cy="3383280"/>
+          </a:xfrm>
+          <a:prstGeom prst="rect">
+            <a:avLst/>
+          </a:prstGeom>
+          <a:noFill/>
+        </p:spPr>
+        <p:txBody>
+          <a:bodyPr wrap="square">
+            <a:spAutoFit/>
+          </a:bodyPr>
+          <a:lstStyle/>
+          <a:p>
+            <a:pPr>
+              <a:spcAft>
+                <a:spcPts val="800"/>
+              </a:spcAft>
+              <a:defRPr sz="1150">
+                <a:solidFill>
+                  <a:srgbClr val="334155"/>
+                </a:solidFill>
+                <a:latin typeface="Calibri"/>
+              </a:defRPr>
+            </a:pPr>
+            <a:r>
+              <a:t>• Work Execution: Active state</a:t>
+            </a:r>
+          </a:p>
+          <a:p>
+            <a:pPr>
+              <a:spcAft>
+                <a:spcPts val="800"/>
+              </a:spcAft>
+              <a:defRPr sz="1150">
+                <a:solidFill>
+                  <a:srgbClr val="334155"/>
+                </a:solidFill>
+                <a:latin typeface="Calibri"/>
+              </a:defRPr>
+            </a:pPr>
+            <a:r>
+              <a:t>• Progress Updates: Live notes</a:t>
+            </a:r>
+          </a:p>
+          <a:p>
+            <a:pPr>
+              <a:spcAft>
+                <a:spcPts val="800"/>
+              </a:spcAft>
+              <a:defRPr sz="1150">
+                <a:solidFill>
+                  <a:srgbClr val="334155"/>
+                </a:solidFill>
+                <a:latin typeface="Calibri"/>
+              </a:defRPr>
+            </a:pPr>
+            <a:r>
+              <a:t>• Evidence: Upload completion photos</a:t>
+            </a:r>
+          </a:p>
+          <a:p>
+            <a:pPr>
+              <a:spcAft>
+                <a:spcPts val="800"/>
+              </a:spcAft>
+              <a:defRPr sz="1150">
+                <a:solidFill>
+                  <a:srgbClr val="334155"/>
+                </a:solidFill>
+                <a:latin typeface="Calibri"/>
+              </a:defRPr>
+            </a:pPr>
+            <a:r>
+              <a:t>• Activity History: Timestamped log</a:t>
+            </a:r>
+          </a:p>
+          <a:p>
+            <a:pPr>
+              <a:spcAft>
+                <a:spcPts val="800"/>
+              </a:spcAft>
+              <a:defRPr sz="1150">
+                <a:solidFill>
+                  <a:srgbClr val="334155"/>
+                </a:solidFill>
+                <a:latin typeface="Calibri"/>
+              </a:defRPr>
+            </a:pPr>
+            <a:r>
+              <a:t>• Suspend Work: Stop on risk</a:t>
+            </a:r>
+          </a:p>
+          <a:p>
+            <a:pPr>
+              <a:spcAft>
+                <a:spcPts val="800"/>
+              </a:spcAft>
+              <a:defRPr sz="1150">
+                <a:solidFill>
+                  <a:srgbClr val="334155"/>
+                </a:solidFill>
+                <a:latin typeface="Calibri"/>
+              </a:defRPr>
+            </a:pPr>
+            <a:r>
+              <a:t>• Verify &amp; Close: Sign-off &amp; archive</a:t>
+            </a:r>
+          </a:p>
+        </p:txBody>
+      </p:sp>
+      <p:sp>
+        <p:nvSpPr>
+          <p:cNvPr id="14" name="Rounded Rectangle 13"/>
+          <p:cNvSpPr/>
+          <p:nvPr/>
+        </p:nvSpPr>
+        <p:spPr>
+          <a:xfrm>
+            <a:off x="8906256" y="1691640"/>
+            <a:ext cx="2542032" cy="4160520"/>
+          </a:xfrm>
+          <a:prstGeom prst="roundRect">
+            <a:avLst/>
+          </a:prstGeom>
+          <a:solidFill>
+            <a:srgbClr val="FFFFFF"/>
+          </a:solidFill>
+          <a:ln w="19050">
+            <a:solidFill>
+              <a:srgbClr val="E2E8F0"/>
+            </a:solidFill>
+          </a:ln>
+        </p:spPr>
+        <p:style>
+          <a:lnRef idx="1">
+            <a:schemeClr val="accent1"/>
+          </a:lnRef>
+          <a:fillRef idx="3">
+            <a:schemeClr val="accent1"/>
+          </a:fillRef>
+          <a:effectRef idx="2">
+            <a:schemeClr val="accent1"/>
+          </a:effectRef>
+          <a:fontRef idx="minor">
+            <a:schemeClr val="lt1"/>
+          </a:fontRef>
+        </p:style>
+        <p:txBody>
+          <a:bodyPr rtlCol="0" anchor="ctr"/>
+          <a:lstStyle/>
+          <a:p>
+            <a:pPr algn="ctr"/>
+          </a:p>
+        </p:txBody>
+      </p:sp>
+      <p:sp>
+        <p:nvSpPr>
+          <p:cNvPr id="15" name="Rectangle 14"/>
+          <p:cNvSpPr/>
+          <p:nvPr/>
+        </p:nvSpPr>
+        <p:spPr>
+          <a:xfrm>
+            <a:off x="8906256" y="1691640"/>
+            <a:ext cx="2542032" cy="502920"/>
+          </a:xfrm>
+          <a:prstGeom prst="rect">
+            <a:avLst/>
+          </a:prstGeom>
+          <a:solidFill>
+            <a:srgbClr val="0D9488"/>
+          </a:solidFill>
+          <a:ln>
+            <a:noFill/>
+          </a:ln>
+        </p:spPr>
+        <p:style>
+          <a:lnRef idx="1">
+            <a:schemeClr val="accent1"/>
+          </a:lnRef>
+          <a:fillRef idx="3">
+            <a:schemeClr val="accent1"/>
+          </a:fillRef>
+          <a:effectRef idx="2">
+            <a:schemeClr val="accent1"/>
+          </a:effectRef>
+          <a:fontRef idx="minor">
+            <a:schemeClr val="lt1"/>
+          </a:fontRef>
+        </p:style>
+        <p:txBody>
+          <a:bodyPr rtlCol="0" anchor="ctr"/>
+          <a:lstStyle/>
+          <a:p>
+            <a:pPr algn="ctr">
+              <a:defRPr sz="1300" b="1">
+                <a:solidFill>
+                  <a:srgbClr val="FFFFFF"/>
+                </a:solidFill>
+                <a:latin typeface="Calibri"/>
+              </a:defRPr>
+            </a:pPr>
+            <a:r>
+              <a:t>4. Management &amp; KPIs</a:t>
+            </a:r>
+          </a:p>
+        </p:txBody>
+      </p:sp>
+      <p:sp>
+        <p:nvSpPr>
+          <p:cNvPr id="16" name="TextBox 15"/>
+          <p:cNvSpPr txBox="1"/>
+          <p:nvPr/>
+        </p:nvSpPr>
+        <p:spPr>
+          <a:xfrm>
+            <a:off x="9070848" y="2331720"/>
+            <a:ext cx="2212848" cy="3383280"/>
+          </a:xfrm>
+          <a:prstGeom prst="rect">
+            <a:avLst/>
+          </a:prstGeom>
+          <a:noFill/>
+        </p:spPr>
+        <p:txBody>
+          <a:bodyPr wrap="square">
+            <a:spAutoFit/>
+          </a:bodyPr>
+          <a:lstStyle/>
+          <a:p>
+            <a:pPr>
+              <a:spcAft>
+                <a:spcPts val="800"/>
+              </a:spcAft>
+              <a:defRPr sz="1150">
+                <a:solidFill>
+                  <a:srgbClr val="334155"/>
+                </a:solidFill>
+                <a:latin typeface="Calibri"/>
+              </a:defRPr>
+            </a:pPr>
+            <a:r>
+              <a:t>• Workforce: Users &amp; permissions</a:t>
+            </a:r>
+          </a:p>
+          <a:p>
+            <a:pPr>
+              <a:spcAft>
+                <a:spcPts val="800"/>
+              </a:spcAft>
+              <a:defRPr sz="1150">
+                <a:solidFill>
+                  <a:srgbClr val="334155"/>
+                </a:solidFill>
+                <a:latin typeface="Calibri"/>
+              </a:defRPr>
+            </a:pPr>
+            <a:r>
+              <a:t>• Roles: Defined competencies</a:t>
+            </a:r>
+          </a:p>
+          <a:p>
+            <a:pPr>
+              <a:spcAft>
+                <a:spcPts val="800"/>
+              </a:spcAft>
+              <a:defRPr sz="1150">
+                <a:solidFill>
+                  <a:srgbClr val="334155"/>
+                </a:solidFill>
+                <a:latin typeface="Calibri"/>
+              </a:defRPr>
+            </a:pPr>
+            <a:r>
+              <a:t>• Organization: Plants &amp; locations</a:t>
+            </a:r>
+          </a:p>
+          <a:p>
+            <a:pPr>
+              <a:spcAft>
+                <a:spcPts val="800"/>
+              </a:spcAft>
+              <a:defRPr sz="1150">
+                <a:solidFill>
+                  <a:srgbClr val="334155"/>
+                </a:solidFill>
+                <a:latin typeface="Calibri"/>
+              </a:defRPr>
+            </a:pPr>
+            <a:r>
+              <a:t>• Live Analytics: Active counters</a:t>
+            </a:r>
+          </a:p>
+          <a:p>
+            <a:pPr>
+              <a:spcAft>
+                <a:spcPts val="800"/>
+              </a:spcAft>
+              <a:defRPr sz="1150">
+                <a:solidFill>
+                  <a:srgbClr val="334155"/>
+                </a:solidFill>
+                <a:latin typeface="Calibri"/>
+              </a:defRPr>
+            </a:pPr>
+            <a:r>
+              <a:t>• Reports: CSV &amp; operational exports</a:t>
+            </a:r>
+          </a:p>
+          <a:p>
+            <a:pPr>
+              <a:spcAft>
+                <a:spcPts val="800"/>
+              </a:spcAft>
+              <a:defRPr sz="1150">
+                <a:solidFill>
+                  <a:srgbClr val="334155"/>
+                </a:solidFill>
+                <a:latin typeface="Calibri"/>
+              </a:defRPr>
+            </a:pPr>
+            <a:r>
+              <a:t>• Billing: Tier &amp; subscription</a:t>
+            </a:r>
+          </a:p>
+        </p:txBody>
+      </p:sp>
+      <p:sp>
+        <p:nvSpPr>
+          <p:cNvPr id="17" name="Rounded Rectangle 16"/>
+          <p:cNvSpPr/>
+          <p:nvPr/>
+        </p:nvSpPr>
+        <p:spPr>
+          <a:xfrm>
+            <a:off x="731520" y="6035040"/>
+            <a:ext cx="10728655" cy="502920"/>
+          </a:xfrm>
+          <a:prstGeom prst="roundRect">
+            <a:avLst/>
+          </a:prstGeom>
+          <a:solidFill>
+            <a:srgbClr val="FFFFFF"/>
+          </a:solidFill>
+          <a:ln w="19050">
+            <a:solidFill>
+              <a:srgbClr val="E2E8F0"/>
+            </a:solidFill>
+          </a:ln>
+        </p:spPr>
+        <p:style>
+          <a:lnRef idx="1">
+            <a:schemeClr val="accent1"/>
+          </a:lnRef>
+          <a:fillRef idx="3">
+            <a:schemeClr val="accent1"/>
+          </a:fillRef>
+          <a:effectRef idx="2">
+            <a:schemeClr val="accent1"/>
+          </a:effectRef>
+          <a:fontRef idx="minor">
+            <a:schemeClr val="lt1"/>
+          </a:fontRef>
+        </p:style>
+        <p:txBody>
+          <a:bodyPr rtlCol="0" anchor="ctr" wrap="square"/>
+          <a:lstStyle/>
+          <a:p>
+            <a:pPr algn="ctr">
+              <a:defRPr sz="1350" b="1">
+                <a:solidFill>
+                  <a:srgbClr val="0F1E36"/>
+                </a:solidFill>
+                <a:latin typeface="Calibri"/>
+              </a:defRPr>
+            </a:pPr>
+            <a:r>
+              <a:t>One Platform  →  From work authorization to operational reporting and compliance</a:t>
             </a:r>
           </a:p>
         </p:txBody>
@@ -4268,77 +5095,23 @@
       <p:grpSpPr/>
       <p:sp>
         <p:nvSpPr>
-          <p:cNvPr id="2" name="TextBox 1"/>
-          <p:cNvSpPr txBox="1"/>
-          <p:nvPr/>
-        </p:nvSpPr>
-        <p:spPr>
-          <a:xfrm>
-            <a:off x="731520" y="457200"/>
-            <a:ext cx="10725912" cy="1097280"/>
+          <p:cNvPr id="2" name="Rectangle 1"/>
+          <p:cNvSpPr/>
+          <p:nvPr/>
+        </p:nvSpPr>
+        <p:spPr>
+          <a:xfrm>
+            <a:off x="0" y="0"/>
+            <a:ext cx="12191695" cy="6858000"/>
           </a:xfrm>
           <a:prstGeom prst="rect">
-            <a:avLst/>
-          </a:prstGeom>
-          <a:noFill/>
-        </p:spPr>
-        <p:txBody>
-          <a:bodyPr wrap="square" lIns="0" tIns="0" rIns="0" bIns="0">
-            <a:spAutoFit/>
-          </a:bodyPr>
-          <a:lstStyle/>
-          <a:p>
-            <a:pPr>
-              <a:spcAft>
-                <a:spcPts val="400"/>
-              </a:spcAft>
-              <a:defRPr sz="2800" b="1">
-                <a:solidFill>
-                  <a:srgbClr val="16213E"/>
-                </a:solidFill>
-                <a:latin typeface="Calibri"/>
-              </a:defRPr>
-            </a:pPr>
-            <a:r>
-              <a:t>Why is this Application Required?</a:t>
-            </a:r>
-          </a:p>
-          <a:p>
-            <a:pPr>
-              <a:defRPr sz="1400">
-                <a:solidFill>
-                  <a:srgbClr val="64748B"/>
-                </a:solidFill>
-                <a:latin typeface="Calibri"/>
-              </a:defRPr>
-            </a:pPr>
-            <a:r>
-              <a:t>Crucial risk reduction, life protection, and compliance enforcement</a:t>
-            </a:r>
-          </a:p>
-        </p:txBody>
-      </p:sp>
-      <p:sp>
-        <p:nvSpPr>
-          <p:cNvPr id="3" name="Rounded Rectangle 2"/>
-          <p:cNvSpPr/>
-          <p:nvPr/>
-        </p:nvSpPr>
-        <p:spPr>
-          <a:xfrm>
-            <a:off x="731520" y="1828800"/>
-            <a:ext cx="5266944" cy="2148840"/>
-          </a:xfrm>
-          <a:prstGeom prst="roundRect">
             <a:avLst/>
           </a:prstGeom>
           <a:solidFill>
             <a:srgbClr val="F8FAFC"/>
           </a:solidFill>
-          <a:ln w="12700">
-            <a:solidFill>
-              <a:srgbClr val="E2E8F0"/>
-            </a:solidFill>
+          <a:ln>
+            <a:noFill/>
           </a:ln>
         </p:spPr>
         <p:style>
@@ -4356,111 +5129,32 @@
           </a:fontRef>
         </p:style>
         <p:txBody>
-          <a:bodyPr rtlCol="0" anchor="ctr" wrap="square" lIns="228600" tIns="182880" rIns="228600"/>
-          <a:lstStyle/>
-          <a:p>
-            <a:pPr algn="ctr">
-              <a:spcAft>
-                <a:spcPts val="200"/>
-              </a:spcAft>
-              <a:defRPr sz="1700" b="1">
-                <a:solidFill>
-                  <a:srgbClr val="1E56A0"/>
-                </a:solidFill>
-                <a:latin typeface="Calibri"/>
-              </a:defRPr>
-            </a:pPr>
-            <a:r>
-              <a:t>Accident &amp; Explosion Prevention</a:t>
-            </a:r>
-          </a:p>
-          <a:p>
-            <a:pPr>
-              <a:spcAft>
-                <a:spcPts val="800"/>
-              </a:spcAft>
-              <a:defRPr sz="1200" b="1">
-                <a:solidFill>
-                  <a:srgbClr val="D97706"/>
-                </a:solidFill>
-                <a:latin typeface="Calibri"/>
-              </a:defRPr>
-            </a:pPr>
-            <a:r>
-              <a:t>Catastrophic Risk Control</a:t>
-            </a:r>
-          </a:p>
-          <a:p>
-            <a:pPr>
-              <a:spcAft>
-                <a:spcPts val="400"/>
-              </a:spcAft>
-              <a:defRPr sz="1400">
-                <a:solidFill>
-                  <a:srgbClr val="1E293B"/>
-                </a:solidFill>
-                <a:latin typeface="Calibri"/>
-              </a:defRPr>
-            </a:pPr>
-            <a:r>
-              <a:t>• Stops uncontrolled ignition of hydrocarbons &amp; explosive vapors</a:t>
-            </a:r>
-          </a:p>
-          <a:p>
-            <a:pPr>
-              <a:spcAft>
-                <a:spcPts val="400"/>
-              </a:spcAft>
-              <a:defRPr sz="1400">
-                <a:solidFill>
-                  <a:srgbClr val="1E293B"/>
-                </a:solidFill>
-                <a:latin typeface="Calibri"/>
-              </a:defRPr>
-            </a:pPr>
-            <a:r>
-              <a:t>• Protects technicians from deadly toxic gases (H2S &amp; CO)</a:t>
-            </a:r>
-          </a:p>
-          <a:p>
-            <a:pPr>
-              <a:spcAft>
-                <a:spcPts val="400"/>
-              </a:spcAft>
-              <a:defRPr sz="1400">
-                <a:solidFill>
-                  <a:srgbClr val="1E293B"/>
-                </a:solidFill>
-                <a:latin typeface="Calibri"/>
-              </a:defRPr>
-            </a:pPr>
-            <a:r>
-              <a:t>• Guarantees safe atmospheric levels before any confined entry</a:t>
-            </a:r>
-          </a:p>
-        </p:txBody>
-      </p:sp>
-      <p:sp>
-        <p:nvSpPr>
-          <p:cNvPr id="4" name="Rounded Rectangle 3"/>
+          <a:bodyPr rtlCol="0" anchor="ctr"/>
+          <a:lstStyle/>
+          <a:p>
+            <a:pPr algn="ctr"/>
+          </a:p>
+        </p:txBody>
+      </p:sp>
+      <p:sp>
+        <p:nvSpPr>
+          <p:cNvPr id="3" name="Rectangle 2"/>
           <p:cNvSpPr/>
           <p:nvPr/>
         </p:nvSpPr>
         <p:spPr>
           <a:xfrm>
-            <a:off x="6181344" y="1828800"/>
-            <a:ext cx="5266944" cy="2148840"/>
-          </a:xfrm>
-          <a:prstGeom prst="roundRect">
+            <a:off x="731520" y="365760"/>
+            <a:ext cx="10728655" cy="36576"/>
+          </a:xfrm>
+          <a:prstGeom prst="rect">
             <a:avLst/>
           </a:prstGeom>
           <a:solidFill>
-            <a:srgbClr val="F8FAFC"/>
+            <a:srgbClr val="0D9488"/>
           </a:solidFill>
-          <a:ln w="12700">
-            <a:solidFill>
-              <a:srgbClr val="E2E8F0"/>
-            </a:solidFill>
+          <a:ln>
+            <a:noFill/>
           </a:ln>
         </p:spPr>
         <p:style>
@@ -4478,86 +5172,61 @@
           </a:fontRef>
         </p:style>
         <p:txBody>
-          <a:bodyPr rtlCol="0" anchor="ctr" wrap="square" lIns="228600" tIns="182880" rIns="228600"/>
-          <a:lstStyle/>
-          <a:p>
-            <a:pPr algn="ctr">
-              <a:spcAft>
-                <a:spcPts val="200"/>
-              </a:spcAft>
-              <a:defRPr sz="1700" b="1">
-                <a:solidFill>
-                  <a:srgbClr val="1E56A0"/>
-                </a:solidFill>
-                <a:latin typeface="Calibri"/>
-              </a:defRPr>
-            </a:pPr>
-            <a:r>
-              <a:t>Zero-Energy Isolation (LOTO)</a:t>
-            </a:r>
-          </a:p>
-          <a:p>
-            <a:pPr>
-              <a:spcAft>
-                <a:spcPts val="800"/>
-              </a:spcAft>
-              <a:defRPr sz="1200" b="1">
-                <a:solidFill>
-                  <a:srgbClr val="D97706"/>
-                </a:solidFill>
-                <a:latin typeface="Calibri"/>
-              </a:defRPr>
-            </a:pPr>
-            <a:r>
-              <a:t>Guaranteed Physical Protection</a:t>
-            </a:r>
-          </a:p>
-          <a:p>
-            <a:pPr>
-              <a:spcAft>
-                <a:spcPts val="400"/>
-              </a:spcAft>
+          <a:bodyPr rtlCol="0" anchor="ctr"/>
+          <a:lstStyle/>
+          <a:p>
+            <a:pPr algn="ctr"/>
+          </a:p>
+        </p:txBody>
+      </p:sp>
+      <p:sp>
+        <p:nvSpPr>
+          <p:cNvPr id="4" name="TextBox 3"/>
+          <p:cNvSpPr txBox="1"/>
+          <p:nvPr/>
+        </p:nvSpPr>
+        <p:spPr>
+          <a:xfrm>
+            <a:off x="731520" y="502920"/>
+            <a:ext cx="10728655" cy="960120"/>
+          </a:xfrm>
+          <a:prstGeom prst="rect">
+            <a:avLst/>
+          </a:prstGeom>
+          <a:noFill/>
+        </p:spPr>
+        <p:txBody>
+          <a:bodyPr wrap="square" lIns="0" tIns="0" rIns="0" bIns="0">
+            <a:spAutoFit/>
+          </a:bodyPr>
+          <a:lstStyle/>
+          <a:p>
+            <a:pPr>
+              <a:defRPr sz="3200" b="1">
+                <a:solidFill>
+                  <a:srgbClr val="0F1E36"/>
+                </a:solidFill>
+                <a:latin typeface="Calibri"/>
+              </a:defRPr>
+            </a:pPr>
+            <a:r>
+              <a:t>3. Why is this Application Required?</a:t>
+            </a:r>
+          </a:p>
+          <a:p>
+            <a:pPr>
+              <a:spcBef>
+                <a:spcPts val="300"/>
+              </a:spcBef>
               <a:defRPr sz="1400">
                 <a:solidFill>
-                  <a:srgbClr val="1E293B"/>
-                </a:solidFill>
-                <a:latin typeface="Calibri"/>
-              </a:defRPr>
-            </a:pPr>
-            <a:r>
-              <a:t>• Positive mechanical isolation via physical spade blind insertion</a:t>
-            </a:r>
-          </a:p>
-          <a:p>
-            <a:pPr>
-              <a:spcAft>
-                <a:spcPts val="400"/>
-              </a:spcAft>
-              <a:defRPr sz="1400">
-                <a:solidFill>
-                  <a:srgbClr val="1E293B"/>
-                </a:solidFill>
-                <a:latin typeface="Calibri"/>
-              </a:defRPr>
-            </a:pPr>
-            <a:r>
-              <a:t>• Electrical Lock-Out &amp; Tag-Out with personal locks and keys</a:t>
-            </a:r>
-          </a:p>
-          <a:p>
-            <a:pPr>
-              <a:spcAft>
-                <a:spcPts val="400"/>
-              </a:spcAft>
-              <a:defRPr sz="1400">
-                <a:solidFill>
-                  <a:srgbClr val="1E293B"/>
-                </a:solidFill>
-                <a:latin typeface="Calibri"/>
-              </a:defRPr>
-            </a:pPr>
-            <a:r>
-              <a:t>• Prevents accidental equipment energization or valve openings</a:t>
+                  <a:srgbClr val="64748B"/>
+                </a:solidFill>
+                <a:latin typeface="Calibri"/>
+              </a:defRPr>
+            </a:pPr>
+            <a:r>
+              <a:t>Key Message: Replacing fragmented manual habits with a structured digital process.</a:t>
             </a:r>
           </a:p>
         </p:txBody>
@@ -4570,16 +5239,16 @@
         </p:nvSpPr>
         <p:spPr>
           <a:xfrm>
-            <a:off x="731520" y="4160520"/>
-            <a:ext cx="5266944" cy="2148840"/>
+            <a:off x="731520" y="1691640"/>
+            <a:ext cx="3291840" cy="4160520"/>
           </a:xfrm>
           <a:prstGeom prst="roundRect">
             <a:avLst/>
           </a:prstGeom>
           <a:solidFill>
-            <a:srgbClr val="F8FAFC"/>
+            <a:srgbClr val="FFFFFF"/>
           </a:solidFill>
-          <a:ln w="12700">
+          <a:ln w="19050">
             <a:solidFill>
               <a:srgbClr val="E2E8F0"/>
             </a:solidFill>
@@ -4600,111 +5269,32 @@
           </a:fontRef>
         </p:style>
         <p:txBody>
-          <a:bodyPr rtlCol="0" anchor="ctr" wrap="square" lIns="228600" tIns="182880" rIns="228600"/>
-          <a:lstStyle/>
-          <a:p>
-            <a:pPr algn="ctr">
-              <a:spcAft>
-                <a:spcPts val="200"/>
-              </a:spcAft>
-              <a:defRPr sz="1700" b="1">
-                <a:solidFill>
-                  <a:srgbClr val="1E56A0"/>
-                </a:solidFill>
-                <a:latin typeface="Calibri"/>
-              </a:defRPr>
-            </a:pPr>
-            <a:r>
-              <a:t>Conflict &amp; SIMOPS Elimination</a:t>
-            </a:r>
-          </a:p>
-          <a:p>
-            <a:pPr>
-              <a:spcAft>
-                <a:spcPts val="800"/>
-              </a:spcAft>
-              <a:defRPr sz="1200" b="1">
-                <a:solidFill>
-                  <a:srgbClr val="D97706"/>
-                </a:solidFill>
-                <a:latin typeface="Calibri"/>
-              </a:defRPr>
-            </a:pPr>
-            <a:r>
-              <a:t>Cross-Crew Separation</a:t>
-            </a:r>
-          </a:p>
-          <a:p>
-            <a:pPr>
-              <a:spcAft>
-                <a:spcPts val="400"/>
-              </a:spcAft>
-              <a:defRPr sz="1400">
-                <a:solidFill>
-                  <a:srgbClr val="1E293B"/>
-                </a:solidFill>
-                <a:latin typeface="Calibri"/>
-              </a:defRPr>
-            </a:pPr>
-            <a:r>
-              <a:t>• Prevents hot sparks falling onto lower-deck chemical operations</a:t>
-            </a:r>
-          </a:p>
-          <a:p>
-            <a:pPr>
-              <a:spcAft>
-                <a:spcPts val="400"/>
-              </a:spcAft>
-              <a:defRPr sz="1400">
-                <a:solidFill>
-                  <a:srgbClr val="1E293B"/>
-                </a:solidFill>
-                <a:latin typeface="Calibri"/>
-              </a:defRPr>
-            </a:pPr>
-            <a:r>
-              <a:t>• Maintains critical physical safety barriers between contractors</a:t>
-            </a:r>
-          </a:p>
-          <a:p>
-            <a:pPr>
-              <a:spcAft>
-                <a:spcPts val="400"/>
-              </a:spcAft>
-              <a:defRPr sz="1400">
-                <a:solidFill>
-                  <a:srgbClr val="1E293B"/>
-                </a:solidFill>
-                <a:latin typeface="Calibri"/>
-              </a:defRPr>
-            </a:pPr>
-            <a:r>
-              <a:t>• Gives the control room real-time visibility over all plant jobs</a:t>
-            </a:r>
-          </a:p>
-        </p:txBody>
-      </p:sp>
-      <p:sp>
-        <p:nvSpPr>
-          <p:cNvPr id="6" name="Rounded Rectangle 5"/>
+          <a:bodyPr rtlCol="0" anchor="ctr"/>
+          <a:lstStyle/>
+          <a:p>
+            <a:pPr algn="ctr"/>
+          </a:p>
+        </p:txBody>
+      </p:sp>
+      <p:sp>
+        <p:nvSpPr>
+          <p:cNvPr id="6" name="Rectangle 5"/>
           <p:cNvSpPr/>
           <p:nvPr/>
         </p:nvSpPr>
         <p:spPr>
           <a:xfrm>
-            <a:off x="6181344" y="4160520"/>
-            <a:ext cx="5266944" cy="2148840"/>
-          </a:xfrm>
-          <a:prstGeom prst="roundRect">
+            <a:off x="731520" y="1691640"/>
+            <a:ext cx="3291840" cy="502920"/>
+          </a:xfrm>
+          <a:prstGeom prst="rect">
             <a:avLst/>
           </a:prstGeom>
           <a:solidFill>
-            <a:srgbClr val="F8FAFC"/>
+            <a:srgbClr val="475569"/>
           </a:solidFill>
-          <a:ln w="12700">
-            <a:solidFill>
-              <a:srgbClr val="E2E8F0"/>
-            </a:solidFill>
+          <a:ln>
+            <a:noFill/>
           </a:ln>
         </p:spPr>
         <p:style>
@@ -4722,86 +5312,1053 @@
           </a:fontRef>
         </p:style>
         <p:txBody>
-          <a:bodyPr rtlCol="0" anchor="ctr" wrap="square" lIns="228600" tIns="182880" rIns="228600"/>
+          <a:bodyPr rtlCol="0" anchor="ctr"/>
           <a:lstStyle/>
           <a:p>
             <a:pPr algn="ctr">
+              <a:defRPr sz="1300" b="1">
+                <a:solidFill>
+                  <a:srgbClr val="FFFFFF"/>
+                </a:solidFill>
+                <a:latin typeface="Calibri"/>
+              </a:defRPr>
+            </a:pPr>
+            <a:r>
+              <a:t>WITHOUT STRUCTURED CONTROL</a:t>
+            </a:r>
+          </a:p>
+        </p:txBody>
+      </p:sp>
+      <p:sp>
+        <p:nvSpPr>
+          <p:cNvPr id="7" name="TextBox 6"/>
+          <p:cNvSpPr txBox="1"/>
+          <p:nvPr/>
+        </p:nvSpPr>
+        <p:spPr>
+          <a:xfrm>
+            <a:off x="914400" y="2331720"/>
+            <a:ext cx="2926080" cy="3383280"/>
+          </a:xfrm>
+          <a:prstGeom prst="rect">
+            <a:avLst/>
+          </a:prstGeom>
+          <a:noFill/>
+        </p:spPr>
+        <p:txBody>
+          <a:bodyPr wrap="square">
+            <a:spAutoFit/>
+          </a:bodyPr>
+          <a:lstStyle/>
+          <a:p>
+            <a:pPr>
+              <a:defRPr sz="1250" b="1">
+                <a:solidFill>
+                  <a:srgbClr val="0F1E36"/>
+                </a:solidFill>
+                <a:latin typeface="Calibri"/>
+              </a:defRPr>
+            </a:pPr>
+            <a:r>
+              <a:t>✖  Fragmented Information</a:t>
+            </a:r>
+          </a:p>
+          <a:p>
+            <a:pPr>
               <a:spcAft>
-                <a:spcPts val="200"/>
+                <a:spcPts val="1000"/>
               </a:spcAft>
-              <a:defRPr sz="1700" b="1">
-                <a:solidFill>
-                  <a:srgbClr val="1E56A0"/>
-                </a:solidFill>
-                <a:latin typeface="Calibri"/>
-              </a:defRPr>
-            </a:pPr>
-            <a:r>
-              <a:t>Legal Accountability &amp; Compliance</a:t>
+              <a:defRPr sz="1100">
+                <a:solidFill>
+                  <a:srgbClr val="334155"/>
+                </a:solidFill>
+                <a:latin typeface="Calibri"/>
+              </a:defRPr>
+            </a:pPr>
+            <a:r>
+              <a:t>Paper permits, emails, and disconnected spreadsheets.</a:t>
+            </a:r>
+          </a:p>
+          <a:p>
+            <a:pPr>
+              <a:defRPr sz="1250" b="1">
+                <a:solidFill>
+                  <a:srgbClr val="0F1E36"/>
+                </a:solidFill>
+                <a:latin typeface="Calibri"/>
+              </a:defRPr>
+            </a:pPr>
+            <a:r>
+              <a:t>✖  Limited Operational Visibility</a:t>
             </a:r>
           </a:p>
           <a:p>
             <a:pPr>
               <a:spcAft>
-                <a:spcPts val="800"/>
+                <a:spcPts val="1000"/>
               </a:spcAft>
-              <a:defRPr sz="1200" b="1">
-                <a:solidFill>
-                  <a:srgbClr val="D97706"/>
-                </a:solidFill>
-                <a:latin typeface="Calibri"/>
-              </a:defRPr>
-            </a:pPr>
-            <a:r>
-              <a:t>Regulatory Defense</a:t>
+              <a:defRPr sz="1100">
+                <a:solidFill>
+                  <a:srgbClr val="334155"/>
+                </a:solidFill>
+                <a:latin typeface="Calibri"/>
+              </a:defRPr>
+            </a:pPr>
+            <a:r>
+              <a:t>Management cannot see active jobs in real time.</a:t>
+            </a:r>
+          </a:p>
+          <a:p>
+            <a:pPr>
+              <a:defRPr sz="1250" b="1">
+                <a:solidFill>
+                  <a:srgbClr val="0F1E36"/>
+                </a:solidFill>
+                <a:latin typeface="Calibri"/>
+              </a:defRPr>
+            </a:pPr>
+            <a:r>
+              <a:t>✖  Higher Coordination Risk</a:t>
             </a:r>
           </a:p>
           <a:p>
             <a:pPr>
               <a:spcAft>
-                <a:spcPts val="400"/>
+                <a:spcPts val="1000"/>
               </a:spcAft>
-              <a:defRPr sz="1400">
-                <a:solidFill>
-                  <a:srgbClr val="1E293B"/>
-                </a:solidFill>
-                <a:latin typeface="Calibri"/>
-              </a:defRPr>
-            </a:pPr>
-            <a:r>
-              <a:t>• Signed mutual agreement between operations and maintenance</a:t>
+              <a:defRPr sz="1100">
+                <a:solidFill>
+                  <a:srgbClr val="334155"/>
+                </a:solidFill>
+                <a:latin typeface="Calibri"/>
+              </a:defRPr>
+            </a:pPr>
+            <a:r>
+              <a:t>Conflicting work tasks occur without prior warning.</a:t>
+            </a:r>
+          </a:p>
+          <a:p>
+            <a:pPr>
+              <a:defRPr sz="1250" b="1">
+                <a:solidFill>
+                  <a:srgbClr val="0F1E36"/>
+                </a:solidFill>
+                <a:latin typeface="Calibri"/>
+              </a:defRPr>
+            </a:pPr>
+            <a:r>
+              <a:t>✖  Weak Accountability</a:t>
             </a:r>
           </a:p>
           <a:p>
             <a:pPr>
               <a:spcAft>
-                <a:spcPts val="400"/>
+                <a:spcPts val="1000"/>
               </a:spcAft>
-              <a:defRPr sz="1400">
-                <a:solidFill>
-                  <a:srgbClr val="1E293B"/>
-                </a:solidFill>
-                <a:latin typeface="Calibri"/>
-              </a:defRPr>
-            </a:pPr>
-            <a:r>
-              <a:t>• Every worker acknowledges hazards before touching equipment</a:t>
-            </a:r>
-          </a:p>
-          <a:p>
-            <a:pPr>
-              <a:spcAft>
-                <a:spcPts val="400"/>
-              </a:spcAft>
-              <a:defRPr sz="1400">
-                <a:solidFill>
-                  <a:srgbClr val="1E293B"/>
-                </a:solidFill>
-                <a:latin typeface="Calibri"/>
-              </a:defRPr>
-            </a:pPr>
-            <a:r>
-              <a:t>• Provides an unalterable audit log for government &amp; safety audits</a:t>
+              <a:defRPr sz="1100">
+                <a:solidFill>
+                  <a:srgbClr val="334155"/>
+                </a:solidFill>
+                <a:latin typeface="Calibri"/>
+              </a:defRPr>
+            </a:pPr>
+            <a:r>
+              <a:t>Hard to verify who approved or checked safety controls.</a:t>
+            </a:r>
+          </a:p>
+        </p:txBody>
+      </p:sp>
+      <p:sp>
+        <p:nvSpPr>
+          <p:cNvPr id="8" name="Rounded Rectangle 7"/>
+          <p:cNvSpPr/>
+          <p:nvPr/>
+        </p:nvSpPr>
+        <p:spPr>
+          <a:xfrm>
+            <a:off x="4327855" y="1691640"/>
+            <a:ext cx="3456432" cy="1261872"/>
+          </a:xfrm>
+          <a:prstGeom prst="roundRect">
+            <a:avLst/>
+          </a:prstGeom>
+          <a:solidFill>
+            <a:srgbClr val="FFFFFF"/>
+          </a:solidFill>
+          <a:ln w="19050">
+            <a:solidFill>
+              <a:srgbClr val="E2E8F0"/>
+            </a:solidFill>
+          </a:ln>
+        </p:spPr>
+        <p:style>
+          <a:lnRef idx="1">
+            <a:schemeClr val="accent1"/>
+          </a:lnRef>
+          <a:fillRef idx="3">
+            <a:schemeClr val="accent1"/>
+          </a:fillRef>
+          <a:effectRef idx="2">
+            <a:schemeClr val="accent1"/>
+          </a:effectRef>
+          <a:fontRef idx="minor">
+            <a:schemeClr val="lt1"/>
+          </a:fontRef>
+        </p:style>
+        <p:txBody>
+          <a:bodyPr rtlCol="0" anchor="ctr"/>
+          <a:lstStyle/>
+          <a:p>
+            <a:pPr algn="ctr"/>
+          </a:p>
+        </p:txBody>
+      </p:sp>
+      <p:sp>
+        <p:nvSpPr>
+          <p:cNvPr id="9" name="Rectangle 8"/>
+          <p:cNvSpPr/>
+          <p:nvPr/>
+        </p:nvSpPr>
+        <p:spPr>
+          <a:xfrm>
+            <a:off x="4327855" y="1691640"/>
+            <a:ext cx="109728" cy="1261872"/>
+          </a:xfrm>
+          <a:prstGeom prst="rect">
+            <a:avLst/>
+          </a:prstGeom>
+          <a:solidFill>
+            <a:srgbClr val="0D9488"/>
+          </a:solidFill>
+          <a:ln>
+            <a:noFill/>
+          </a:ln>
+        </p:spPr>
+        <p:style>
+          <a:lnRef idx="1">
+            <a:schemeClr val="accent1"/>
+          </a:lnRef>
+          <a:fillRef idx="3">
+            <a:schemeClr val="accent1"/>
+          </a:fillRef>
+          <a:effectRef idx="2">
+            <a:schemeClr val="accent1"/>
+          </a:effectRef>
+          <a:fontRef idx="minor">
+            <a:schemeClr val="lt1"/>
+          </a:fontRef>
+        </p:style>
+        <p:txBody>
+          <a:bodyPr rtlCol="0" anchor="ctr"/>
+          <a:lstStyle/>
+          <a:p>
+            <a:pPr algn="ctr"/>
+          </a:p>
+        </p:txBody>
+      </p:sp>
+      <p:sp>
+        <p:nvSpPr>
+          <p:cNvPr id="10" name="TextBox 9"/>
+          <p:cNvSpPr txBox="1"/>
+          <p:nvPr/>
+        </p:nvSpPr>
+        <p:spPr>
+          <a:xfrm>
+            <a:off x="4547311" y="1801368"/>
+            <a:ext cx="3136392" cy="1042416"/>
+          </a:xfrm>
+          <a:prstGeom prst="rect">
+            <a:avLst/>
+          </a:prstGeom>
+          <a:noFill/>
+        </p:spPr>
+        <p:txBody>
+          <a:bodyPr wrap="square">
+            <a:spAutoFit/>
+          </a:bodyPr>
+          <a:lstStyle/>
+          <a:p>
+            <a:pPr>
+              <a:defRPr sz="1250" b="1">
+                <a:solidFill>
+                  <a:srgbClr val="1E3A66"/>
+                </a:solidFill>
+                <a:latin typeface="Calibri"/>
+              </a:defRPr>
+            </a:pPr>
+            <a:r>
+              <a:t>1. Controlled Work</a:t>
+            </a:r>
+          </a:p>
+          <a:p>
+            <a:pPr>
+              <a:spcBef>
+                <a:spcPts val="300"/>
+              </a:spcBef>
+              <a:defRPr sz="1050">
+                <a:solidFill>
+                  <a:srgbClr val="334155"/>
+                </a:solidFill>
+                <a:latin typeface="Calibri"/>
+              </a:defRPr>
+            </a:pPr>
+            <a:r>
+              <a:t>Structured digital workflow before and during execution.</a:t>
+            </a:r>
+          </a:p>
+        </p:txBody>
+      </p:sp>
+      <p:sp>
+        <p:nvSpPr>
+          <p:cNvPr id="11" name="Rounded Rectangle 10"/>
+          <p:cNvSpPr/>
+          <p:nvPr/>
+        </p:nvSpPr>
+        <p:spPr>
+          <a:xfrm>
+            <a:off x="8003743" y="1691640"/>
+            <a:ext cx="3456432" cy="1261872"/>
+          </a:xfrm>
+          <a:prstGeom prst="roundRect">
+            <a:avLst/>
+          </a:prstGeom>
+          <a:solidFill>
+            <a:srgbClr val="FFFFFF"/>
+          </a:solidFill>
+          <a:ln w="19050">
+            <a:solidFill>
+              <a:srgbClr val="E2E8F0"/>
+            </a:solidFill>
+          </a:ln>
+        </p:spPr>
+        <p:style>
+          <a:lnRef idx="1">
+            <a:schemeClr val="accent1"/>
+          </a:lnRef>
+          <a:fillRef idx="3">
+            <a:schemeClr val="accent1"/>
+          </a:fillRef>
+          <a:effectRef idx="2">
+            <a:schemeClr val="accent1"/>
+          </a:effectRef>
+          <a:fontRef idx="minor">
+            <a:schemeClr val="lt1"/>
+          </a:fontRef>
+        </p:style>
+        <p:txBody>
+          <a:bodyPr rtlCol="0" anchor="ctr"/>
+          <a:lstStyle/>
+          <a:p>
+            <a:pPr algn="ctr"/>
+          </a:p>
+        </p:txBody>
+      </p:sp>
+      <p:sp>
+        <p:nvSpPr>
+          <p:cNvPr id="12" name="Rectangle 11"/>
+          <p:cNvSpPr/>
+          <p:nvPr/>
+        </p:nvSpPr>
+        <p:spPr>
+          <a:xfrm>
+            <a:off x="8003743" y="1691640"/>
+            <a:ext cx="109728" cy="1261872"/>
+          </a:xfrm>
+          <a:prstGeom prst="rect">
+            <a:avLst/>
+          </a:prstGeom>
+          <a:solidFill>
+            <a:srgbClr val="0D9488"/>
+          </a:solidFill>
+          <a:ln>
+            <a:noFill/>
+          </a:ln>
+        </p:spPr>
+        <p:style>
+          <a:lnRef idx="1">
+            <a:schemeClr val="accent1"/>
+          </a:lnRef>
+          <a:fillRef idx="3">
+            <a:schemeClr val="accent1"/>
+          </a:fillRef>
+          <a:effectRef idx="2">
+            <a:schemeClr val="accent1"/>
+          </a:effectRef>
+          <a:fontRef idx="minor">
+            <a:schemeClr val="lt1"/>
+          </a:fontRef>
+        </p:style>
+        <p:txBody>
+          <a:bodyPr rtlCol="0" anchor="ctr"/>
+          <a:lstStyle/>
+          <a:p>
+            <a:pPr algn="ctr"/>
+          </a:p>
+        </p:txBody>
+      </p:sp>
+      <p:sp>
+        <p:nvSpPr>
+          <p:cNvPr id="13" name="TextBox 12"/>
+          <p:cNvSpPr txBox="1"/>
+          <p:nvPr/>
+        </p:nvSpPr>
+        <p:spPr>
+          <a:xfrm>
+            <a:off x="8223199" y="1801368"/>
+            <a:ext cx="3136392" cy="1042416"/>
+          </a:xfrm>
+          <a:prstGeom prst="rect">
+            <a:avLst/>
+          </a:prstGeom>
+          <a:noFill/>
+        </p:spPr>
+        <p:txBody>
+          <a:bodyPr wrap="square">
+            <a:spAutoFit/>
+          </a:bodyPr>
+          <a:lstStyle/>
+          <a:p>
+            <a:pPr>
+              <a:defRPr sz="1250" b="1">
+                <a:solidFill>
+                  <a:srgbClr val="1E3A66"/>
+                </a:solidFill>
+                <a:latin typeface="Calibri"/>
+              </a:defRPr>
+            </a:pPr>
+            <a:r>
+              <a:t>2. Safer Operations</a:t>
+            </a:r>
+          </a:p>
+          <a:p>
+            <a:pPr>
+              <a:spcBef>
+                <a:spcPts val="300"/>
+              </a:spcBef>
+              <a:defRPr sz="1050">
+                <a:solidFill>
+                  <a:srgbClr val="334155"/>
+                </a:solidFill>
+                <a:latin typeface="Calibri"/>
+              </a:defRPr>
+            </a:pPr>
+            <a:r>
+              <a:t>Built-in energy isolation (LOTOTO) and SIMOPS conflict checks.</a:t>
+            </a:r>
+          </a:p>
+        </p:txBody>
+      </p:sp>
+      <p:sp>
+        <p:nvSpPr>
+          <p:cNvPr id="14" name="Rounded Rectangle 13"/>
+          <p:cNvSpPr/>
+          <p:nvPr/>
+        </p:nvSpPr>
+        <p:spPr>
+          <a:xfrm>
+            <a:off x="4327855" y="3118104"/>
+            <a:ext cx="3456432" cy="1261872"/>
+          </a:xfrm>
+          <a:prstGeom prst="roundRect">
+            <a:avLst/>
+          </a:prstGeom>
+          <a:solidFill>
+            <a:srgbClr val="FFFFFF"/>
+          </a:solidFill>
+          <a:ln w="19050">
+            <a:solidFill>
+              <a:srgbClr val="E2E8F0"/>
+            </a:solidFill>
+          </a:ln>
+        </p:spPr>
+        <p:style>
+          <a:lnRef idx="1">
+            <a:schemeClr val="accent1"/>
+          </a:lnRef>
+          <a:fillRef idx="3">
+            <a:schemeClr val="accent1"/>
+          </a:fillRef>
+          <a:effectRef idx="2">
+            <a:schemeClr val="accent1"/>
+          </a:effectRef>
+          <a:fontRef idx="minor">
+            <a:schemeClr val="lt1"/>
+          </a:fontRef>
+        </p:style>
+        <p:txBody>
+          <a:bodyPr rtlCol="0" anchor="ctr"/>
+          <a:lstStyle/>
+          <a:p>
+            <a:pPr algn="ctr"/>
+          </a:p>
+        </p:txBody>
+      </p:sp>
+      <p:sp>
+        <p:nvSpPr>
+          <p:cNvPr id="15" name="Rectangle 14"/>
+          <p:cNvSpPr/>
+          <p:nvPr/>
+        </p:nvSpPr>
+        <p:spPr>
+          <a:xfrm>
+            <a:off x="4327855" y="3118104"/>
+            <a:ext cx="109728" cy="1261872"/>
+          </a:xfrm>
+          <a:prstGeom prst="rect">
+            <a:avLst/>
+          </a:prstGeom>
+          <a:solidFill>
+            <a:srgbClr val="0D9488"/>
+          </a:solidFill>
+          <a:ln>
+            <a:noFill/>
+          </a:ln>
+        </p:spPr>
+        <p:style>
+          <a:lnRef idx="1">
+            <a:schemeClr val="accent1"/>
+          </a:lnRef>
+          <a:fillRef idx="3">
+            <a:schemeClr val="accent1"/>
+          </a:fillRef>
+          <a:effectRef idx="2">
+            <a:schemeClr val="accent1"/>
+          </a:effectRef>
+          <a:fontRef idx="minor">
+            <a:schemeClr val="lt1"/>
+          </a:fontRef>
+        </p:style>
+        <p:txBody>
+          <a:bodyPr rtlCol="0" anchor="ctr"/>
+          <a:lstStyle/>
+          <a:p>
+            <a:pPr algn="ctr"/>
+          </a:p>
+        </p:txBody>
+      </p:sp>
+      <p:sp>
+        <p:nvSpPr>
+          <p:cNvPr id="16" name="TextBox 15"/>
+          <p:cNvSpPr txBox="1"/>
+          <p:nvPr/>
+        </p:nvSpPr>
+        <p:spPr>
+          <a:xfrm>
+            <a:off x="4547311" y="3227832"/>
+            <a:ext cx="3136392" cy="1042416"/>
+          </a:xfrm>
+          <a:prstGeom prst="rect">
+            <a:avLst/>
+          </a:prstGeom>
+          <a:noFill/>
+        </p:spPr>
+        <p:txBody>
+          <a:bodyPr wrap="square">
+            <a:spAutoFit/>
+          </a:bodyPr>
+          <a:lstStyle/>
+          <a:p>
+            <a:pPr>
+              <a:defRPr sz="1250" b="1">
+                <a:solidFill>
+                  <a:srgbClr val="1E3A66"/>
+                </a:solidFill>
+                <a:latin typeface="Calibri"/>
+              </a:defRPr>
+            </a:pPr>
+            <a:r>
+              <a:t>3. Clear Accountability</a:t>
+            </a:r>
+          </a:p>
+          <a:p>
+            <a:pPr>
+              <a:spcBef>
+                <a:spcPts val="300"/>
+              </a:spcBef>
+              <a:defRPr sz="1050">
+                <a:solidFill>
+                  <a:srgbClr val="334155"/>
+                </a:solidFill>
+                <a:latin typeface="Calibri"/>
+              </a:defRPr>
+            </a:pPr>
+            <a:r>
+              <a:t>Explicit role-based ownership for approvals and closures.</a:t>
+            </a:r>
+          </a:p>
+        </p:txBody>
+      </p:sp>
+      <p:sp>
+        <p:nvSpPr>
+          <p:cNvPr id="17" name="Rounded Rectangle 16"/>
+          <p:cNvSpPr/>
+          <p:nvPr/>
+        </p:nvSpPr>
+        <p:spPr>
+          <a:xfrm>
+            <a:off x="8003743" y="3118104"/>
+            <a:ext cx="3456432" cy="1261872"/>
+          </a:xfrm>
+          <a:prstGeom prst="roundRect">
+            <a:avLst/>
+          </a:prstGeom>
+          <a:solidFill>
+            <a:srgbClr val="FFFFFF"/>
+          </a:solidFill>
+          <a:ln w="19050">
+            <a:solidFill>
+              <a:srgbClr val="E2E8F0"/>
+            </a:solidFill>
+          </a:ln>
+        </p:spPr>
+        <p:style>
+          <a:lnRef idx="1">
+            <a:schemeClr val="accent1"/>
+          </a:lnRef>
+          <a:fillRef idx="3">
+            <a:schemeClr val="accent1"/>
+          </a:fillRef>
+          <a:effectRef idx="2">
+            <a:schemeClr val="accent1"/>
+          </a:effectRef>
+          <a:fontRef idx="minor">
+            <a:schemeClr val="lt1"/>
+          </a:fontRef>
+        </p:style>
+        <p:txBody>
+          <a:bodyPr rtlCol="0" anchor="ctr"/>
+          <a:lstStyle/>
+          <a:p>
+            <a:pPr algn="ctr"/>
+          </a:p>
+        </p:txBody>
+      </p:sp>
+      <p:sp>
+        <p:nvSpPr>
+          <p:cNvPr id="18" name="Rectangle 17"/>
+          <p:cNvSpPr/>
+          <p:nvPr/>
+        </p:nvSpPr>
+        <p:spPr>
+          <a:xfrm>
+            <a:off x="8003743" y="3118104"/>
+            <a:ext cx="109728" cy="1261872"/>
+          </a:xfrm>
+          <a:prstGeom prst="rect">
+            <a:avLst/>
+          </a:prstGeom>
+          <a:solidFill>
+            <a:srgbClr val="0D9488"/>
+          </a:solidFill>
+          <a:ln>
+            <a:noFill/>
+          </a:ln>
+        </p:spPr>
+        <p:style>
+          <a:lnRef idx="1">
+            <a:schemeClr val="accent1"/>
+          </a:lnRef>
+          <a:fillRef idx="3">
+            <a:schemeClr val="accent1"/>
+          </a:fillRef>
+          <a:effectRef idx="2">
+            <a:schemeClr val="accent1"/>
+          </a:effectRef>
+          <a:fontRef idx="minor">
+            <a:schemeClr val="lt1"/>
+          </a:fontRef>
+        </p:style>
+        <p:txBody>
+          <a:bodyPr rtlCol="0" anchor="ctr"/>
+          <a:lstStyle/>
+          <a:p>
+            <a:pPr algn="ctr"/>
+          </a:p>
+        </p:txBody>
+      </p:sp>
+      <p:sp>
+        <p:nvSpPr>
+          <p:cNvPr id="19" name="TextBox 18"/>
+          <p:cNvSpPr txBox="1"/>
+          <p:nvPr/>
+        </p:nvSpPr>
+        <p:spPr>
+          <a:xfrm>
+            <a:off x="8223199" y="3227832"/>
+            <a:ext cx="3136392" cy="1042416"/>
+          </a:xfrm>
+          <a:prstGeom prst="rect">
+            <a:avLst/>
+          </a:prstGeom>
+          <a:noFill/>
+        </p:spPr>
+        <p:txBody>
+          <a:bodyPr wrap="square">
+            <a:spAutoFit/>
+          </a:bodyPr>
+          <a:lstStyle/>
+          <a:p>
+            <a:pPr>
+              <a:defRPr sz="1250" b="1">
+                <a:solidFill>
+                  <a:srgbClr val="1E3A66"/>
+                </a:solidFill>
+                <a:latin typeface="Calibri"/>
+              </a:defRPr>
+            </a:pPr>
+            <a:r>
+              <a:t>4. Operational Visibility</a:t>
+            </a:r>
+          </a:p>
+          <a:p>
+            <a:pPr>
+              <a:spcBef>
+                <a:spcPts val="300"/>
+              </a:spcBef>
+              <a:defRPr sz="1050">
+                <a:solidFill>
+                  <a:srgbClr val="334155"/>
+                </a:solidFill>
+                <a:latin typeface="Calibri"/>
+              </a:defRPr>
+            </a:pPr>
+            <a:r>
+              <a:t>Single live dashboard for permits, execution, and incidents.</a:t>
+            </a:r>
+          </a:p>
+        </p:txBody>
+      </p:sp>
+      <p:sp>
+        <p:nvSpPr>
+          <p:cNvPr id="20" name="Rounded Rectangle 19"/>
+          <p:cNvSpPr/>
+          <p:nvPr/>
+        </p:nvSpPr>
+        <p:spPr>
+          <a:xfrm>
+            <a:off x="4327855" y="4544568"/>
+            <a:ext cx="3456432" cy="1261872"/>
+          </a:xfrm>
+          <a:prstGeom prst="roundRect">
+            <a:avLst/>
+          </a:prstGeom>
+          <a:solidFill>
+            <a:srgbClr val="FFFFFF"/>
+          </a:solidFill>
+          <a:ln w="19050">
+            <a:solidFill>
+              <a:srgbClr val="E2E8F0"/>
+            </a:solidFill>
+          </a:ln>
+        </p:spPr>
+        <p:style>
+          <a:lnRef idx="1">
+            <a:schemeClr val="accent1"/>
+          </a:lnRef>
+          <a:fillRef idx="3">
+            <a:schemeClr val="accent1"/>
+          </a:fillRef>
+          <a:effectRef idx="2">
+            <a:schemeClr val="accent1"/>
+          </a:effectRef>
+          <a:fontRef idx="minor">
+            <a:schemeClr val="lt1"/>
+          </a:fontRef>
+        </p:style>
+        <p:txBody>
+          <a:bodyPr rtlCol="0" anchor="ctr"/>
+          <a:lstStyle/>
+          <a:p>
+            <a:pPr algn="ctr"/>
+          </a:p>
+        </p:txBody>
+      </p:sp>
+      <p:sp>
+        <p:nvSpPr>
+          <p:cNvPr id="21" name="Rectangle 20"/>
+          <p:cNvSpPr/>
+          <p:nvPr/>
+        </p:nvSpPr>
+        <p:spPr>
+          <a:xfrm>
+            <a:off x="4327855" y="4544568"/>
+            <a:ext cx="109728" cy="1261872"/>
+          </a:xfrm>
+          <a:prstGeom prst="rect">
+            <a:avLst/>
+          </a:prstGeom>
+          <a:solidFill>
+            <a:srgbClr val="0D9488"/>
+          </a:solidFill>
+          <a:ln>
+            <a:noFill/>
+          </a:ln>
+        </p:spPr>
+        <p:style>
+          <a:lnRef idx="1">
+            <a:schemeClr val="accent1"/>
+          </a:lnRef>
+          <a:fillRef idx="3">
+            <a:schemeClr val="accent1"/>
+          </a:fillRef>
+          <a:effectRef idx="2">
+            <a:schemeClr val="accent1"/>
+          </a:effectRef>
+          <a:fontRef idx="minor">
+            <a:schemeClr val="lt1"/>
+          </a:fontRef>
+        </p:style>
+        <p:txBody>
+          <a:bodyPr rtlCol="0" anchor="ctr"/>
+          <a:lstStyle/>
+          <a:p>
+            <a:pPr algn="ctr"/>
+          </a:p>
+        </p:txBody>
+      </p:sp>
+      <p:sp>
+        <p:nvSpPr>
+          <p:cNvPr id="22" name="TextBox 21"/>
+          <p:cNvSpPr txBox="1"/>
+          <p:nvPr/>
+        </p:nvSpPr>
+        <p:spPr>
+          <a:xfrm>
+            <a:off x="4547311" y="4654296"/>
+            <a:ext cx="3136392" cy="1042416"/>
+          </a:xfrm>
+          <a:prstGeom prst="rect">
+            <a:avLst/>
+          </a:prstGeom>
+          <a:noFill/>
+        </p:spPr>
+        <p:txBody>
+          <a:bodyPr wrap="square">
+            <a:spAutoFit/>
+          </a:bodyPr>
+          <a:lstStyle/>
+          <a:p>
+            <a:pPr>
+              <a:defRPr sz="1250" b="1">
+                <a:solidFill>
+                  <a:srgbClr val="1E3A66"/>
+                </a:solidFill>
+                <a:latin typeface="Calibri"/>
+              </a:defRPr>
+            </a:pPr>
+            <a:r>
+              <a:t>5. Traceability</a:t>
+            </a:r>
+          </a:p>
+          <a:p>
+            <a:pPr>
+              <a:spcBef>
+                <a:spcPts val="300"/>
+              </a:spcBef>
+              <a:defRPr sz="1050">
+                <a:solidFill>
+                  <a:srgbClr val="334155"/>
+                </a:solidFill>
+                <a:latin typeface="Calibri"/>
+              </a:defRPr>
+            </a:pPr>
+            <a:r>
+              <a:t>Timestamped progress notes, photo evidence, and closed archives.</a:t>
+            </a:r>
+          </a:p>
+        </p:txBody>
+      </p:sp>
+      <p:sp>
+        <p:nvSpPr>
+          <p:cNvPr id="23" name="Rounded Rectangle 22"/>
+          <p:cNvSpPr/>
+          <p:nvPr/>
+        </p:nvSpPr>
+        <p:spPr>
+          <a:xfrm>
+            <a:off x="8003743" y="4544568"/>
+            <a:ext cx="3456432" cy="1261872"/>
+          </a:xfrm>
+          <a:prstGeom prst="roundRect">
+            <a:avLst/>
+          </a:prstGeom>
+          <a:solidFill>
+            <a:srgbClr val="FFFFFF"/>
+          </a:solidFill>
+          <a:ln w="19050">
+            <a:solidFill>
+              <a:srgbClr val="E2E8F0"/>
+            </a:solidFill>
+          </a:ln>
+        </p:spPr>
+        <p:style>
+          <a:lnRef idx="1">
+            <a:schemeClr val="accent1"/>
+          </a:lnRef>
+          <a:fillRef idx="3">
+            <a:schemeClr val="accent1"/>
+          </a:fillRef>
+          <a:effectRef idx="2">
+            <a:schemeClr val="accent1"/>
+          </a:effectRef>
+          <a:fontRef idx="minor">
+            <a:schemeClr val="lt1"/>
+          </a:fontRef>
+        </p:style>
+        <p:txBody>
+          <a:bodyPr rtlCol="0" anchor="ctr"/>
+          <a:lstStyle/>
+          <a:p>
+            <a:pPr algn="ctr"/>
+          </a:p>
+        </p:txBody>
+      </p:sp>
+      <p:sp>
+        <p:nvSpPr>
+          <p:cNvPr id="24" name="Rectangle 23"/>
+          <p:cNvSpPr/>
+          <p:nvPr/>
+        </p:nvSpPr>
+        <p:spPr>
+          <a:xfrm>
+            <a:off x="8003743" y="4544568"/>
+            <a:ext cx="109728" cy="1261872"/>
+          </a:xfrm>
+          <a:prstGeom prst="rect">
+            <a:avLst/>
+          </a:prstGeom>
+          <a:solidFill>
+            <a:srgbClr val="0D9488"/>
+          </a:solidFill>
+          <a:ln>
+            <a:noFill/>
+          </a:ln>
+        </p:spPr>
+        <p:style>
+          <a:lnRef idx="1">
+            <a:schemeClr val="accent1"/>
+          </a:lnRef>
+          <a:fillRef idx="3">
+            <a:schemeClr val="accent1"/>
+          </a:fillRef>
+          <a:effectRef idx="2">
+            <a:schemeClr val="accent1"/>
+          </a:effectRef>
+          <a:fontRef idx="minor">
+            <a:schemeClr val="lt1"/>
+          </a:fontRef>
+        </p:style>
+        <p:txBody>
+          <a:bodyPr rtlCol="0" anchor="ctr"/>
+          <a:lstStyle/>
+          <a:p>
+            <a:pPr algn="ctr"/>
+          </a:p>
+        </p:txBody>
+      </p:sp>
+      <p:sp>
+        <p:nvSpPr>
+          <p:cNvPr id="25" name="TextBox 24"/>
+          <p:cNvSpPr txBox="1"/>
+          <p:nvPr/>
+        </p:nvSpPr>
+        <p:spPr>
+          <a:xfrm>
+            <a:off x="8223199" y="4654296"/>
+            <a:ext cx="3136392" cy="1042416"/>
+          </a:xfrm>
+          <a:prstGeom prst="rect">
+            <a:avLst/>
+          </a:prstGeom>
+          <a:noFill/>
+        </p:spPr>
+        <p:txBody>
+          <a:bodyPr wrap="square">
+            <a:spAutoFit/>
+          </a:bodyPr>
+          <a:lstStyle/>
+          <a:p>
+            <a:pPr>
+              <a:defRPr sz="1250" b="1">
+                <a:solidFill>
+                  <a:srgbClr val="1E3A66"/>
+                </a:solidFill>
+                <a:latin typeface="Calibri"/>
+              </a:defRPr>
+            </a:pPr>
+            <a:r>
+              <a:t>6. Data-Driven Management</a:t>
+            </a:r>
+          </a:p>
+          <a:p>
+            <a:pPr>
+              <a:spcBef>
+                <a:spcPts val="300"/>
+              </a:spcBef>
+              <a:defRPr sz="1050">
+                <a:solidFill>
+                  <a:srgbClr val="334155"/>
+                </a:solidFill>
+                <a:latin typeface="Calibri"/>
+              </a:defRPr>
+            </a:pPr>
+            <a:r>
+              <a:t>Real-time KPIs and CSV exports for safety review and audits.</a:t>
+            </a:r>
+          </a:p>
+        </p:txBody>
+      </p:sp>
+      <p:sp>
+        <p:nvSpPr>
+          <p:cNvPr id="26" name="Rounded Rectangle 25"/>
+          <p:cNvSpPr/>
+          <p:nvPr/>
+        </p:nvSpPr>
+        <p:spPr>
+          <a:xfrm>
+            <a:off x="731520" y="6035040"/>
+            <a:ext cx="10728655" cy="502920"/>
+          </a:xfrm>
+          <a:prstGeom prst="roundRect">
+            <a:avLst/>
+          </a:prstGeom>
+          <a:solidFill>
+            <a:srgbClr val="FFFFFF"/>
+          </a:solidFill>
+          <a:ln w="19050">
+            <a:solidFill>
+              <a:srgbClr val="E2E8F0"/>
+            </a:solidFill>
+          </a:ln>
+        </p:spPr>
+        <p:style>
+          <a:lnRef idx="1">
+            <a:schemeClr val="accent1"/>
+          </a:lnRef>
+          <a:fillRef idx="3">
+            <a:schemeClr val="accent1"/>
+          </a:fillRef>
+          <a:effectRef idx="2">
+            <a:schemeClr val="accent1"/>
+          </a:effectRef>
+          <a:fontRef idx="minor">
+            <a:schemeClr val="lt1"/>
+          </a:fontRef>
+        </p:style>
+        <p:txBody>
+          <a:bodyPr rtlCol="0" anchor="ctr" wrap="square"/>
+          <a:lstStyle/>
+          <a:p>
+            <a:pPr algn="ctr">
+              <a:defRPr sz="1350" b="1">
+                <a:solidFill>
+                  <a:srgbClr val="0F1E36"/>
+                </a:solidFill>
+                <a:latin typeface="Calibri"/>
+              </a:defRPr>
+            </a:pPr>
+            <a:r>
+              <a:t>Business Outcome: Provides a structured digital process to support safer and more controlled work operations.</a:t>
             </a:r>
           </a:p>
         </p:txBody>
@@ -4826,14 +6383,100 @@
       <p:grpSpPr/>
       <p:sp>
         <p:nvSpPr>
-          <p:cNvPr id="2" name="TextBox 1"/>
+          <p:cNvPr id="2" name="Rectangle 1"/>
+          <p:cNvSpPr/>
+          <p:nvPr/>
+        </p:nvSpPr>
+        <p:spPr>
+          <a:xfrm>
+            <a:off x="0" y="0"/>
+            <a:ext cx="12191695" cy="6858000"/>
+          </a:xfrm>
+          <a:prstGeom prst="rect">
+            <a:avLst/>
+          </a:prstGeom>
+          <a:solidFill>
+            <a:srgbClr val="F8FAFC"/>
+          </a:solidFill>
+          <a:ln>
+            <a:noFill/>
+          </a:ln>
+        </p:spPr>
+        <p:style>
+          <a:lnRef idx="1">
+            <a:schemeClr val="accent1"/>
+          </a:lnRef>
+          <a:fillRef idx="3">
+            <a:schemeClr val="accent1"/>
+          </a:fillRef>
+          <a:effectRef idx="2">
+            <a:schemeClr val="accent1"/>
+          </a:effectRef>
+          <a:fontRef idx="minor">
+            <a:schemeClr val="lt1"/>
+          </a:fontRef>
+        </p:style>
+        <p:txBody>
+          <a:bodyPr rtlCol="0" anchor="ctr"/>
+          <a:lstStyle/>
+          <a:p>
+            <a:pPr algn="ctr"/>
+          </a:p>
+        </p:txBody>
+      </p:sp>
+      <p:sp>
+        <p:nvSpPr>
+          <p:cNvPr id="3" name="Rectangle 2"/>
+          <p:cNvSpPr/>
+          <p:nvPr/>
+        </p:nvSpPr>
+        <p:spPr>
+          <a:xfrm>
+            <a:off x="731520" y="365760"/>
+            <a:ext cx="10728655" cy="36576"/>
+          </a:xfrm>
+          <a:prstGeom prst="rect">
+            <a:avLst/>
+          </a:prstGeom>
+          <a:solidFill>
+            <a:srgbClr val="0D9488"/>
+          </a:solidFill>
+          <a:ln>
+            <a:noFill/>
+          </a:ln>
+        </p:spPr>
+        <p:style>
+          <a:lnRef idx="1">
+            <a:schemeClr val="accent1"/>
+          </a:lnRef>
+          <a:fillRef idx="3">
+            <a:schemeClr val="accent1"/>
+          </a:fillRef>
+          <a:effectRef idx="2">
+            <a:schemeClr val="accent1"/>
+          </a:effectRef>
+          <a:fontRef idx="minor">
+            <a:schemeClr val="lt1"/>
+          </a:fontRef>
+        </p:style>
+        <p:txBody>
+          <a:bodyPr rtlCol="0" anchor="ctr"/>
+          <a:lstStyle/>
+          <a:p>
+            <a:pPr algn="ctr"/>
+          </a:p>
+        </p:txBody>
+      </p:sp>
+      <p:sp>
+        <p:nvSpPr>
+          <p:cNvPr id="4" name="TextBox 3"/>
           <p:cNvSpPr txBox="1"/>
           <p:nvPr/>
         </p:nvSpPr>
         <p:spPr>
           <a:xfrm>
-            <a:off x="731520" y="457200"/>
-            <a:ext cx="10725912" cy="1097280"/>
+            <a:off x="731520" y="502920"/>
+            <a:ext cx="10728655" cy="960120"/>
           </a:xfrm>
           <a:prstGeom prst="rect">
             <a:avLst/>
@@ -4847,22 +6490,22 @@
           <a:lstStyle/>
           <a:p>
             <a:pPr>
-              <a:spcAft>
-                <a:spcPts val="400"/>
-              </a:spcAft>
-              <a:defRPr sz="2800" b="1">
-                <a:solidFill>
-                  <a:srgbClr val="16213E"/>
-                </a:solidFill>
-                <a:latin typeface="Calibri"/>
-              </a:defRPr>
-            </a:pPr>
-            <a:r>
-              <a:t>How Does the Application Flow End-to-End?</a:t>
-            </a:r>
-          </a:p>
-          <a:p>
-            <a:pPr>
+              <a:defRPr sz="3200" b="1">
+                <a:solidFill>
+                  <a:srgbClr val="0F1E36"/>
+                </a:solidFill>
+                <a:latin typeface="Calibri"/>
+              </a:defRPr>
+            </a:pPr>
+            <a:r>
+              <a:t>4. End-to-End Application Workflow</a:t>
+            </a:r>
+          </a:p>
+          <a:p>
+            <a:pPr>
+              <a:spcBef>
+                <a:spcPts val="300"/>
+              </a:spcBef>
               <a:defRPr sz="1400">
                 <a:solidFill>
                   <a:srgbClr val="64748B"/>
@@ -4871,27 +6514,1280 @@
               </a:defRPr>
             </a:pPr>
             <a:r>
-              <a:t>Operational stages from initial job request to final closeout and archival</a:t>
-            </a:r>
-          </a:p>
-        </p:txBody>
-      </p:sp>
-      <p:sp>
-        <p:nvSpPr>
-          <p:cNvPr id="3" name="Rounded Rectangle 2"/>
+              <a:t>Key Message: The complete path of a permit from draft creation to final verified closure.</a:t>
+            </a:r>
+          </a:p>
+        </p:txBody>
+      </p:sp>
+      <p:sp>
+        <p:nvSpPr>
+          <p:cNvPr id="5" name="Rectangle 4"/>
           <p:cNvSpPr/>
           <p:nvPr/>
         </p:nvSpPr>
         <p:spPr>
           <a:xfrm>
-            <a:off x="731520" y="1828800"/>
-            <a:ext cx="3456432" cy="2148840"/>
+            <a:off x="731520" y="1691640"/>
+            <a:ext cx="10728655" cy="438912"/>
+          </a:xfrm>
+          <a:prstGeom prst="rect">
+            <a:avLst/>
+          </a:prstGeom>
+          <a:solidFill>
+            <a:srgbClr val="0F1E36"/>
+          </a:solidFill>
+          <a:ln>
+            <a:noFill/>
+          </a:ln>
+        </p:spPr>
+        <p:style>
+          <a:lnRef idx="1">
+            <a:schemeClr val="accent1"/>
+          </a:lnRef>
+          <a:fillRef idx="3">
+            <a:schemeClr val="accent1"/>
+          </a:fillRef>
+          <a:effectRef idx="2">
+            <a:schemeClr val="accent1"/>
+          </a:effectRef>
+          <a:fontRef idx="minor">
+            <a:schemeClr val="lt1"/>
+          </a:fontRef>
+        </p:style>
+        <p:txBody>
+          <a:bodyPr rtlCol="0" anchor="ctr"/>
+          <a:lstStyle/>
+          <a:p>
+            <a:pPr algn="ctr">
+              <a:defRPr sz="1300" b="1">
+                <a:solidFill>
+                  <a:srgbClr val="FFFFFF"/>
+                </a:solidFill>
+                <a:latin typeface="Calibri"/>
+              </a:defRPr>
+            </a:pPr>
+            <a:r>
+              <a:t>OFFICIAL STATUS LIFECYCLE:   DRAFT   →   PENDING APPROVAL   →   APPROVED   →   EXECUTION   →   CLOSED</a:t>
+            </a:r>
+          </a:p>
+        </p:txBody>
+      </p:sp>
+      <p:sp>
+        <p:nvSpPr>
+          <p:cNvPr id="6" name="Rounded Rectangle 5"/>
+          <p:cNvSpPr/>
+          <p:nvPr/>
+        </p:nvSpPr>
+        <p:spPr>
+          <a:xfrm>
+            <a:off x="731520" y="2331720"/>
+            <a:ext cx="2542032" cy="1536192"/>
           </a:xfrm>
           <a:prstGeom prst="roundRect">
             <a:avLst/>
           </a:prstGeom>
           <a:solidFill>
-            <a:srgbClr val="F8FAFC"/>
+            <a:srgbClr val="FFFFFF"/>
+          </a:solidFill>
+          <a:ln w="19050">
+            <a:solidFill>
+              <a:srgbClr val="E2E8F0"/>
+            </a:solidFill>
+          </a:ln>
+        </p:spPr>
+        <p:style>
+          <a:lnRef idx="1">
+            <a:schemeClr val="accent1"/>
+          </a:lnRef>
+          <a:fillRef idx="3">
+            <a:schemeClr val="accent1"/>
+          </a:fillRef>
+          <a:effectRef idx="2">
+            <a:schemeClr val="accent1"/>
+          </a:effectRef>
+          <a:fontRef idx="minor">
+            <a:schemeClr val="lt1"/>
+          </a:fontRef>
+        </p:style>
+        <p:txBody>
+          <a:bodyPr rtlCol="0" anchor="ctr"/>
+          <a:lstStyle/>
+          <a:p>
+            <a:pPr algn="ctr"/>
+          </a:p>
+        </p:txBody>
+      </p:sp>
+      <p:sp>
+        <p:nvSpPr>
+          <p:cNvPr id="7" name="Rounded Rectangle 6"/>
+          <p:cNvSpPr/>
+          <p:nvPr/>
+        </p:nvSpPr>
+        <p:spPr>
+          <a:xfrm>
+            <a:off x="841248" y="2441448"/>
+            <a:ext cx="1005840" cy="292608"/>
+          </a:xfrm>
+          <a:prstGeom prst="roundRect">
+            <a:avLst/>
+          </a:prstGeom>
+          <a:solidFill>
+            <a:srgbClr val="0D9488"/>
+          </a:solidFill>
+          <a:ln>
+            <a:noFill/>
+          </a:ln>
+        </p:spPr>
+        <p:style>
+          <a:lnRef idx="1">
+            <a:schemeClr val="accent1"/>
+          </a:lnRef>
+          <a:fillRef idx="3">
+            <a:schemeClr val="accent1"/>
+          </a:fillRef>
+          <a:effectRef idx="2">
+            <a:schemeClr val="accent1"/>
+          </a:effectRef>
+          <a:fontRef idx="minor">
+            <a:schemeClr val="lt1"/>
+          </a:fontRef>
+        </p:style>
+        <p:txBody>
+          <a:bodyPr rtlCol="0" anchor="ctr"/>
+          <a:lstStyle/>
+          <a:p>
+            <a:pPr algn="ctr">
+              <a:defRPr sz="1100" b="1">
+                <a:solidFill>
+                  <a:srgbClr val="FFFFFF"/>
+                </a:solidFill>
+                <a:latin typeface="Calibri"/>
+              </a:defRPr>
+            </a:pPr>
+            <a:r>
+              <a:t>1. CREATE</a:t>
+            </a:r>
+          </a:p>
+        </p:txBody>
+      </p:sp>
+      <p:sp>
+        <p:nvSpPr>
+          <p:cNvPr id="8" name="TextBox 7"/>
+          <p:cNvSpPr txBox="1"/>
+          <p:nvPr/>
+        </p:nvSpPr>
+        <p:spPr>
+          <a:xfrm>
+            <a:off x="868680" y="2807208"/>
+            <a:ext cx="2267712" cy="987552"/>
+          </a:xfrm>
+          <a:prstGeom prst="rect">
+            <a:avLst/>
+          </a:prstGeom>
+          <a:noFill/>
+        </p:spPr>
+        <p:txBody>
+          <a:bodyPr wrap="square">
+            <a:spAutoFit/>
+          </a:bodyPr>
+          <a:lstStyle/>
+          <a:p>
+            <a:pPr>
+              <a:defRPr sz="1400" b="1">
+                <a:solidFill>
+                  <a:srgbClr val="0F1E36"/>
+                </a:solidFill>
+                <a:latin typeface="Calibri"/>
+              </a:defRPr>
+            </a:pPr>
+            <a:r>
+              <a:t>Permit Draft</a:t>
+            </a:r>
+          </a:p>
+          <a:p>
+            <a:pPr>
+              <a:spcBef>
+                <a:spcPts val="300"/>
+              </a:spcBef>
+              <a:defRPr sz="1100">
+                <a:solidFill>
+                  <a:srgbClr val="334155"/>
+                </a:solidFill>
+                <a:latin typeface="Calibri"/>
+              </a:defRPr>
+            </a:pPr>
+            <a:r>
+              <a:t>Issuer creates new permit</a:t>
+            </a:r>
+          </a:p>
+        </p:txBody>
+      </p:sp>
+      <p:sp>
+        <p:nvSpPr>
+          <p:cNvPr id="9" name="Rounded Rectangle 8"/>
+          <p:cNvSpPr/>
+          <p:nvPr/>
+        </p:nvSpPr>
+        <p:spPr>
+          <a:xfrm>
+            <a:off x="3456432" y="2331720"/>
+            <a:ext cx="2542032" cy="1536192"/>
+          </a:xfrm>
+          <a:prstGeom prst="roundRect">
+            <a:avLst/>
+          </a:prstGeom>
+          <a:solidFill>
+            <a:srgbClr val="FFFFFF"/>
+          </a:solidFill>
+          <a:ln w="19050">
+            <a:solidFill>
+              <a:srgbClr val="E2E8F0"/>
+            </a:solidFill>
+          </a:ln>
+        </p:spPr>
+        <p:style>
+          <a:lnRef idx="1">
+            <a:schemeClr val="accent1"/>
+          </a:lnRef>
+          <a:fillRef idx="3">
+            <a:schemeClr val="accent1"/>
+          </a:fillRef>
+          <a:effectRef idx="2">
+            <a:schemeClr val="accent1"/>
+          </a:effectRef>
+          <a:fontRef idx="minor">
+            <a:schemeClr val="lt1"/>
+          </a:fontRef>
+        </p:style>
+        <p:txBody>
+          <a:bodyPr rtlCol="0" anchor="ctr"/>
+          <a:lstStyle/>
+          <a:p>
+            <a:pPr algn="ctr"/>
+          </a:p>
+        </p:txBody>
+      </p:sp>
+      <p:sp>
+        <p:nvSpPr>
+          <p:cNvPr id="10" name="Rounded Rectangle 9"/>
+          <p:cNvSpPr/>
+          <p:nvPr/>
+        </p:nvSpPr>
+        <p:spPr>
+          <a:xfrm>
+            <a:off x="3566160" y="2441448"/>
+            <a:ext cx="1005840" cy="292608"/>
+          </a:xfrm>
+          <a:prstGeom prst="roundRect">
+            <a:avLst/>
+          </a:prstGeom>
+          <a:solidFill>
+            <a:srgbClr val="1E3A66"/>
+          </a:solidFill>
+          <a:ln>
+            <a:noFill/>
+          </a:ln>
+        </p:spPr>
+        <p:style>
+          <a:lnRef idx="1">
+            <a:schemeClr val="accent1"/>
+          </a:lnRef>
+          <a:fillRef idx="3">
+            <a:schemeClr val="accent1"/>
+          </a:fillRef>
+          <a:effectRef idx="2">
+            <a:schemeClr val="accent1"/>
+          </a:effectRef>
+          <a:fontRef idx="minor">
+            <a:schemeClr val="lt1"/>
+          </a:fontRef>
+        </p:style>
+        <p:txBody>
+          <a:bodyPr rtlCol="0" anchor="ctr"/>
+          <a:lstStyle/>
+          <a:p>
+            <a:pPr algn="ctr">
+              <a:defRPr sz="1100" b="1">
+                <a:solidFill>
+                  <a:srgbClr val="FFFFFF"/>
+                </a:solidFill>
+                <a:latin typeface="Calibri"/>
+              </a:defRPr>
+            </a:pPr>
+            <a:r>
+              <a:t>2. PLAN</a:t>
+            </a:r>
+          </a:p>
+        </p:txBody>
+      </p:sp>
+      <p:sp>
+        <p:nvSpPr>
+          <p:cNvPr id="11" name="TextBox 10"/>
+          <p:cNvSpPr txBox="1"/>
+          <p:nvPr/>
+        </p:nvSpPr>
+        <p:spPr>
+          <a:xfrm>
+            <a:off x="3593592" y="2807208"/>
+            <a:ext cx="2267712" cy="987552"/>
+          </a:xfrm>
+          <a:prstGeom prst="rect">
+            <a:avLst/>
+          </a:prstGeom>
+          <a:noFill/>
+        </p:spPr>
+        <p:txBody>
+          <a:bodyPr wrap="square">
+            <a:spAutoFit/>
+          </a:bodyPr>
+          <a:lstStyle/>
+          <a:p>
+            <a:pPr>
+              <a:defRPr sz="1400" b="1">
+                <a:solidFill>
+                  <a:srgbClr val="0F1E36"/>
+                </a:solidFill>
+                <a:latin typeface="Calibri"/>
+              </a:defRPr>
+            </a:pPr>
+            <a:r>
+              <a:t>Scope &amp; Crew</a:t>
+            </a:r>
+          </a:p>
+          <a:p>
+            <a:pPr>
+              <a:spcBef>
+                <a:spcPts val="300"/>
+              </a:spcBef>
+              <a:defRPr sz="1100">
+                <a:solidFill>
+                  <a:srgbClr val="334155"/>
+                </a:solidFill>
+                <a:latin typeface="Calibri"/>
+              </a:defRPr>
+            </a:pPr>
+            <a:r>
+              <a:t>Location, schedule &amp; team</a:t>
+            </a:r>
+          </a:p>
+        </p:txBody>
+      </p:sp>
+      <p:sp>
+        <p:nvSpPr>
+          <p:cNvPr id="12" name="Rounded Rectangle 11"/>
+          <p:cNvSpPr/>
+          <p:nvPr/>
+        </p:nvSpPr>
+        <p:spPr>
+          <a:xfrm>
+            <a:off x="6181344" y="2331720"/>
+            <a:ext cx="2542032" cy="1536192"/>
+          </a:xfrm>
+          <a:prstGeom prst="roundRect">
+            <a:avLst/>
+          </a:prstGeom>
+          <a:solidFill>
+            <a:srgbClr val="FFFFFF"/>
+          </a:solidFill>
+          <a:ln w="19050">
+            <a:solidFill>
+              <a:srgbClr val="E2E8F0"/>
+            </a:solidFill>
+          </a:ln>
+        </p:spPr>
+        <p:style>
+          <a:lnRef idx="1">
+            <a:schemeClr val="accent1"/>
+          </a:lnRef>
+          <a:fillRef idx="3">
+            <a:schemeClr val="accent1"/>
+          </a:fillRef>
+          <a:effectRef idx="2">
+            <a:schemeClr val="accent1"/>
+          </a:effectRef>
+          <a:fontRef idx="minor">
+            <a:schemeClr val="lt1"/>
+          </a:fontRef>
+        </p:style>
+        <p:txBody>
+          <a:bodyPr rtlCol="0" anchor="ctr"/>
+          <a:lstStyle/>
+          <a:p>
+            <a:pPr algn="ctr"/>
+          </a:p>
+        </p:txBody>
+      </p:sp>
+      <p:sp>
+        <p:nvSpPr>
+          <p:cNvPr id="13" name="Rounded Rectangle 12"/>
+          <p:cNvSpPr/>
+          <p:nvPr/>
+        </p:nvSpPr>
+        <p:spPr>
+          <a:xfrm>
+            <a:off x="6291072" y="2441448"/>
+            <a:ext cx="1005840" cy="292608"/>
+          </a:xfrm>
+          <a:prstGeom prst="roundRect">
+            <a:avLst/>
+          </a:prstGeom>
+          <a:solidFill>
+            <a:srgbClr val="0D9488"/>
+          </a:solidFill>
+          <a:ln>
+            <a:noFill/>
+          </a:ln>
+        </p:spPr>
+        <p:style>
+          <a:lnRef idx="1">
+            <a:schemeClr val="accent1"/>
+          </a:lnRef>
+          <a:fillRef idx="3">
+            <a:schemeClr val="accent1"/>
+          </a:fillRef>
+          <a:effectRef idx="2">
+            <a:schemeClr val="accent1"/>
+          </a:effectRef>
+          <a:fontRef idx="minor">
+            <a:schemeClr val="lt1"/>
+          </a:fontRef>
+        </p:style>
+        <p:txBody>
+          <a:bodyPr rtlCol="0" anchor="ctr"/>
+          <a:lstStyle/>
+          <a:p>
+            <a:pPr algn="ctr">
+              <a:defRPr sz="1100" b="1">
+                <a:solidFill>
+                  <a:srgbClr val="FFFFFF"/>
+                </a:solidFill>
+                <a:latin typeface="Calibri"/>
+              </a:defRPr>
+            </a:pPr>
+            <a:r>
+              <a:t>3. SUBMIT</a:t>
+            </a:r>
+          </a:p>
+        </p:txBody>
+      </p:sp>
+      <p:sp>
+        <p:nvSpPr>
+          <p:cNvPr id="14" name="TextBox 13"/>
+          <p:cNvSpPr txBox="1"/>
+          <p:nvPr/>
+        </p:nvSpPr>
+        <p:spPr>
+          <a:xfrm>
+            <a:off x="6318504" y="2807208"/>
+            <a:ext cx="2267712" cy="987552"/>
+          </a:xfrm>
+          <a:prstGeom prst="rect">
+            <a:avLst/>
+          </a:prstGeom>
+          <a:noFill/>
+        </p:spPr>
+        <p:txBody>
+          <a:bodyPr wrap="square">
+            <a:spAutoFit/>
+          </a:bodyPr>
+          <a:lstStyle/>
+          <a:p>
+            <a:pPr>
+              <a:defRPr sz="1400" b="1">
+                <a:solidFill>
+                  <a:srgbClr val="0F1E36"/>
+                </a:solidFill>
+                <a:latin typeface="Calibri"/>
+              </a:defRPr>
+            </a:pPr>
+            <a:r>
+              <a:t>Review &amp; Check</a:t>
+            </a:r>
+          </a:p>
+          <a:p>
+            <a:pPr>
+              <a:spcBef>
+                <a:spcPts val="300"/>
+              </a:spcBef>
+              <a:defRPr sz="1100">
+                <a:solidFill>
+                  <a:srgbClr val="334155"/>
+                </a:solidFill>
+                <a:latin typeface="Calibri"/>
+              </a:defRPr>
+            </a:pPr>
+            <a:r>
+              <a:t>Submit to Pending Approval</a:t>
+            </a:r>
+          </a:p>
+        </p:txBody>
+      </p:sp>
+      <p:sp>
+        <p:nvSpPr>
+          <p:cNvPr id="15" name="Rounded Rectangle 14"/>
+          <p:cNvSpPr/>
+          <p:nvPr/>
+        </p:nvSpPr>
+        <p:spPr>
+          <a:xfrm>
+            <a:off x="8906256" y="2331720"/>
+            <a:ext cx="2542032" cy="1536192"/>
+          </a:xfrm>
+          <a:prstGeom prst="roundRect">
+            <a:avLst/>
+          </a:prstGeom>
+          <a:solidFill>
+            <a:srgbClr val="FFFFFF"/>
+          </a:solidFill>
+          <a:ln w="19050">
+            <a:solidFill>
+              <a:srgbClr val="E2E8F0"/>
+            </a:solidFill>
+          </a:ln>
+        </p:spPr>
+        <p:style>
+          <a:lnRef idx="1">
+            <a:schemeClr val="accent1"/>
+          </a:lnRef>
+          <a:fillRef idx="3">
+            <a:schemeClr val="accent1"/>
+          </a:fillRef>
+          <a:effectRef idx="2">
+            <a:schemeClr val="accent1"/>
+          </a:effectRef>
+          <a:fontRef idx="minor">
+            <a:schemeClr val="lt1"/>
+          </a:fontRef>
+        </p:style>
+        <p:txBody>
+          <a:bodyPr rtlCol="0" anchor="ctr"/>
+          <a:lstStyle/>
+          <a:p>
+            <a:pPr algn="ctr"/>
+          </a:p>
+        </p:txBody>
+      </p:sp>
+      <p:sp>
+        <p:nvSpPr>
+          <p:cNvPr id="16" name="Rounded Rectangle 15"/>
+          <p:cNvSpPr/>
+          <p:nvPr/>
+        </p:nvSpPr>
+        <p:spPr>
+          <a:xfrm>
+            <a:off x="9015984" y="2441448"/>
+            <a:ext cx="1005840" cy="292608"/>
+          </a:xfrm>
+          <a:prstGeom prst="roundRect">
+            <a:avLst/>
+          </a:prstGeom>
+          <a:solidFill>
+            <a:srgbClr val="1E3A66"/>
+          </a:solidFill>
+          <a:ln>
+            <a:noFill/>
+          </a:ln>
+        </p:spPr>
+        <p:style>
+          <a:lnRef idx="1">
+            <a:schemeClr val="accent1"/>
+          </a:lnRef>
+          <a:fillRef idx="3">
+            <a:schemeClr val="accent1"/>
+          </a:fillRef>
+          <a:effectRef idx="2">
+            <a:schemeClr val="accent1"/>
+          </a:effectRef>
+          <a:fontRef idx="minor">
+            <a:schemeClr val="lt1"/>
+          </a:fontRef>
+        </p:style>
+        <p:txBody>
+          <a:bodyPr rtlCol="0" anchor="ctr"/>
+          <a:lstStyle/>
+          <a:p>
+            <a:pPr algn="ctr">
+              <a:defRPr sz="1100" b="1">
+                <a:solidFill>
+                  <a:srgbClr val="FFFFFF"/>
+                </a:solidFill>
+                <a:latin typeface="Calibri"/>
+              </a:defRPr>
+            </a:pPr>
+            <a:r>
+              <a:t>4. APPROVE</a:t>
+            </a:r>
+          </a:p>
+        </p:txBody>
+      </p:sp>
+      <p:sp>
+        <p:nvSpPr>
+          <p:cNvPr id="17" name="TextBox 16"/>
+          <p:cNvSpPr txBox="1"/>
+          <p:nvPr/>
+        </p:nvSpPr>
+        <p:spPr>
+          <a:xfrm>
+            <a:off x="9043416" y="2807208"/>
+            <a:ext cx="2267712" cy="987552"/>
+          </a:xfrm>
+          <a:prstGeom prst="rect">
+            <a:avLst/>
+          </a:prstGeom>
+          <a:noFill/>
+        </p:spPr>
+        <p:txBody>
+          <a:bodyPr wrap="square">
+            <a:spAutoFit/>
+          </a:bodyPr>
+          <a:lstStyle/>
+          <a:p>
+            <a:pPr>
+              <a:defRPr sz="1400" b="1">
+                <a:solidFill>
+                  <a:srgbClr val="0F1E36"/>
+                </a:solidFill>
+                <a:latin typeface="Calibri"/>
+              </a:defRPr>
+            </a:pPr>
+            <a:r>
+              <a:t>Approval Queue</a:t>
+            </a:r>
+          </a:p>
+          <a:p>
+            <a:pPr>
+              <a:spcBef>
+                <a:spcPts val="300"/>
+              </a:spcBef>
+              <a:defRPr sz="1100">
+                <a:solidFill>
+                  <a:srgbClr val="334155"/>
+                </a:solidFill>
+                <a:latin typeface="Calibri"/>
+              </a:defRPr>
+            </a:pPr>
+            <a:r>
+              <a:t>Reviewer Approves or Defers</a:t>
+            </a:r>
+          </a:p>
+        </p:txBody>
+      </p:sp>
+      <p:sp>
+        <p:nvSpPr>
+          <p:cNvPr id="18" name="Rounded Rectangle 17"/>
+          <p:cNvSpPr/>
+          <p:nvPr/>
+        </p:nvSpPr>
+        <p:spPr>
+          <a:xfrm>
+            <a:off x="731520" y="4297680"/>
+            <a:ext cx="2542032" cy="1536192"/>
+          </a:xfrm>
+          <a:prstGeom prst="roundRect">
+            <a:avLst/>
+          </a:prstGeom>
+          <a:solidFill>
+            <a:srgbClr val="FFFFFF"/>
+          </a:solidFill>
+          <a:ln w="19050">
+            <a:solidFill>
+              <a:srgbClr val="E2E8F0"/>
+            </a:solidFill>
+          </a:ln>
+        </p:spPr>
+        <p:style>
+          <a:lnRef idx="1">
+            <a:schemeClr val="accent1"/>
+          </a:lnRef>
+          <a:fillRef idx="3">
+            <a:schemeClr val="accent1"/>
+          </a:fillRef>
+          <a:effectRef idx="2">
+            <a:schemeClr val="accent1"/>
+          </a:effectRef>
+          <a:fontRef idx="minor">
+            <a:schemeClr val="lt1"/>
+          </a:fontRef>
+        </p:style>
+        <p:txBody>
+          <a:bodyPr rtlCol="0" anchor="ctr"/>
+          <a:lstStyle/>
+          <a:p>
+            <a:pPr algn="ctr"/>
+          </a:p>
+        </p:txBody>
+      </p:sp>
+      <p:sp>
+        <p:nvSpPr>
+          <p:cNvPr id="19" name="Rounded Rectangle 18"/>
+          <p:cNvSpPr/>
+          <p:nvPr/>
+        </p:nvSpPr>
+        <p:spPr>
+          <a:xfrm>
+            <a:off x="841248" y="4407408"/>
+            <a:ext cx="1005840" cy="292608"/>
+          </a:xfrm>
+          <a:prstGeom prst="roundRect">
+            <a:avLst/>
+          </a:prstGeom>
+          <a:solidFill>
+            <a:srgbClr val="0D9488"/>
+          </a:solidFill>
+          <a:ln>
+            <a:noFill/>
+          </a:ln>
+        </p:spPr>
+        <p:style>
+          <a:lnRef idx="1">
+            <a:schemeClr val="accent1"/>
+          </a:lnRef>
+          <a:fillRef idx="3">
+            <a:schemeClr val="accent1"/>
+          </a:fillRef>
+          <a:effectRef idx="2">
+            <a:schemeClr val="accent1"/>
+          </a:effectRef>
+          <a:fontRef idx="minor">
+            <a:schemeClr val="lt1"/>
+          </a:fontRef>
+        </p:style>
+        <p:txBody>
+          <a:bodyPr rtlCol="0" anchor="ctr"/>
+          <a:lstStyle/>
+          <a:p>
+            <a:pPr algn="ctr">
+              <a:defRPr sz="1100" b="1">
+                <a:solidFill>
+                  <a:srgbClr val="FFFFFF"/>
+                </a:solidFill>
+                <a:latin typeface="Calibri"/>
+              </a:defRPr>
+            </a:pPr>
+            <a:r>
+              <a:t>5. CONTROL</a:t>
+            </a:r>
+          </a:p>
+        </p:txBody>
+      </p:sp>
+      <p:sp>
+        <p:nvSpPr>
+          <p:cNvPr id="20" name="TextBox 19"/>
+          <p:cNvSpPr txBox="1"/>
+          <p:nvPr/>
+        </p:nvSpPr>
+        <p:spPr>
+          <a:xfrm>
+            <a:off x="868680" y="4773168"/>
+            <a:ext cx="2267712" cy="987552"/>
+          </a:xfrm>
+          <a:prstGeom prst="rect">
+            <a:avLst/>
+          </a:prstGeom>
+          <a:noFill/>
+        </p:spPr>
+        <p:txBody>
+          <a:bodyPr wrap="square">
+            <a:spAutoFit/>
+          </a:bodyPr>
+          <a:lstStyle/>
+          <a:p>
+            <a:pPr>
+              <a:defRPr sz="1400" b="1">
+                <a:solidFill>
+                  <a:srgbClr val="0F1E36"/>
+                </a:solidFill>
+                <a:latin typeface="Calibri"/>
+              </a:defRPr>
+            </a:pPr>
+            <a:r>
+              <a:t>LOTOTO &amp; SIMOPS</a:t>
+            </a:r>
+          </a:p>
+          <a:p>
+            <a:pPr>
+              <a:spcBef>
+                <a:spcPts val="300"/>
+              </a:spcBef>
+              <a:defRPr sz="1100">
+                <a:solidFill>
+                  <a:srgbClr val="334155"/>
+                </a:solidFill>
+                <a:latin typeface="Calibri"/>
+              </a:defRPr>
+            </a:pPr>
+            <a:r>
+              <a:t>Energy isolation &amp; conflicts</a:t>
+            </a:r>
+          </a:p>
+        </p:txBody>
+      </p:sp>
+      <p:sp>
+        <p:nvSpPr>
+          <p:cNvPr id="21" name="Rounded Rectangle 20"/>
+          <p:cNvSpPr/>
+          <p:nvPr/>
+        </p:nvSpPr>
+        <p:spPr>
+          <a:xfrm>
+            <a:off x="3456432" y="4297680"/>
+            <a:ext cx="2542032" cy="1536192"/>
+          </a:xfrm>
+          <a:prstGeom prst="roundRect">
+            <a:avLst/>
+          </a:prstGeom>
+          <a:solidFill>
+            <a:srgbClr val="FFFFFF"/>
+          </a:solidFill>
+          <a:ln w="19050">
+            <a:solidFill>
+              <a:srgbClr val="E2E8F0"/>
+            </a:solidFill>
+          </a:ln>
+        </p:spPr>
+        <p:style>
+          <a:lnRef idx="1">
+            <a:schemeClr val="accent1"/>
+          </a:lnRef>
+          <a:fillRef idx="3">
+            <a:schemeClr val="accent1"/>
+          </a:fillRef>
+          <a:effectRef idx="2">
+            <a:schemeClr val="accent1"/>
+          </a:effectRef>
+          <a:fontRef idx="minor">
+            <a:schemeClr val="lt1"/>
+          </a:fontRef>
+        </p:style>
+        <p:txBody>
+          <a:bodyPr rtlCol="0" anchor="ctr"/>
+          <a:lstStyle/>
+          <a:p>
+            <a:pPr algn="ctr"/>
+          </a:p>
+        </p:txBody>
+      </p:sp>
+      <p:sp>
+        <p:nvSpPr>
+          <p:cNvPr id="22" name="Rounded Rectangle 21"/>
+          <p:cNvSpPr/>
+          <p:nvPr/>
+        </p:nvSpPr>
+        <p:spPr>
+          <a:xfrm>
+            <a:off x="3566160" y="4407408"/>
+            <a:ext cx="1005840" cy="292608"/>
+          </a:xfrm>
+          <a:prstGeom prst="roundRect">
+            <a:avLst/>
+          </a:prstGeom>
+          <a:solidFill>
+            <a:srgbClr val="1E3A66"/>
+          </a:solidFill>
+          <a:ln>
+            <a:noFill/>
+          </a:ln>
+        </p:spPr>
+        <p:style>
+          <a:lnRef idx="1">
+            <a:schemeClr val="accent1"/>
+          </a:lnRef>
+          <a:fillRef idx="3">
+            <a:schemeClr val="accent1"/>
+          </a:fillRef>
+          <a:effectRef idx="2">
+            <a:schemeClr val="accent1"/>
+          </a:effectRef>
+          <a:fontRef idx="minor">
+            <a:schemeClr val="lt1"/>
+          </a:fontRef>
+        </p:style>
+        <p:txBody>
+          <a:bodyPr rtlCol="0" anchor="ctr"/>
+          <a:lstStyle/>
+          <a:p>
+            <a:pPr algn="ctr">
+              <a:defRPr sz="1100" b="1">
+                <a:solidFill>
+                  <a:srgbClr val="FFFFFF"/>
+                </a:solidFill>
+                <a:latin typeface="Calibri"/>
+              </a:defRPr>
+            </a:pPr>
+            <a:r>
+              <a:t>6. EXECUTE</a:t>
+            </a:r>
+          </a:p>
+        </p:txBody>
+      </p:sp>
+      <p:sp>
+        <p:nvSpPr>
+          <p:cNvPr id="23" name="TextBox 22"/>
+          <p:cNvSpPr txBox="1"/>
+          <p:nvPr/>
+        </p:nvSpPr>
+        <p:spPr>
+          <a:xfrm>
+            <a:off x="3593592" y="4773168"/>
+            <a:ext cx="2267712" cy="987552"/>
+          </a:xfrm>
+          <a:prstGeom prst="rect">
+            <a:avLst/>
+          </a:prstGeom>
+          <a:noFill/>
+        </p:spPr>
+        <p:txBody>
+          <a:bodyPr wrap="square">
+            <a:spAutoFit/>
+          </a:bodyPr>
+          <a:lstStyle/>
+          <a:p>
+            <a:pPr>
+              <a:defRPr sz="1400" b="1">
+                <a:solidFill>
+                  <a:srgbClr val="0F1E36"/>
+                </a:solidFill>
+                <a:latin typeface="Calibri"/>
+              </a:defRPr>
+            </a:pPr>
+            <a:r>
+              <a:t>Work Execution</a:t>
+            </a:r>
+          </a:p>
+          <a:p>
+            <a:pPr>
+              <a:spcBef>
+                <a:spcPts val="300"/>
+              </a:spcBef>
+              <a:defRPr sz="1100">
+                <a:solidFill>
+                  <a:srgbClr val="334155"/>
+                </a:solidFill>
+                <a:latin typeface="Calibri"/>
+              </a:defRPr>
+            </a:pPr>
+            <a:r>
+              <a:t>Progress notes &amp; evidence</a:t>
+            </a:r>
+          </a:p>
+        </p:txBody>
+      </p:sp>
+      <p:sp>
+        <p:nvSpPr>
+          <p:cNvPr id="24" name="Rounded Rectangle 23"/>
+          <p:cNvSpPr/>
+          <p:nvPr/>
+        </p:nvSpPr>
+        <p:spPr>
+          <a:xfrm>
+            <a:off x="6181344" y="4297680"/>
+            <a:ext cx="2542032" cy="1536192"/>
+          </a:xfrm>
+          <a:prstGeom prst="roundRect">
+            <a:avLst/>
+          </a:prstGeom>
+          <a:solidFill>
+            <a:srgbClr val="FFFFFF"/>
+          </a:solidFill>
+          <a:ln w="19050">
+            <a:solidFill>
+              <a:srgbClr val="E2E8F0"/>
+            </a:solidFill>
+          </a:ln>
+        </p:spPr>
+        <p:style>
+          <a:lnRef idx="1">
+            <a:schemeClr val="accent1"/>
+          </a:lnRef>
+          <a:fillRef idx="3">
+            <a:schemeClr val="accent1"/>
+          </a:fillRef>
+          <a:effectRef idx="2">
+            <a:schemeClr val="accent1"/>
+          </a:effectRef>
+          <a:fontRef idx="minor">
+            <a:schemeClr val="lt1"/>
+          </a:fontRef>
+        </p:style>
+        <p:txBody>
+          <a:bodyPr rtlCol="0" anchor="ctr"/>
+          <a:lstStyle/>
+          <a:p>
+            <a:pPr algn="ctr"/>
+          </a:p>
+        </p:txBody>
+      </p:sp>
+      <p:sp>
+        <p:nvSpPr>
+          <p:cNvPr id="25" name="Rounded Rectangle 24"/>
+          <p:cNvSpPr/>
+          <p:nvPr/>
+        </p:nvSpPr>
+        <p:spPr>
+          <a:xfrm>
+            <a:off x="6291072" y="4407408"/>
+            <a:ext cx="1005840" cy="292608"/>
+          </a:xfrm>
+          <a:prstGeom prst="roundRect">
+            <a:avLst/>
+          </a:prstGeom>
+          <a:solidFill>
+            <a:srgbClr val="0D9488"/>
+          </a:solidFill>
+          <a:ln>
+            <a:noFill/>
+          </a:ln>
+        </p:spPr>
+        <p:style>
+          <a:lnRef idx="1">
+            <a:schemeClr val="accent1"/>
+          </a:lnRef>
+          <a:fillRef idx="3">
+            <a:schemeClr val="accent1"/>
+          </a:fillRef>
+          <a:effectRef idx="2">
+            <a:schemeClr val="accent1"/>
+          </a:effectRef>
+          <a:fontRef idx="minor">
+            <a:schemeClr val="lt1"/>
+          </a:fontRef>
+        </p:style>
+        <p:txBody>
+          <a:bodyPr rtlCol="0" anchor="ctr"/>
+          <a:lstStyle/>
+          <a:p>
+            <a:pPr algn="ctr">
+              <a:defRPr sz="1100" b="1">
+                <a:solidFill>
+                  <a:srgbClr val="FFFFFF"/>
+                </a:solidFill>
+                <a:latin typeface="Calibri"/>
+              </a:defRPr>
+            </a:pPr>
+            <a:r>
+              <a:t>7. VERIFY</a:t>
+            </a:r>
+          </a:p>
+        </p:txBody>
+      </p:sp>
+      <p:sp>
+        <p:nvSpPr>
+          <p:cNvPr id="26" name="TextBox 25"/>
+          <p:cNvSpPr txBox="1"/>
+          <p:nvPr/>
+        </p:nvSpPr>
+        <p:spPr>
+          <a:xfrm>
+            <a:off x="6318504" y="4773168"/>
+            <a:ext cx="2267712" cy="987552"/>
+          </a:xfrm>
+          <a:prstGeom prst="rect">
+            <a:avLst/>
+          </a:prstGeom>
+          <a:noFill/>
+        </p:spPr>
+        <p:txBody>
+          <a:bodyPr wrap="square">
+            <a:spAutoFit/>
+          </a:bodyPr>
+          <a:lstStyle/>
+          <a:p>
+            <a:pPr>
+              <a:defRPr sz="1400" b="1">
+                <a:solidFill>
+                  <a:srgbClr val="0F1E36"/>
+                </a:solidFill>
+                <a:latin typeface="Calibri"/>
+              </a:defRPr>
+            </a:pPr>
+            <a:r>
+              <a:t>Verify &amp; Close</a:t>
+            </a:r>
+          </a:p>
+          <a:p>
+            <a:pPr>
+              <a:spcBef>
+                <a:spcPts val="300"/>
+              </a:spcBef>
+              <a:defRPr sz="1100">
+                <a:solidFill>
+                  <a:srgbClr val="334155"/>
+                </a:solidFill>
+                <a:latin typeface="Calibri"/>
+              </a:defRPr>
+            </a:pPr>
+            <a:r>
+              <a:t>Site check &amp; completion</a:t>
+            </a:r>
+          </a:p>
+        </p:txBody>
+      </p:sp>
+      <p:sp>
+        <p:nvSpPr>
+          <p:cNvPr id="27" name="Rounded Rectangle 26"/>
+          <p:cNvSpPr/>
+          <p:nvPr/>
+        </p:nvSpPr>
+        <p:spPr>
+          <a:xfrm>
+            <a:off x="8906256" y="4297680"/>
+            <a:ext cx="2542032" cy="1536192"/>
+          </a:xfrm>
+          <a:prstGeom prst="roundRect">
+            <a:avLst/>
+          </a:prstGeom>
+          <a:solidFill>
+            <a:srgbClr val="FFFFFF"/>
+          </a:solidFill>
+          <a:ln w="19050">
+            <a:solidFill>
+              <a:srgbClr val="E2E8F0"/>
+            </a:solidFill>
+          </a:ln>
+        </p:spPr>
+        <p:style>
+          <a:lnRef idx="1">
+            <a:schemeClr val="accent1"/>
+          </a:lnRef>
+          <a:fillRef idx="3">
+            <a:schemeClr val="accent1"/>
+          </a:fillRef>
+          <a:effectRef idx="2">
+            <a:schemeClr val="accent1"/>
+          </a:effectRef>
+          <a:fontRef idx="minor">
+            <a:schemeClr val="lt1"/>
+          </a:fontRef>
+        </p:style>
+        <p:txBody>
+          <a:bodyPr rtlCol="0" anchor="ctr"/>
+          <a:lstStyle/>
+          <a:p>
+            <a:pPr algn="ctr"/>
+          </a:p>
+        </p:txBody>
+      </p:sp>
+      <p:sp>
+        <p:nvSpPr>
+          <p:cNvPr id="28" name="Rounded Rectangle 27"/>
+          <p:cNvSpPr/>
+          <p:nvPr/>
+        </p:nvSpPr>
+        <p:spPr>
+          <a:xfrm>
+            <a:off x="9015984" y="4407408"/>
+            <a:ext cx="1005840" cy="292608"/>
+          </a:xfrm>
+          <a:prstGeom prst="roundRect">
+            <a:avLst/>
+          </a:prstGeom>
+          <a:solidFill>
+            <a:srgbClr val="1E3A66"/>
+          </a:solidFill>
+          <a:ln>
+            <a:noFill/>
+          </a:ln>
+        </p:spPr>
+        <p:style>
+          <a:lnRef idx="1">
+            <a:schemeClr val="accent1"/>
+          </a:lnRef>
+          <a:fillRef idx="3">
+            <a:schemeClr val="accent1"/>
+          </a:fillRef>
+          <a:effectRef idx="2">
+            <a:schemeClr val="accent1"/>
+          </a:effectRef>
+          <a:fontRef idx="minor">
+            <a:schemeClr val="lt1"/>
+          </a:fontRef>
+        </p:style>
+        <p:txBody>
+          <a:bodyPr rtlCol="0" anchor="ctr"/>
+          <a:lstStyle/>
+          <a:p>
+            <a:pPr algn="ctr">
+              <a:defRPr sz="1100" b="1">
+                <a:solidFill>
+                  <a:srgbClr val="FFFFFF"/>
+                </a:solidFill>
+                <a:latin typeface="Calibri"/>
+              </a:defRPr>
+            </a:pPr>
+            <a:r>
+              <a:t>8. ARCHIVE</a:t>
+            </a:r>
+          </a:p>
+        </p:txBody>
+      </p:sp>
+      <p:sp>
+        <p:nvSpPr>
+          <p:cNvPr id="29" name="TextBox 28"/>
+          <p:cNvSpPr txBox="1"/>
+          <p:nvPr/>
+        </p:nvSpPr>
+        <p:spPr>
+          <a:xfrm>
+            <a:off x="9043416" y="4773168"/>
+            <a:ext cx="2267712" cy="987552"/>
+          </a:xfrm>
+          <a:prstGeom prst="rect">
+            <a:avLst/>
+          </a:prstGeom>
+          <a:noFill/>
+        </p:spPr>
+        <p:txBody>
+          <a:bodyPr wrap="square">
+            <a:spAutoFit/>
+          </a:bodyPr>
+          <a:lstStyle/>
+          <a:p>
+            <a:pPr>
+              <a:defRPr sz="1400" b="1">
+                <a:solidFill>
+                  <a:srgbClr val="0F1E36"/>
+                </a:solidFill>
+                <a:latin typeface="Calibri"/>
+              </a:defRPr>
+            </a:pPr>
+            <a:r>
+              <a:t>Audit Record</a:t>
+            </a:r>
+          </a:p>
+          <a:p>
+            <a:pPr>
+              <a:spcBef>
+                <a:spcPts val="300"/>
+              </a:spcBef>
+              <a:defRPr sz="1100">
+                <a:solidFill>
+                  <a:srgbClr val="334155"/>
+                </a:solidFill>
+                <a:latin typeface="Calibri"/>
+              </a:defRPr>
+            </a:pPr>
+            <a:r>
+              <a:t>Searchable history &amp; KPIs</a:t>
+            </a:r>
+          </a:p>
+        </p:txBody>
+      </p:sp>
+      <p:sp>
+        <p:nvSpPr>
+          <p:cNvPr id="30" name="Rounded Rectangle 29"/>
+          <p:cNvSpPr/>
+          <p:nvPr/>
+        </p:nvSpPr>
+        <p:spPr>
+          <a:xfrm>
+            <a:off x="731520" y="3931920"/>
+            <a:ext cx="10728655" cy="310896"/>
+          </a:xfrm>
+          <a:prstGeom prst="roundRect">
+            <a:avLst/>
+          </a:prstGeom>
+          <a:solidFill>
+            <a:srgbClr val="FFFFFF"/>
           </a:solidFill>
           <a:ln w="12700">
             <a:solidFill>
@@ -4914,73 +7810,41 @@
           </a:fontRef>
         </p:style>
         <p:txBody>
-          <a:bodyPr rtlCol="0" anchor="ctr" wrap="square" lIns="228600" tIns="228600" rIns="228600"/>
+          <a:bodyPr rtlCol="0" anchor="ctr"/>
           <a:lstStyle/>
           <a:p>
             <a:pPr algn="ctr">
-              <a:spcAft>
-                <a:spcPts val="300"/>
-              </a:spcAft>
-              <a:defRPr sz="1300" b="1">
-                <a:solidFill>
-                  <a:srgbClr val="1E56A0"/>
-                </a:solidFill>
-                <a:latin typeface="Calibri"/>
-              </a:defRPr>
-            </a:pPr>
-            <a:r>
-              <a:t>Stage 1</a:t>
-            </a:r>
-          </a:p>
-          <a:p>
-            <a:pPr>
-              <a:spcAft>
-                <a:spcPts val="800"/>
-              </a:spcAft>
-              <a:defRPr sz="1800" b="1">
-                <a:solidFill>
-                  <a:srgbClr val="16213E"/>
-                </a:solidFill>
-                <a:latin typeface="Calibri"/>
-              </a:defRPr>
-            </a:pPr>
-            <a:r>
-              <a:t>Submit Request</a:t>
-            </a:r>
-          </a:p>
-          <a:p>
-            <a:pPr>
-              <a:defRPr sz="1500">
-                <a:solidFill>
-                  <a:srgbClr val="1E293B"/>
-                </a:solidFill>
-                <a:latin typeface="Calibri"/>
-              </a:defRPr>
-            </a:pPr>
-            <a:r>
-              <a:t>Receiver fills permit form and attaches Job Safety Analysis (JSA).</a:t>
-            </a:r>
-          </a:p>
-        </p:txBody>
-      </p:sp>
-      <p:sp>
-        <p:nvSpPr>
-          <p:cNvPr id="4" name="Rounded Rectangle 3"/>
+              <a:defRPr sz="1100" b="1">
+                <a:solidFill>
+                  <a:srgbClr val="D97706"/>
+                </a:solidFill>
+                <a:latin typeface="Calibri"/>
+              </a:defRPr>
+            </a:pPr>
+            <a:r>
+              <a:t>APPROVAL BRANCHING:   [APPROVED → Proceed to Controls &amp; Execution]   ⇄   [DEFERRED → Add Info → Resubmit]</a:t>
+            </a:r>
+          </a:p>
+        </p:txBody>
+      </p:sp>
+      <p:sp>
+        <p:nvSpPr>
+          <p:cNvPr id="31" name="Rounded Rectangle 30"/>
           <p:cNvSpPr/>
           <p:nvPr/>
         </p:nvSpPr>
         <p:spPr>
           <a:xfrm>
-            <a:off x="4370832" y="1828800"/>
-            <a:ext cx="3456432" cy="2148840"/>
+            <a:off x="731520" y="6035040"/>
+            <a:ext cx="10728655" cy="502920"/>
           </a:xfrm>
           <a:prstGeom prst="roundRect">
             <a:avLst/>
           </a:prstGeom>
           <a:solidFill>
-            <a:srgbClr val="F8FAFC"/>
+            <a:srgbClr val="FFFFFF"/>
           </a:solidFill>
-          <a:ln w="12700">
+          <a:ln w="19050">
             <a:solidFill>
               <a:srgbClr val="E2E8F0"/>
             </a:solidFill>
@@ -5001,399 +7865,19 @@
           </a:fontRef>
         </p:style>
         <p:txBody>
-          <a:bodyPr rtlCol="0" anchor="ctr" wrap="square" lIns="228600" tIns="228600" rIns="228600"/>
+          <a:bodyPr rtlCol="0" anchor="ctr" wrap="square"/>
           <a:lstStyle/>
           <a:p>
             <a:pPr algn="ctr">
-              <a:spcAft>
-                <a:spcPts val="300"/>
-              </a:spcAft>
-              <a:defRPr sz="1300" b="1">
-                <a:solidFill>
-                  <a:srgbClr val="1E56A0"/>
-                </a:solidFill>
-                <a:latin typeface="Calibri"/>
-              </a:defRPr>
-            </a:pPr>
-            <a:r>
-              <a:t>Stage 2</a:t>
-            </a:r>
-          </a:p>
-          <a:p>
-            <a:pPr>
-              <a:spcAft>
-                <a:spcPts val="800"/>
-              </a:spcAft>
-              <a:defRPr sz="1800" b="1">
-                <a:solidFill>
-                  <a:srgbClr val="16213E"/>
-                </a:solidFill>
-                <a:latin typeface="Calibri"/>
-              </a:defRPr>
-            </a:pPr>
-            <a:r>
-              <a:t>Technical Review</a:t>
-            </a:r>
-          </a:p>
-          <a:p>
-            <a:pPr>
-              <a:defRPr sz="1500">
-                <a:solidFill>
-                  <a:srgbClr val="1E293B"/>
-                </a:solidFill>
-                <a:latin typeface="Calibri"/>
-              </a:defRPr>
-            </a:pPr>
-            <a:r>
-              <a:t>Issuer inspects site, applies LOTO locks, and logs blind tags.</a:t>
-            </a:r>
-          </a:p>
-        </p:txBody>
-      </p:sp>
-      <p:sp>
-        <p:nvSpPr>
-          <p:cNvPr id="5" name="Rounded Rectangle 4"/>
-          <p:cNvSpPr/>
-          <p:nvPr/>
-        </p:nvSpPr>
-        <p:spPr>
-          <a:xfrm>
-            <a:off x="8010144" y="1828800"/>
-            <a:ext cx="3456432" cy="2148840"/>
-          </a:xfrm>
-          <a:prstGeom prst="roundRect">
-            <a:avLst/>
-          </a:prstGeom>
-          <a:solidFill>
-            <a:srgbClr val="F8FAFC"/>
-          </a:solidFill>
-          <a:ln w="12700">
-            <a:solidFill>
-              <a:srgbClr val="E2E8F0"/>
-            </a:solidFill>
-          </a:ln>
-        </p:spPr>
-        <p:style>
-          <a:lnRef idx="1">
-            <a:schemeClr val="accent1"/>
-          </a:lnRef>
-          <a:fillRef idx="3">
-            <a:schemeClr val="accent1"/>
-          </a:fillRef>
-          <a:effectRef idx="2">
-            <a:schemeClr val="accent1"/>
-          </a:effectRef>
-          <a:fontRef idx="minor">
-            <a:schemeClr val="lt1"/>
-          </a:fontRef>
-        </p:style>
-        <p:txBody>
-          <a:bodyPr rtlCol="0" anchor="ctr" wrap="square" lIns="228600" tIns="228600" rIns="228600"/>
-          <a:lstStyle/>
-          <a:p>
-            <a:pPr algn="ctr">
-              <a:spcAft>
-                <a:spcPts val="300"/>
-              </a:spcAft>
-              <a:defRPr sz="1300" b="1">
-                <a:solidFill>
-                  <a:srgbClr val="1E56A0"/>
-                </a:solidFill>
-                <a:latin typeface="Calibri"/>
-              </a:defRPr>
-            </a:pPr>
-            <a:r>
-              <a:t>Stage 3</a:t>
-            </a:r>
-          </a:p>
-          <a:p>
-            <a:pPr>
-              <a:spcAft>
-                <a:spcPts val="800"/>
-              </a:spcAft>
-              <a:defRPr sz="1800" b="1">
-                <a:solidFill>
-                  <a:srgbClr val="16213E"/>
-                </a:solidFill>
-                <a:latin typeface="Calibri"/>
-              </a:defRPr>
-            </a:pPr>
-            <a:r>
-              <a:t>Clash &amp; Gas Check</a:t>
-            </a:r>
-          </a:p>
-          <a:p>
-            <a:pPr>
-              <a:defRPr sz="1500">
-                <a:solidFill>
-                  <a:srgbClr val="1E293B"/>
-                </a:solidFill>
-                <a:latin typeface="Calibri"/>
-              </a:defRPr>
-            </a:pPr>
-            <a:r>
-              <a:t>PTW Coordinator resolves SIMOPS; gas tester certifies atmosphere.</a:t>
-            </a:r>
-          </a:p>
-        </p:txBody>
-      </p:sp>
-      <p:sp>
-        <p:nvSpPr>
-          <p:cNvPr id="6" name="Rounded Rectangle 5"/>
-          <p:cNvSpPr/>
-          <p:nvPr/>
-        </p:nvSpPr>
-        <p:spPr>
-          <a:xfrm>
-            <a:off x="731520" y="4160520"/>
-            <a:ext cx="3456432" cy="2148840"/>
-          </a:xfrm>
-          <a:prstGeom prst="roundRect">
-            <a:avLst/>
-          </a:prstGeom>
-          <a:solidFill>
-            <a:srgbClr val="F8FAFC"/>
-          </a:solidFill>
-          <a:ln w="12700">
-            <a:solidFill>
-              <a:srgbClr val="E2E8F0"/>
-            </a:solidFill>
-          </a:ln>
-        </p:spPr>
-        <p:style>
-          <a:lnRef idx="1">
-            <a:schemeClr val="accent1"/>
-          </a:lnRef>
-          <a:fillRef idx="3">
-            <a:schemeClr val="accent1"/>
-          </a:fillRef>
-          <a:effectRef idx="2">
-            <a:schemeClr val="accent1"/>
-          </a:effectRef>
-          <a:fontRef idx="minor">
-            <a:schemeClr val="lt1"/>
-          </a:fontRef>
-        </p:style>
-        <p:txBody>
-          <a:bodyPr rtlCol="0" anchor="ctr" wrap="square" lIns="228600" tIns="228600" rIns="228600"/>
-          <a:lstStyle/>
-          <a:p>
-            <a:pPr algn="ctr">
-              <a:spcAft>
-                <a:spcPts val="300"/>
-              </a:spcAft>
-              <a:defRPr sz="1300" b="1">
-                <a:solidFill>
-                  <a:srgbClr val="D97706"/>
-                </a:solidFill>
-                <a:latin typeface="Calibri"/>
-              </a:defRPr>
-            </a:pPr>
-            <a:r>
-              <a:t>Stage 4</a:t>
-            </a:r>
-          </a:p>
-          <a:p>
-            <a:pPr>
-              <a:spcAft>
-                <a:spcPts val="800"/>
-              </a:spcAft>
-              <a:defRPr sz="1800" b="1">
-                <a:solidFill>
-                  <a:srgbClr val="16213E"/>
-                </a:solidFill>
-                <a:latin typeface="Calibri"/>
-              </a:defRPr>
-            </a:pPr>
-            <a:r>
-              <a:t>Briefing &amp; Display</a:t>
-            </a:r>
-          </a:p>
-          <a:p>
-            <a:pPr>
-              <a:defRPr sz="1500">
-                <a:solidFill>
-                  <a:srgbClr val="1E293B"/>
-                </a:solidFill>
-                <a:latin typeface="Calibri"/>
-              </a:defRPr>
-            </a:pPr>
-            <a:r>
-              <a:t>Hold Toolbox Talk (TBT), sign attendance, display in field box.</a:t>
-            </a:r>
-          </a:p>
-        </p:txBody>
-      </p:sp>
-      <p:sp>
-        <p:nvSpPr>
-          <p:cNvPr id="7" name="Rounded Rectangle 6"/>
-          <p:cNvSpPr/>
-          <p:nvPr/>
-        </p:nvSpPr>
-        <p:spPr>
-          <a:xfrm>
-            <a:off x="4370832" y="4160520"/>
-            <a:ext cx="3456432" cy="2148840"/>
-          </a:xfrm>
-          <a:prstGeom prst="roundRect">
-            <a:avLst/>
-          </a:prstGeom>
-          <a:solidFill>
-            <a:srgbClr val="F8FAFC"/>
-          </a:solidFill>
-          <a:ln w="12700">
-            <a:solidFill>
-              <a:srgbClr val="E2E8F0"/>
-            </a:solidFill>
-          </a:ln>
-        </p:spPr>
-        <p:style>
-          <a:lnRef idx="1">
-            <a:schemeClr val="accent1"/>
-          </a:lnRef>
-          <a:fillRef idx="3">
-            <a:schemeClr val="accent1"/>
-          </a:fillRef>
-          <a:effectRef idx="2">
-            <a:schemeClr val="accent1"/>
-          </a:effectRef>
-          <a:fontRef idx="minor">
-            <a:schemeClr val="lt1"/>
-          </a:fontRef>
-        </p:style>
-        <p:txBody>
-          <a:bodyPr rtlCol="0" anchor="ctr" wrap="square" lIns="228600" tIns="228600" rIns="228600"/>
-          <a:lstStyle/>
-          <a:p>
-            <a:pPr algn="ctr">
-              <a:spcAft>
-                <a:spcPts val="300"/>
-              </a:spcAft>
-              <a:defRPr sz="1300" b="1">
-                <a:solidFill>
-                  <a:srgbClr val="D97706"/>
-                </a:solidFill>
-                <a:latin typeface="Calibri"/>
-              </a:defRPr>
-            </a:pPr>
-            <a:r>
-              <a:t>Stage 5</a:t>
-            </a:r>
-          </a:p>
-          <a:p>
-            <a:pPr>
-              <a:spcAft>
-                <a:spcPts val="800"/>
-              </a:spcAft>
-              <a:defRPr sz="1800" b="1">
-                <a:solidFill>
-                  <a:srgbClr val="16213E"/>
-                </a:solidFill>
-                <a:latin typeface="Calibri"/>
-              </a:defRPr>
-            </a:pPr>
-            <a:r>
-              <a:t>Execution &amp; Monitor</a:t>
-            </a:r>
-          </a:p>
-          <a:p>
-            <a:pPr>
-              <a:defRPr sz="1500">
-                <a:solidFill>
-                  <a:srgbClr val="1E293B"/>
-                </a:solidFill>
-                <a:latin typeface="Calibri"/>
-              </a:defRPr>
-            </a:pPr>
-            <a:r>
-              <a:t>Active work commences under designated supervisor &amp; standby watch.</a:t>
-            </a:r>
-          </a:p>
-        </p:txBody>
-      </p:sp>
-      <p:sp>
-        <p:nvSpPr>
-          <p:cNvPr id="8" name="Rounded Rectangle 7"/>
-          <p:cNvSpPr/>
-          <p:nvPr/>
-        </p:nvSpPr>
-        <p:spPr>
-          <a:xfrm>
-            <a:off x="8010144" y="4160520"/>
-            <a:ext cx="3456432" cy="2148840"/>
-          </a:xfrm>
-          <a:prstGeom prst="roundRect">
-            <a:avLst/>
-          </a:prstGeom>
-          <a:solidFill>
-            <a:srgbClr val="F8FAFC"/>
-          </a:solidFill>
-          <a:ln w="12700">
-            <a:solidFill>
-              <a:srgbClr val="E2E8F0"/>
-            </a:solidFill>
-          </a:ln>
-        </p:spPr>
-        <p:style>
-          <a:lnRef idx="1">
-            <a:schemeClr val="accent1"/>
-          </a:lnRef>
-          <a:fillRef idx="3">
-            <a:schemeClr val="accent1"/>
-          </a:fillRef>
-          <a:effectRef idx="2">
-            <a:schemeClr val="accent1"/>
-          </a:effectRef>
-          <a:fontRef idx="minor">
-            <a:schemeClr val="lt1"/>
-          </a:fontRef>
-        </p:style>
-        <p:txBody>
-          <a:bodyPr rtlCol="0" anchor="ctr" wrap="square" lIns="228600" tIns="228600" rIns="228600"/>
-          <a:lstStyle/>
-          <a:p>
-            <a:pPr algn="ctr">
-              <a:spcAft>
-                <a:spcPts val="300"/>
-              </a:spcAft>
-              <a:defRPr sz="1300" b="1">
-                <a:solidFill>
-                  <a:srgbClr val="16213E"/>
-                </a:solidFill>
-                <a:latin typeface="Calibri"/>
-              </a:defRPr>
-            </a:pPr>
-            <a:r>
-              <a:t>Stage 6</a:t>
-            </a:r>
-          </a:p>
-          <a:p>
-            <a:pPr>
-              <a:spcAft>
-                <a:spcPts val="800"/>
-              </a:spcAft>
-              <a:defRPr sz="1800" b="1">
-                <a:solidFill>
-                  <a:srgbClr val="16213E"/>
-                </a:solidFill>
-                <a:latin typeface="Calibri"/>
-              </a:defRPr>
-            </a:pPr>
-            <a:r>
-              <a:t>Housekeeping &amp; Close</a:t>
-            </a:r>
-          </a:p>
-          <a:p>
-            <a:pPr>
-              <a:defRPr sz="1500">
-                <a:solidFill>
-                  <a:srgbClr val="1E293B"/>
-                </a:solidFill>
-                <a:latin typeface="Calibri"/>
-              </a:defRPr>
-            </a:pPr>
-            <a:r>
-              <a:t>Site cleaned, de-isolation verified, signatures logged, archived.</a:t>
+              <a:defRPr sz="1350" b="1">
+                <a:solidFill>
+                  <a:srgbClr val="0F1E36"/>
+                </a:solidFill>
+                <a:latin typeface="Calibri"/>
+              </a:defRPr>
+            </a:pPr>
+            <a:r>
+              <a:t>Core Principle: The Permit is the central record connecting authorization, safety controls, execution, evidence, and closure.</a:t>
             </a:r>
           </a:p>
         </p:txBody>
@@ -5418,14 +7902,100 @@
       <p:grpSpPr/>
       <p:sp>
         <p:nvSpPr>
-          <p:cNvPr id="2" name="TextBox 1"/>
+          <p:cNvPr id="2" name="Rectangle 1"/>
+          <p:cNvSpPr/>
+          <p:nvPr/>
+        </p:nvSpPr>
+        <p:spPr>
+          <a:xfrm>
+            <a:off x="0" y="0"/>
+            <a:ext cx="12191695" cy="6858000"/>
+          </a:xfrm>
+          <a:prstGeom prst="rect">
+            <a:avLst/>
+          </a:prstGeom>
+          <a:solidFill>
+            <a:srgbClr val="F8FAFC"/>
+          </a:solidFill>
+          <a:ln>
+            <a:noFill/>
+          </a:ln>
+        </p:spPr>
+        <p:style>
+          <a:lnRef idx="1">
+            <a:schemeClr val="accent1"/>
+          </a:lnRef>
+          <a:fillRef idx="3">
+            <a:schemeClr val="accent1"/>
+          </a:fillRef>
+          <a:effectRef idx="2">
+            <a:schemeClr val="accent1"/>
+          </a:effectRef>
+          <a:fontRef idx="minor">
+            <a:schemeClr val="lt1"/>
+          </a:fontRef>
+        </p:style>
+        <p:txBody>
+          <a:bodyPr rtlCol="0" anchor="ctr"/>
+          <a:lstStyle/>
+          <a:p>
+            <a:pPr algn="ctr"/>
+          </a:p>
+        </p:txBody>
+      </p:sp>
+      <p:sp>
+        <p:nvSpPr>
+          <p:cNvPr id="3" name="Rectangle 2"/>
+          <p:cNvSpPr/>
+          <p:nvPr/>
+        </p:nvSpPr>
+        <p:spPr>
+          <a:xfrm>
+            <a:off x="731520" y="365760"/>
+            <a:ext cx="10728655" cy="36576"/>
+          </a:xfrm>
+          <a:prstGeom prst="rect">
+            <a:avLst/>
+          </a:prstGeom>
+          <a:solidFill>
+            <a:srgbClr val="0D9488"/>
+          </a:solidFill>
+          <a:ln>
+            <a:noFill/>
+          </a:ln>
+        </p:spPr>
+        <p:style>
+          <a:lnRef idx="1">
+            <a:schemeClr val="accent1"/>
+          </a:lnRef>
+          <a:fillRef idx="3">
+            <a:schemeClr val="accent1"/>
+          </a:fillRef>
+          <a:effectRef idx="2">
+            <a:schemeClr val="accent1"/>
+          </a:effectRef>
+          <a:fontRef idx="minor">
+            <a:schemeClr val="lt1"/>
+          </a:fontRef>
+        </p:style>
+        <p:txBody>
+          <a:bodyPr rtlCol="0" anchor="ctr"/>
+          <a:lstStyle/>
+          <a:p>
+            <a:pPr algn="ctr"/>
+          </a:p>
+        </p:txBody>
+      </p:sp>
+      <p:sp>
+        <p:nvSpPr>
+          <p:cNvPr id="4" name="TextBox 3"/>
           <p:cNvSpPr txBox="1"/>
           <p:nvPr/>
         </p:nvSpPr>
         <p:spPr>
           <a:xfrm>
-            <a:off x="731520" y="457200"/>
-            <a:ext cx="10725912" cy="1097280"/>
+            <a:off x="731520" y="502920"/>
+            <a:ext cx="10728655" cy="960120"/>
           </a:xfrm>
           <a:prstGeom prst="rect">
             <a:avLst/>
@@ -5439,51 +8009,485 @@
           <a:lstStyle/>
           <a:p>
             <a:pPr>
+              <a:defRPr sz="3200" b="1">
+                <a:solidFill>
+                  <a:srgbClr val="0F1E36"/>
+                </a:solidFill>
+                <a:latin typeface="Calibri"/>
+              </a:defRPr>
+            </a:pPr>
+            <a:r>
+              <a:t>5. SIMOPS &amp; Safety Incident Protocol</a:t>
+            </a:r>
+          </a:p>
+          <a:p>
+            <a:pPr>
+              <a:spcBef>
+                <a:spcPts val="300"/>
+              </a:spcBef>
+              <a:defRPr sz="1400">
+                <a:solidFill>
+                  <a:srgbClr val="64748B"/>
+                </a:solidFill>
+                <a:latin typeface="Calibri"/>
+              </a:defRPr>
+            </a:pPr>
+            <a:r>
+              <a:t>Key Message: Dual operational tools to monitor active work conflicts and capture safety events.</a:t>
+            </a:r>
+          </a:p>
+        </p:txBody>
+      </p:sp>
+      <p:sp>
+        <p:nvSpPr>
+          <p:cNvPr id="5" name="Rounded Rectangle 4"/>
+          <p:cNvSpPr/>
+          <p:nvPr/>
+        </p:nvSpPr>
+        <p:spPr>
+          <a:xfrm>
+            <a:off x="731520" y="1691640"/>
+            <a:ext cx="5257800" cy="3749039"/>
+          </a:xfrm>
+          <a:prstGeom prst="roundRect">
+            <a:avLst/>
+          </a:prstGeom>
+          <a:solidFill>
+            <a:srgbClr val="FFFFFF"/>
+          </a:solidFill>
+          <a:ln w="19050">
+            <a:solidFill>
+              <a:srgbClr val="E2E8F0"/>
+            </a:solidFill>
+          </a:ln>
+        </p:spPr>
+        <p:style>
+          <a:lnRef idx="1">
+            <a:schemeClr val="accent1"/>
+          </a:lnRef>
+          <a:fillRef idx="3">
+            <a:schemeClr val="accent1"/>
+          </a:fillRef>
+          <a:effectRef idx="2">
+            <a:schemeClr val="accent1"/>
+          </a:effectRef>
+          <a:fontRef idx="minor">
+            <a:schemeClr val="lt1"/>
+          </a:fontRef>
+        </p:style>
+        <p:txBody>
+          <a:bodyPr rtlCol="0" anchor="ctr"/>
+          <a:lstStyle/>
+          <a:p>
+            <a:pPr algn="ctr"/>
+          </a:p>
+        </p:txBody>
+      </p:sp>
+      <p:sp>
+        <p:nvSpPr>
+          <p:cNvPr id="6" name="Rectangle 5"/>
+          <p:cNvSpPr/>
+          <p:nvPr/>
+        </p:nvSpPr>
+        <p:spPr>
+          <a:xfrm>
+            <a:off x="731520" y="1691640"/>
+            <a:ext cx="5257800" cy="502920"/>
+          </a:xfrm>
+          <a:prstGeom prst="rect">
+            <a:avLst/>
+          </a:prstGeom>
+          <a:solidFill>
+            <a:srgbClr val="1E3A66"/>
+          </a:solidFill>
+          <a:ln>
+            <a:noFill/>
+          </a:ln>
+        </p:spPr>
+        <p:style>
+          <a:lnRef idx="1">
+            <a:schemeClr val="accent1"/>
+          </a:lnRef>
+          <a:fillRef idx="3">
+            <a:schemeClr val="accent1"/>
+          </a:fillRef>
+          <a:effectRef idx="2">
+            <a:schemeClr val="accent1"/>
+          </a:effectRef>
+          <a:fontRef idx="minor">
+            <a:schemeClr val="lt1"/>
+          </a:fontRef>
+        </p:style>
+        <p:txBody>
+          <a:bodyPr rtlCol="0" anchor="ctr"/>
+          <a:lstStyle/>
+          <a:p>
+            <a:pPr algn="ctr">
+              <a:defRPr sz="1300" b="1">
+                <a:solidFill>
+                  <a:srgbClr val="FFFFFF"/>
+                </a:solidFill>
+                <a:latin typeface="Calibri"/>
+              </a:defRPr>
+            </a:pPr>
+            <a:r>
+              <a:t>SIMOPS — SIMULTANEOUS OPERATIONS</a:t>
+            </a:r>
+          </a:p>
+        </p:txBody>
+      </p:sp>
+      <p:sp>
+        <p:nvSpPr>
+          <p:cNvPr id="7" name="TextBox 6"/>
+          <p:cNvSpPr txBox="1"/>
+          <p:nvPr/>
+        </p:nvSpPr>
+        <p:spPr>
+          <a:xfrm>
+            <a:off x="960120" y="2313432"/>
+            <a:ext cx="4800600" cy="3017519"/>
+          </a:xfrm>
+          <a:prstGeom prst="rect">
+            <a:avLst/>
+          </a:prstGeom>
+          <a:noFill/>
+        </p:spPr>
+        <p:txBody>
+          <a:bodyPr wrap="square">
+            <a:spAutoFit/>
+          </a:bodyPr>
+          <a:lstStyle/>
+          <a:p>
+            <a:pPr>
               <a:spcAft>
-                <a:spcPts val="400"/>
+                <a:spcPts val="800"/>
               </a:spcAft>
-              <a:defRPr sz="2800" b="1">
-                <a:solidFill>
-                  <a:srgbClr val="16213E"/>
-                </a:solidFill>
-                <a:latin typeface="Calibri"/>
-              </a:defRPr>
-            </a:pPr>
-            <a:r>
-              <a:t>What Happens When Safety Incidents Occur?</a:t>
-            </a:r>
-          </a:p>
-          <a:p>
-            <a:pPr>
-              <a:defRPr sz="1400">
-                <a:solidFill>
-                  <a:srgbClr val="64748B"/>
-                </a:solidFill>
-                <a:latin typeface="Calibri"/>
-              </a:defRPr>
-            </a:pPr>
-            <a:r>
-              <a:t>Protocol for Simultaneous Operations (SIMOPS) and emergency incident response</a:t>
-            </a:r>
-          </a:p>
-        </p:txBody>
-      </p:sp>
-      <p:sp>
-        <p:nvSpPr>
-          <p:cNvPr id="3" name="Rounded Rectangle 2"/>
+              <a:defRPr sz="1200" b="1">
+                <a:solidFill>
+                  <a:srgbClr val="0D9488"/>
+                </a:solidFill>
+                <a:latin typeface="Calibri"/>
+              </a:defRPr>
+            </a:pPr>
+            <a:r>
+              <a:t>Identifies potential conflicts between simultaneous work activities.</a:t>
+            </a:r>
+          </a:p>
+          <a:p>
+            <a:pPr>
+              <a:spcAft>
+                <a:spcPts val="600"/>
+              </a:spcAft>
+              <a:defRPr sz="1100">
+                <a:solidFill>
+                  <a:srgbClr val="334155"/>
+                </a:solidFill>
+                <a:latin typeface="Calibri"/>
+              </a:defRPr>
+            </a:pPr>
+            <a:r>
+              <a:t>• Active Permits Scan: Continuously checks all approved and active work.</a:t>
+            </a:r>
+          </a:p>
+          <a:p>
+            <a:pPr>
+              <a:spcAft>
+                <a:spcPts val="600"/>
+              </a:spcAft>
+              <a:defRPr sz="1100">
+                <a:solidFill>
+                  <a:srgbClr val="334155"/>
+                </a:solidFill>
+                <a:latin typeface="Calibri"/>
+              </a:defRPr>
+            </a:pPr>
+            <a:r>
+              <a:t>• 4 Comparison Factors: Location, Equipment, Schedule Window, and Permit Type.</a:t>
+            </a:r>
+          </a:p>
+          <a:p>
+            <a:pPr>
+              <a:spcAft>
+                <a:spcPts val="600"/>
+              </a:spcAft>
+              <a:defRPr sz="1100">
+                <a:solidFill>
+                  <a:srgbClr val="334155"/>
+                </a:solidFill>
+                <a:latin typeface="Calibri"/>
+              </a:defRPr>
+            </a:pPr>
+            <a:r>
+              <a:t>• Conflict Detection: Flags overlapping jobs sharing the same area or gear.</a:t>
+            </a:r>
+          </a:p>
+          <a:p>
+            <a:pPr>
+              <a:spcAft>
+                <a:spcPts val="600"/>
+              </a:spcAft>
+              <a:defRPr sz="1100">
+                <a:solidFill>
+                  <a:srgbClr val="334155"/>
+                </a:solidFill>
+                <a:latin typeface="Calibri"/>
+              </a:defRPr>
+            </a:pPr>
+            <a:r>
+              <a:t>• Severity Assessment: Ranks conflict risk: High, Medium, or Low severity.</a:t>
+            </a:r>
+          </a:p>
+          <a:p>
+            <a:pPr>
+              <a:spcAft>
+                <a:spcPts val="600"/>
+              </a:spcAft>
+              <a:defRPr sz="1100">
+                <a:solidFill>
+                  <a:srgbClr val="334155"/>
+                </a:solidFill>
+                <a:latin typeface="Calibri"/>
+              </a:defRPr>
+            </a:pPr>
+            <a:r>
+              <a:t>• Dashboard Alerts: Displays open conflicts, risk levels, and alerts for review.</a:t>
+            </a:r>
+          </a:p>
+        </p:txBody>
+      </p:sp>
+      <p:sp>
+        <p:nvSpPr>
+          <p:cNvPr id="8" name="Rounded Rectangle 7"/>
           <p:cNvSpPr/>
           <p:nvPr/>
         </p:nvSpPr>
         <p:spPr>
           <a:xfrm>
-            <a:off x="731520" y="1828800"/>
-            <a:ext cx="5266944" cy="4572000"/>
+            <a:off x="6202375" y="1691640"/>
+            <a:ext cx="5257800" cy="3749039"/>
           </a:xfrm>
           <a:prstGeom prst="roundRect">
             <a:avLst/>
           </a:prstGeom>
           <a:solidFill>
-            <a:srgbClr val="F8FAFC"/>
+            <a:srgbClr val="FFFFFF"/>
+          </a:solidFill>
+          <a:ln w="19050">
+            <a:solidFill>
+              <a:srgbClr val="E2E8F0"/>
+            </a:solidFill>
+          </a:ln>
+        </p:spPr>
+        <p:style>
+          <a:lnRef idx="1">
+            <a:schemeClr val="accent1"/>
+          </a:lnRef>
+          <a:fillRef idx="3">
+            <a:schemeClr val="accent1"/>
+          </a:fillRef>
+          <a:effectRef idx="2">
+            <a:schemeClr val="accent1"/>
+          </a:effectRef>
+          <a:fontRef idx="minor">
+            <a:schemeClr val="lt1"/>
+          </a:fontRef>
+        </p:style>
+        <p:txBody>
+          <a:bodyPr rtlCol="0" anchor="ctr"/>
+          <a:lstStyle/>
+          <a:p>
+            <a:pPr algn="ctr"/>
+          </a:p>
+        </p:txBody>
+      </p:sp>
+      <p:sp>
+        <p:nvSpPr>
+          <p:cNvPr id="9" name="Rectangle 8"/>
+          <p:cNvSpPr/>
+          <p:nvPr/>
+        </p:nvSpPr>
+        <p:spPr>
+          <a:xfrm>
+            <a:off x="6202375" y="1691640"/>
+            <a:ext cx="5257800" cy="502920"/>
+          </a:xfrm>
+          <a:prstGeom prst="rect">
+            <a:avLst/>
+          </a:prstGeom>
+          <a:solidFill>
+            <a:srgbClr val="0D9488"/>
+          </a:solidFill>
+          <a:ln>
+            <a:noFill/>
+          </a:ln>
+        </p:spPr>
+        <p:style>
+          <a:lnRef idx="1">
+            <a:schemeClr val="accent1"/>
+          </a:lnRef>
+          <a:fillRef idx="3">
+            <a:schemeClr val="accent1"/>
+          </a:fillRef>
+          <a:effectRef idx="2">
+            <a:schemeClr val="accent1"/>
+          </a:effectRef>
+          <a:fontRef idx="minor">
+            <a:schemeClr val="lt1"/>
+          </a:fontRef>
+        </p:style>
+        <p:txBody>
+          <a:bodyPr rtlCol="0" anchor="ctr"/>
+          <a:lstStyle/>
+          <a:p>
+            <a:pPr algn="ctr">
+              <a:defRPr sz="1300" b="1">
+                <a:solidFill>
+                  <a:srgbClr val="FFFFFF"/>
+                </a:solidFill>
+                <a:latin typeface="Calibri"/>
+              </a:defRPr>
+            </a:pPr>
+            <a:r>
+              <a:t>SAFETY INCIDENT PROTOCOL</a:t>
+            </a:r>
+          </a:p>
+        </p:txBody>
+      </p:sp>
+      <p:sp>
+        <p:nvSpPr>
+          <p:cNvPr id="10" name="TextBox 9"/>
+          <p:cNvSpPr txBox="1"/>
+          <p:nvPr/>
+        </p:nvSpPr>
+        <p:spPr>
+          <a:xfrm>
+            <a:off x="6430975" y="2313432"/>
+            <a:ext cx="4800600" cy="3017519"/>
+          </a:xfrm>
+          <a:prstGeom prst="rect">
+            <a:avLst/>
+          </a:prstGeom>
+          <a:noFill/>
+        </p:spPr>
+        <p:txBody>
+          <a:bodyPr wrap="square">
+            <a:spAutoFit/>
+          </a:bodyPr>
+          <a:lstStyle/>
+          <a:p>
+            <a:pPr>
+              <a:spcAft>
+                <a:spcPts val="800"/>
+              </a:spcAft>
+              <a:defRPr sz="1200" b="1">
+                <a:solidFill>
+                  <a:srgbClr val="0D9488"/>
+                </a:solidFill>
+                <a:latin typeface="Calibri"/>
+              </a:defRPr>
+            </a:pPr>
+            <a:r>
+              <a:t>Structured recording of incidents, near misses, and unsafe conditions.</a:t>
+            </a:r>
+          </a:p>
+          <a:p>
+            <a:pPr>
+              <a:spcAft>
+                <a:spcPts val="600"/>
+              </a:spcAft>
+              <a:defRPr sz="1100">
+                <a:solidFill>
+                  <a:srgbClr val="334155"/>
+                </a:solidFill>
+                <a:latin typeface="Calibri"/>
+              </a:defRPr>
+            </a:pPr>
+            <a:r>
+              <a:t>• 3 Event Types: Captures Incidents, Near Misses, and Unsafe Conditions.</a:t>
+            </a:r>
+          </a:p>
+          <a:p>
+            <a:pPr>
+              <a:spcAft>
+                <a:spcPts val="600"/>
+              </a:spcAft>
+              <a:defRPr sz="1100">
+                <a:solidFill>
+                  <a:srgbClr val="334155"/>
+                </a:solidFill>
+                <a:latin typeface="Calibri"/>
+              </a:defRPr>
+            </a:pPr>
+            <a:r>
+              <a:t>• Detailed Report: Type, Title, Description, Location, Timestamp &amp; Linked Permit.</a:t>
+            </a:r>
+          </a:p>
+          <a:p>
+            <a:pPr>
+              <a:spcAft>
+                <a:spcPts val="600"/>
+              </a:spcAft>
+              <a:defRPr sz="1100">
+                <a:solidFill>
+                  <a:srgbClr val="334155"/>
+                </a:solidFill>
+                <a:latin typeface="Calibri"/>
+              </a:defRPr>
+            </a:pPr>
+            <a:r>
+              <a:t>• Instant Submission: Enters central register immediately upon completion.</a:t>
+            </a:r>
+          </a:p>
+          <a:p>
+            <a:pPr>
+              <a:spcAft>
+                <a:spcPts val="600"/>
+              </a:spcAft>
+              <a:defRPr sz="1100">
+                <a:solidFill>
+                  <a:srgbClr val="334155"/>
+                </a:solidFill>
+                <a:latin typeface="Calibri"/>
+              </a:defRPr>
+            </a:pPr>
+            <a:r>
+              <a:t>• Status Lifecycle: Tracks status clearly: Open → Pending HOD Decision → Closed.</a:t>
+            </a:r>
+          </a:p>
+          <a:p>
+            <a:pPr>
+              <a:spcAft>
+                <a:spcPts val="600"/>
+              </a:spcAft>
+              <a:defRPr sz="1100">
+                <a:solidFill>
+                  <a:srgbClr val="334155"/>
+                </a:solidFill>
+                <a:latin typeface="Calibri"/>
+              </a:defRPr>
+            </a:pPr>
+            <a:r>
+              <a:t>• Full Traceability: Correlates safety events to plant locations and work permits.</a:t>
+            </a:r>
+          </a:p>
+        </p:txBody>
+      </p:sp>
+      <p:sp>
+        <p:nvSpPr>
+          <p:cNvPr id="11" name="Rounded Rectangle 10"/>
+          <p:cNvSpPr/>
+          <p:nvPr/>
+        </p:nvSpPr>
+        <p:spPr>
+          <a:xfrm>
+            <a:off x="731520" y="5532120"/>
+            <a:ext cx="10728655" cy="411480"/>
+          </a:xfrm>
+          <a:prstGeom prst="roundRect">
+            <a:avLst/>
+          </a:prstGeom>
+          <a:solidFill>
+            <a:srgbClr val="FFFFFF"/>
           </a:solidFill>
           <a:ln w="12700">
             <a:solidFill>
@@ -5506,124 +8510,41 @@
           </a:fontRef>
         </p:style>
         <p:txBody>
-          <a:bodyPr rtlCol="0" anchor="ctr" wrap="square" lIns="274320" tIns="228600" rIns="274320"/>
+          <a:bodyPr rtlCol="0" anchor="ctr"/>
           <a:lstStyle/>
           <a:p>
             <a:pPr algn="ctr">
-              <a:spcAft>
-                <a:spcPts val="200"/>
-              </a:spcAft>
-              <a:defRPr sz="1800" b="1">
-                <a:solidFill>
-                  <a:srgbClr val="1E56A0"/>
-                </a:solidFill>
-                <a:latin typeface="Calibri"/>
-              </a:defRPr>
-            </a:pPr>
-            <a:r>
-              <a:t>SIMOPS (Simultaneous Operations)</a:t>
-            </a:r>
-          </a:p>
-          <a:p>
-            <a:pPr>
-              <a:spcAft>
-                <a:spcPts val="1400"/>
-              </a:spcAft>
-              <a:defRPr sz="1300" b="1">
-                <a:solidFill>
-                  <a:srgbClr val="D97706"/>
-                </a:solidFill>
-                <a:latin typeface="Calibri"/>
-              </a:defRPr>
-            </a:pPr>
-            <a:r>
-              <a:t>Cross-Job Physical Clashes</a:t>
-            </a:r>
-          </a:p>
-          <a:p>
-            <a:pPr>
-              <a:spcAft>
-                <a:spcPts val="900"/>
-              </a:spcAft>
-              <a:defRPr sz="1500">
-                <a:solidFill>
-                  <a:srgbClr val="1E293B"/>
-                </a:solidFill>
-                <a:latin typeface="Calibri"/>
-              </a:defRPr>
-            </a:pPr>
-            <a:r>
-              <a:t>• Vertical Conflicts: Hot sparks falling above fuel lines or lower crew</a:t>
-            </a:r>
-          </a:p>
-          <a:p>
-            <a:pPr>
-              <a:spcAft>
-                <a:spcPts val="900"/>
-              </a:spcAft>
-              <a:defRPr sz="1500">
-                <a:solidFill>
-                  <a:srgbClr val="1E293B"/>
-                </a:solidFill>
-                <a:latin typeface="Calibri"/>
-              </a:defRPr>
-            </a:pPr>
-            <a:r>
-              <a:t>• Shared Utilities: Dual operations connecting to the same purge line</a:t>
-            </a:r>
-          </a:p>
-          <a:p>
-            <a:pPr>
-              <a:spcAft>
-                <a:spcPts val="900"/>
-              </a:spcAft>
-              <a:defRPr sz="1500">
-                <a:solidFill>
-                  <a:srgbClr val="1E293B"/>
-                </a:solidFill>
-                <a:latin typeface="Calibri"/>
-              </a:defRPr>
-            </a:pPr>
-            <a:r>
-              <a:t>• Crane Overflights: Lifting heavy loads over active hydrocarbon piping</a:t>
-            </a:r>
-          </a:p>
-          <a:p>
-            <a:pPr>
-              <a:spcAft>
-                <a:spcPts val="900"/>
-              </a:spcAft>
-              <a:defRPr sz="1500">
-                <a:solidFill>
-                  <a:srgbClr val="1E293B"/>
-                </a:solidFill>
-                <a:latin typeface="Calibri"/>
-              </a:defRPr>
-            </a:pPr>
-            <a:r>
-              <a:t>• Resolution Rule: Mandatory SIMOPS checklist &amp; scheduled shift separation</a:t>
-            </a:r>
-          </a:p>
-        </p:txBody>
-      </p:sp>
-      <p:sp>
-        <p:nvSpPr>
-          <p:cNvPr id="4" name="Rounded Rectangle 3"/>
+              <a:defRPr sz="1200" b="1">
+                <a:solidFill>
+                  <a:srgbClr val="0F1E36"/>
+                </a:solidFill>
+                <a:latin typeface="Calibri"/>
+              </a:defRPr>
+            </a:pPr>
+            <a:r>
+              <a:t>PTW APPLICATION INTEGRATION:   SIMOPS → Conflict Monitoring   |   INCIDENTS → Safety Event Tracking</a:t>
+            </a:r>
+          </a:p>
+        </p:txBody>
+      </p:sp>
+      <p:sp>
+        <p:nvSpPr>
+          <p:cNvPr id="12" name="Rounded Rectangle 11"/>
           <p:cNvSpPr/>
           <p:nvPr/>
         </p:nvSpPr>
         <p:spPr>
           <a:xfrm>
-            <a:off x="6181344" y="1828800"/>
-            <a:ext cx="5266944" cy="4572000"/>
+            <a:off x="731520" y="6035040"/>
+            <a:ext cx="10728655" cy="502920"/>
           </a:xfrm>
           <a:prstGeom prst="roundRect">
             <a:avLst/>
           </a:prstGeom>
           <a:solidFill>
-            <a:srgbClr val="F8FAFC"/>
+            <a:srgbClr val="FFFFFF"/>
           </a:solidFill>
-          <a:ln w="12700">
+          <a:ln w="19050">
             <a:solidFill>
               <a:srgbClr val="E2E8F0"/>
             </a:solidFill>
@@ -5644,102 +8565,19 @@
           </a:fontRef>
         </p:style>
         <p:txBody>
-          <a:bodyPr rtlCol="0" anchor="ctr" wrap="square" lIns="274320" tIns="228600" rIns="274320"/>
+          <a:bodyPr rtlCol="0" anchor="ctr" wrap="square"/>
           <a:lstStyle/>
           <a:p>
             <a:pPr algn="ctr">
-              <a:spcAft>
-                <a:spcPts val="200"/>
-              </a:spcAft>
-              <a:defRPr sz="1800" b="1">
-                <a:solidFill>
-                  <a:srgbClr val="BE185D"/>
-                </a:solidFill>
-                <a:latin typeface="Calibri"/>
-              </a:defRPr>
-            </a:pPr>
-            <a:r>
-              <a:t>Emergency Incident Protocol</a:t>
-            </a:r>
-          </a:p>
-          <a:p>
-            <a:pPr>
-              <a:spcAft>
-                <a:spcPts val="1400"/>
-              </a:spcAft>
-              <a:defRPr sz="1300" b="1">
-                <a:solidFill>
-                  <a:srgbClr val="D97706"/>
-                </a:solidFill>
-                <a:latin typeface="Calibri"/>
-              </a:defRPr>
-            </a:pPr>
-            <a:r>
-              <a:t>Immediate Stop &amp; Evacuation</a:t>
-            </a:r>
-          </a:p>
-          <a:p>
-            <a:pPr>
-              <a:spcAft>
-                <a:spcPts val="900"/>
-              </a:spcAft>
-              <a:defRPr sz="1500">
-                <a:solidFill>
-                  <a:srgbClr val="1E293B"/>
-                </a:solidFill>
-                <a:latin typeface="Calibri"/>
-              </a:defRPr>
-            </a:pPr>
-            <a:r>
-              <a:t>• Stop Work Authority (SWA): Any worker has the right to halt work instantly</a:t>
-            </a:r>
-          </a:p>
-          <a:p>
-            <a:pPr>
-              <a:spcAft>
-                <a:spcPts val="900"/>
-              </a:spcAft>
-              <a:defRPr sz="1500">
-                <a:solidFill>
-                  <a:srgbClr val="1E293B"/>
-                </a:solidFill>
-                <a:latin typeface="Calibri"/>
-              </a:defRPr>
-            </a:pPr>
-            <a:r>
-              <a:t>• Alarm Activation: Sirens sound -&gt; equipment shut down, crew musters</a:t>
-            </a:r>
-          </a:p>
-          <a:p>
-            <a:pPr>
-              <a:spcAft>
-                <a:spcPts val="900"/>
-              </a:spcAft>
-              <a:defRPr sz="1500">
-                <a:solidFill>
-                  <a:srgbClr val="1E293B"/>
-                </a:solidFill>
-                <a:latin typeface="Calibri"/>
-              </a:defRPr>
-            </a:pPr>
-            <a:r>
-              <a:t>• Automatic Invalidation: All active permits in the area voided immediately</a:t>
-            </a:r>
-          </a:p>
-          <a:p>
-            <a:pPr>
-              <a:spcAft>
-                <a:spcPts val="900"/>
-              </a:spcAft>
-              <a:defRPr sz="1500">
-                <a:solidFill>
-                  <a:srgbClr val="1E293B"/>
-                </a:solidFill>
-                <a:latin typeface="Calibri"/>
-              </a:defRPr>
-            </a:pPr>
-            <a:r>
-              <a:t>• Mandatory Reset: Root cause fixed, fresh gas test &amp; new permit issued</a:t>
+              <a:defRPr sz="1350" b="1">
+                <a:solidFill>
+                  <a:srgbClr val="0F1E36"/>
+                </a:solidFill>
+                <a:latin typeface="Calibri"/>
+              </a:defRPr>
+            </a:pPr>
+            <a:r>
+              <a:t>Takeaway: Together, SIMOPS and incident management strengthen operational visibility around active work.</a:t>
             </a:r>
           </a:p>
         </p:txBody>
